--- a/ros2_d/ros2_dashboard_with_demo_slide.pptx
+++ b/ros2_d/ros2_dashboard_with_demo_slide.pptx
@@ -88,7 +88,34 @@
                 </a:solidFill>
                 <a:latin typeface="Noto Sans CJK KR"/>
               </a:rPr>
-              <a:t>슬라이드를 이동하려면 클릭하십시오</a:t>
+              <a:t>슬라이드를 </a:t>
+            </a:r>
+            <a:r>
+              <a:rPr b="0" lang="ko-KR" sz="4400" spc="-1" strike="noStrike">
+                <a:solidFill>
+                  <a:srgbClr val="000000"/>
+                </a:solidFill>
+                <a:latin typeface="Noto Sans CJK KR"/>
+              </a:rPr>
+              <a:t>이동하려면 </a:t>
+            </a:r>
+            <a:r>
+              <a:rPr b="0" lang="ko-KR" sz="4400" spc="-1" strike="noStrike">
+                <a:solidFill>
+                  <a:srgbClr val="000000"/>
+                </a:solidFill>
+                <a:latin typeface="Noto Sans CJK KR"/>
+              </a:rPr>
+              <a:t>클릭하십시</a:t>
+            </a:r>
+            <a:r>
+              <a:rPr b="0" lang="ko-KR" sz="4400" spc="-1" strike="noStrike">
+                <a:solidFill>
+                  <a:srgbClr val="000000"/>
+                </a:solidFill>
+                <a:latin typeface="Noto Sans CJK KR"/>
+              </a:rPr>
+              <a:t>오</a:t>
             </a:r>
             <a:r>
               <a:rPr b="0" lang="en-US" sz="4400" spc="-1" strike="noStrike">
@@ -146,7 +173,7 @@
                 </a:solidFill>
                 <a:latin typeface="Noto Sans CJK KR"/>
               </a:rPr>
-              <a:t>메모 </a:t>
+              <a:t>메모 서식을 편집하려면 </a:t>
             </a:r>
             <a:r>
               <a:rPr b="0" lang="ko-KR" sz="2000" spc="-1" strike="noStrike">
@@ -155,124 +182,7 @@
                 </a:solidFill>
                 <a:latin typeface="Noto Sans CJK KR"/>
               </a:rPr>
-              <a:t>서</a:t>
-            </a:r>
-            <a:r>
-              <a:rPr b="0" lang="ko-KR" sz="2000" spc="-1" strike="noStrike">
-                <a:solidFill>
-                  <a:srgbClr val="000000"/>
-                </a:solidFill>
-                <a:latin typeface="Noto Sans CJK KR"/>
-              </a:rPr>
-              <a:t>식</a:t>
-            </a:r>
-            <a:r>
-              <a:rPr b="0" lang="ko-KR" sz="2000" spc="-1" strike="noStrike">
-                <a:solidFill>
-                  <a:srgbClr val="000000"/>
-                </a:solidFill>
-                <a:latin typeface="Noto Sans CJK KR"/>
-              </a:rPr>
-              <a:t>을 </a:t>
-            </a:r>
-            <a:r>
-              <a:rPr b="0" lang="ko-KR" sz="2000" spc="-1" strike="noStrike">
-                <a:solidFill>
-                  <a:srgbClr val="000000"/>
-                </a:solidFill>
-                <a:latin typeface="Noto Sans CJK KR"/>
-              </a:rPr>
-              <a:t>편</a:t>
-            </a:r>
-            <a:r>
-              <a:rPr b="0" lang="ko-KR" sz="2000" spc="-1" strike="noStrike">
-                <a:solidFill>
-                  <a:srgbClr val="000000"/>
-                </a:solidFill>
-                <a:latin typeface="Noto Sans CJK KR"/>
-              </a:rPr>
-              <a:t>집</a:t>
-            </a:r>
-            <a:r>
-              <a:rPr b="0" lang="ko-KR" sz="2000" spc="-1" strike="noStrike">
-                <a:solidFill>
-                  <a:srgbClr val="000000"/>
-                </a:solidFill>
-                <a:latin typeface="Noto Sans CJK KR"/>
-              </a:rPr>
-              <a:t>하</a:t>
-            </a:r>
-            <a:r>
-              <a:rPr b="0" lang="ko-KR" sz="2000" spc="-1" strike="noStrike">
-                <a:solidFill>
-                  <a:srgbClr val="000000"/>
-                </a:solidFill>
-                <a:latin typeface="Noto Sans CJK KR"/>
-              </a:rPr>
-              <a:t>려</a:t>
-            </a:r>
-            <a:r>
-              <a:rPr b="0" lang="ko-KR" sz="2000" spc="-1" strike="noStrike">
-                <a:solidFill>
-                  <a:srgbClr val="000000"/>
-                </a:solidFill>
-                <a:latin typeface="Noto Sans CJK KR"/>
-              </a:rPr>
-              <a:t>면 </a:t>
-            </a:r>
-            <a:r>
-              <a:rPr b="0" lang="ko-KR" sz="2000" spc="-1" strike="noStrike">
-                <a:solidFill>
-                  <a:srgbClr val="000000"/>
-                </a:solidFill>
-                <a:latin typeface="Noto Sans CJK KR"/>
-              </a:rPr>
-              <a:t>클</a:t>
-            </a:r>
-            <a:r>
-              <a:rPr b="0" lang="ko-KR" sz="2000" spc="-1" strike="noStrike">
-                <a:solidFill>
-                  <a:srgbClr val="000000"/>
-                </a:solidFill>
-                <a:latin typeface="Noto Sans CJK KR"/>
-              </a:rPr>
-              <a:t>릭</a:t>
-            </a:r>
-            <a:r>
-              <a:rPr b="0" lang="ko-KR" sz="2000" spc="-1" strike="noStrike">
-                <a:solidFill>
-                  <a:srgbClr val="000000"/>
-                </a:solidFill>
-                <a:latin typeface="Noto Sans CJK KR"/>
-              </a:rPr>
-              <a:t>하</a:t>
-            </a:r>
-            <a:r>
-              <a:rPr b="0" lang="ko-KR" sz="2000" spc="-1" strike="noStrike">
-                <a:solidFill>
-                  <a:srgbClr val="000000"/>
-                </a:solidFill>
-                <a:latin typeface="Noto Sans CJK KR"/>
-              </a:rPr>
-              <a:t>십</a:t>
-            </a:r>
-            <a:r>
-              <a:rPr b="0" lang="ko-KR" sz="2000" spc="-1" strike="noStrike">
-                <a:solidFill>
-                  <a:srgbClr val="000000"/>
-                </a:solidFill>
-                <a:latin typeface="Noto Sans CJK KR"/>
-              </a:rPr>
-              <a:t>시</a:t>
-            </a:r>
-            <a:r>
-              <a:rPr b="0" lang="ko-KR" sz="2000" spc="-1" strike="noStrike">
-                <a:solidFill>
-                  <a:srgbClr val="000000"/>
-                </a:solidFill>
-                <a:latin typeface="Noto Sans CJK KR"/>
-              </a:rPr>
-              <a:t>오</a:t>
+              <a:t>클릭하십시오</a:t>
             </a:r>
             <a:r>
               <a:rPr b="0" lang="en-US" sz="2000" spc="-1" strike="noStrike">
@@ -503,7 +413,7 @@
             <a:pPr indent="0" algn="r">
               <a:buNone/>
             </a:pPr>
-            <a:fld id="{E3F3B6BA-A346-410E-A624-D55DA89C28CF}" type="slidenum">
+            <a:fld id="{956370F8-654A-4A76-AC57-B52E2CDBBE66}" type="slidenum">
               <a:rPr b="0" lang="en-US" sz="1400" spc="-1" strike="noStrike">
                 <a:solidFill>
                   <a:srgbClr val="000000"/>
@@ -5072,16 +4982,7 @@
                 </a:solidFill>
                 <a:latin typeface="Noto Sans CJK KR"/>
               </a:rPr>
-              <a:t>핵심 한 </a:t>
-            </a:r>
-            <a:r>
-              <a:rPr b="0" lang="ko-KR" sz="2000" spc="-1" strike="noStrike">
-                <a:solidFill>
-                  <a:srgbClr val="000000"/>
-                </a:solidFill>
-                <a:latin typeface="Noto Sans CJK KR"/>
-              </a:rPr>
-              <a:t>문장</a:t>
+              <a:t>핵심 한 문장</a:t>
             </a:r>
             <a:endParaRPr b="0" lang="en-US" sz="2000" spc="-1" strike="noStrike">
               <a:solidFill>
@@ -5116,7 +5017,16 @@
                 </a:solidFill>
                 <a:latin typeface="Noto Sans CJK KR"/>
               </a:rPr>
-              <a:t>는 </a:t>
+              <a:t>는 타입 코드를 생성하는 단계이고 </a:t>
+            </a:r>
+            <a:r>
+              <a:rPr b="0" lang="en-US" sz="2000" spc="-1" strike="noStrike">
+                <a:solidFill>
+                  <a:srgbClr val="000000"/>
+                </a:solidFill>
+                <a:latin typeface="Noto Sans CJK KR"/>
+              </a:rPr>
+              <a:t>Apply</a:t>
             </a:r>
             <a:r>
               <a:rPr b="0" lang="ko-KR" sz="2000" spc="-1" strike="noStrike">
@@ -5125,61 +5035,7 @@
                 </a:solidFill>
                 <a:latin typeface="Noto Sans CJK KR"/>
               </a:rPr>
-              <a:t>타입 코드를 </a:t>
-            </a:r>
-            <a:r>
-              <a:rPr b="0" lang="ko-KR" sz="2000" spc="-1" strike="noStrike">
-                <a:solidFill>
-                  <a:srgbClr val="000000"/>
-                </a:solidFill>
-                <a:latin typeface="Noto Sans CJK KR"/>
-              </a:rPr>
-              <a:t>생성하는 </a:t>
-            </a:r>
-            <a:r>
-              <a:rPr b="0" lang="ko-KR" sz="2000" spc="-1" strike="noStrike">
-                <a:solidFill>
-                  <a:srgbClr val="000000"/>
-                </a:solidFill>
-                <a:latin typeface="Noto Sans CJK KR"/>
-              </a:rPr>
-              <a:t>단계이고 </a:t>
-            </a:r>
-            <a:r>
-              <a:rPr b="0" lang="en-US" sz="2000" spc="-1" strike="noStrike">
-                <a:solidFill>
-                  <a:srgbClr val="000000"/>
-                </a:solidFill>
-                <a:latin typeface="Noto Sans CJK KR"/>
-              </a:rPr>
-              <a:t>Apply</a:t>
-            </a:r>
-            <a:r>
-              <a:rPr b="0" lang="ko-KR" sz="2000" spc="-1" strike="noStrike">
-                <a:solidFill>
-                  <a:srgbClr val="000000"/>
-                </a:solidFill>
-                <a:latin typeface="Noto Sans CJK KR"/>
-              </a:rPr>
-              <a:t>는 그 </a:t>
-            </a:r>
-            <a:r>
-              <a:rPr b="0" lang="ko-KR" sz="2000" spc="-1" strike="noStrike">
-                <a:solidFill>
-                  <a:srgbClr val="000000"/>
-                </a:solidFill>
-                <a:latin typeface="Noto Sans CJK KR"/>
-              </a:rPr>
-              <a:t>앞뒤 과정을 </a:t>
-            </a:r>
-            <a:r>
-              <a:rPr b="0" lang="ko-KR" sz="2000" spc="-1" strike="noStrike">
-                <a:solidFill>
-                  <a:srgbClr val="000000"/>
-                </a:solidFill>
-                <a:latin typeface="Noto Sans CJK KR"/>
-              </a:rPr>
-              <a:t>포함합니다</a:t>
+              <a:t>는 그 앞뒤 과정을 포함합니다</a:t>
             </a:r>
             <a:r>
               <a:rPr b="0" lang="en-US" sz="2000" spc="-1" strike="noStrike">
@@ -5257,7 +5113,16 @@
                 </a:solidFill>
                 <a:latin typeface="Noto Sans CJK KR"/>
               </a:rPr>
-              <a:t>업로드한 </a:t>
+              <a:t>업로드한 파일은 정의서일 뿐 </a:t>
+            </a:r>
+            <a:r>
+              <a:rPr b="0" lang="en-US" sz="2000" spc="-1" strike="noStrike">
+                <a:solidFill>
+                  <a:srgbClr val="000000"/>
+                </a:solidFill>
+                <a:latin typeface="Noto Sans CJK KR"/>
+              </a:rPr>
+              <a:t>Python</a:t>
             </a:r>
             <a:r>
               <a:rPr b="0" lang="ko-KR" sz="2000" spc="-1" strike="noStrike">
@@ -5266,7 +5131,16 @@
                 </a:solidFill>
                 <a:latin typeface="Noto Sans CJK KR"/>
               </a:rPr>
-              <a:t>파일은 </a:t>
+              <a:t>에서 바로 </a:t>
+            </a:r>
+            <a:r>
+              <a:rPr b="0" lang="en-US" sz="2000" spc="-1" strike="noStrike">
+                <a:solidFill>
+                  <a:srgbClr val="000000"/>
+                </a:solidFill>
+                <a:latin typeface="Noto Sans CJK KR"/>
+              </a:rPr>
+              <a:t>import</a:t>
             </a:r>
             <a:r>
               <a:rPr b="0" lang="ko-KR" sz="2000" spc="-1" strike="noStrike">
@@ -5275,7 +5149,7 @@
                 </a:solidFill>
                 <a:latin typeface="Noto Sans CJK KR"/>
               </a:rPr>
-              <a:t>정의서일 뿐 </a:t>
+              <a:t>할 수 없습니다</a:t>
             </a:r>
             <a:r>
               <a:rPr b="0" lang="en-US" sz="2000" spc="-1" strike="noStrike">
@@ -5284,7 +5158,7 @@
                 </a:solidFill>
                 <a:latin typeface="Noto Sans CJK KR"/>
               </a:rPr>
-              <a:t>Python</a:t>
+              <a:t>. </a:t>
             </a:r>
             <a:r>
               <a:rPr b="0" lang="ko-KR" sz="2000" spc="-1" strike="noStrike">
@@ -5293,7 +5167,7 @@
                 </a:solidFill>
                 <a:latin typeface="Noto Sans CJK KR"/>
               </a:rPr>
-              <a:t>에서 바로 </a:t>
+              <a:t>패키지 구조와 설정 파일을 준비하고 </a:t>
             </a:r>
             <a:r>
               <a:rPr b="0" lang="en-US" sz="2000" spc="-1" strike="noStrike">
@@ -5302,7 +5176,7 @@
                 </a:solidFill>
                 <a:latin typeface="Noto Sans CJK KR"/>
               </a:rPr>
-              <a:t>import</a:t>
+              <a:t>colcon build</a:t>
             </a:r>
             <a:r>
               <a:rPr b="0" lang="ko-KR" sz="2000" spc="-1" strike="noStrike">
@@ -5311,7 +5185,16 @@
                 </a:solidFill>
                 <a:latin typeface="Noto Sans CJK KR"/>
               </a:rPr>
-              <a:t>할 </a:t>
+              <a:t>를 실행하면 </a:t>
+            </a:r>
+            <a:r>
+              <a:rPr b="0" lang="en-US" sz="2000" spc="-1" strike="noStrike">
+                <a:solidFill>
+                  <a:srgbClr val="000000"/>
+                </a:solidFill>
+                <a:latin typeface="Noto Sans CJK KR"/>
+              </a:rPr>
+              <a:t>ROS2</a:t>
             </a:r>
             <a:r>
               <a:rPr b="0" lang="ko-KR" sz="2000" spc="-1" strike="noStrike">
@@ -5320,7 +5203,16 @@
                 </a:solidFill>
                 <a:latin typeface="Noto Sans CJK KR"/>
               </a:rPr>
-              <a:t>수 없습니</a:t>
+              <a:t>가 사용할 </a:t>
+            </a:r>
+            <a:r>
+              <a:rPr b="0" lang="en-US" sz="2000" spc="-1" strike="noStrike">
+                <a:solidFill>
+                  <a:srgbClr val="000000"/>
+                </a:solidFill>
+                <a:latin typeface="Noto Sans CJK KR"/>
+              </a:rPr>
+              <a:t>Python </a:t>
             </a:r>
             <a:r>
               <a:rPr b="0" lang="ko-KR" sz="2000" spc="-1" strike="noStrike">
@@ -5329,7 +5221,7 @@
                 </a:solidFill>
                 <a:latin typeface="Noto Sans CJK KR"/>
               </a:rPr>
-              <a:t>다</a:t>
+              <a:t>타입 코드가 생성됩니다</a:t>
             </a:r>
             <a:r>
               <a:rPr b="0" lang="en-US" sz="2000" spc="-1" strike="noStrike">
@@ -5347,7 +5239,16 @@
                 </a:solidFill>
                 <a:latin typeface="Noto Sans CJK KR"/>
               </a:rPr>
-              <a:t>패키지 </a:t>
+              <a:t>설치 환경 반영과 </a:t>
+            </a:r>
+            <a:r>
+              <a:rPr b="0" lang="en-US" sz="2000" spc="-1" strike="noStrike">
+                <a:solidFill>
+                  <a:srgbClr val="000000"/>
+                </a:solidFill>
+                <a:latin typeface="Noto Sans CJK KR"/>
+              </a:rPr>
+              <a:t>import-check, registry </a:t>
             </a:r>
             <a:r>
               <a:rPr b="0" lang="ko-KR" sz="2000" spc="-1" strike="noStrike">
@@ -5356,205 +5257,7 @@
                 </a:solidFill>
                 <a:latin typeface="Noto Sans CJK KR"/>
               </a:rPr>
-              <a:t>구조와 설정 </a:t>
-            </a:r>
-            <a:r>
-              <a:rPr b="0" lang="ko-KR" sz="2000" spc="-1" strike="noStrike">
-                <a:solidFill>
-                  <a:srgbClr val="000000"/>
-                </a:solidFill>
-                <a:latin typeface="Noto Sans CJK KR"/>
-              </a:rPr>
-              <a:t>파일을 </a:t>
-            </a:r>
-            <a:r>
-              <a:rPr b="0" lang="ko-KR" sz="2000" spc="-1" strike="noStrike">
-                <a:solidFill>
-                  <a:srgbClr val="000000"/>
-                </a:solidFill>
-                <a:latin typeface="Noto Sans CJK KR"/>
-              </a:rPr>
-              <a:t>준비하고 </a:t>
-            </a:r>
-            <a:r>
-              <a:rPr b="0" lang="en-US" sz="2000" spc="-1" strike="noStrike">
-                <a:solidFill>
-                  <a:srgbClr val="000000"/>
-                </a:solidFill>
-                <a:latin typeface="Noto Sans CJK KR"/>
-              </a:rPr>
-              <a:t>colcon </a:t>
-            </a:r>
-            <a:r>
-              <a:rPr b="0" lang="en-US" sz="2000" spc="-1" strike="noStrike">
-                <a:solidFill>
-                  <a:srgbClr val="000000"/>
-                </a:solidFill>
-                <a:latin typeface="Noto Sans CJK KR"/>
-              </a:rPr>
-              <a:t>build</a:t>
-            </a:r>
-            <a:r>
-              <a:rPr b="0" lang="ko-KR" sz="2000" spc="-1" strike="noStrike">
-                <a:solidFill>
-                  <a:srgbClr val="000000"/>
-                </a:solidFill>
-                <a:latin typeface="Noto Sans CJK KR"/>
-              </a:rPr>
-              <a:t>를 </a:t>
-            </a:r>
-            <a:r>
-              <a:rPr b="0" lang="ko-KR" sz="2000" spc="-1" strike="noStrike">
-                <a:solidFill>
-                  <a:srgbClr val="000000"/>
-                </a:solidFill>
-                <a:latin typeface="Noto Sans CJK KR"/>
-              </a:rPr>
-              <a:t>실행하면 </a:t>
-            </a:r>
-            <a:r>
-              <a:rPr b="0" lang="en-US" sz="2000" spc="-1" strike="noStrike">
-                <a:solidFill>
-                  <a:srgbClr val="000000"/>
-                </a:solidFill>
-                <a:latin typeface="Noto Sans CJK KR"/>
-              </a:rPr>
-              <a:t>ROS2</a:t>
-            </a:r>
-            <a:r>
-              <a:rPr b="0" lang="ko-KR" sz="2000" spc="-1" strike="noStrike">
-                <a:solidFill>
-                  <a:srgbClr val="000000"/>
-                </a:solidFill>
-                <a:latin typeface="Noto Sans CJK KR"/>
-              </a:rPr>
-              <a:t>가 </a:t>
-            </a:r>
-            <a:r>
-              <a:rPr b="0" lang="ko-KR" sz="2000" spc="-1" strike="noStrike">
-                <a:solidFill>
-                  <a:srgbClr val="000000"/>
-                </a:solidFill>
-                <a:latin typeface="Noto Sans CJK KR"/>
-              </a:rPr>
-              <a:t>사용할 </a:t>
-            </a:r>
-            <a:r>
-              <a:rPr b="0" lang="en-US" sz="2000" spc="-1" strike="noStrike">
-                <a:solidFill>
-                  <a:srgbClr val="000000"/>
-                </a:solidFill>
-                <a:latin typeface="Noto Sans CJK KR"/>
-              </a:rPr>
-              <a:t>Python </a:t>
-            </a:r>
-            <a:r>
-              <a:rPr b="0" lang="ko-KR" sz="2000" spc="-1" strike="noStrike">
-                <a:solidFill>
-                  <a:srgbClr val="000000"/>
-                </a:solidFill>
-                <a:latin typeface="Noto Sans CJK KR"/>
-              </a:rPr>
-              <a:t>타입 코드가 </a:t>
-            </a:r>
-            <a:r>
-              <a:rPr b="0" lang="ko-KR" sz="2000" spc="-1" strike="noStrike">
-                <a:solidFill>
-                  <a:srgbClr val="000000"/>
-                </a:solidFill>
-                <a:latin typeface="Noto Sans CJK KR"/>
-              </a:rPr>
-              <a:t>생성됩니다</a:t>
-            </a:r>
-            <a:r>
-              <a:rPr b="0" lang="en-US" sz="2000" spc="-1" strike="noStrike">
-                <a:solidFill>
-                  <a:srgbClr val="000000"/>
-                </a:solidFill>
-                <a:latin typeface="Noto Sans CJK KR"/>
-              </a:rPr>
-              <a:t>. </a:t>
-            </a:r>
-            <a:r>
-              <a:rPr b="0" lang="ko-KR" sz="2000" spc="-1" strike="noStrike">
-                <a:solidFill>
-                  <a:srgbClr val="000000"/>
-                </a:solidFill>
-                <a:latin typeface="Noto Sans CJK KR"/>
-              </a:rPr>
-              <a:t>설치 환경 </a:t>
-            </a:r>
-            <a:r>
-              <a:rPr b="0" lang="ko-KR" sz="2000" spc="-1" strike="noStrike">
-                <a:solidFill>
-                  <a:srgbClr val="000000"/>
-                </a:solidFill>
-                <a:latin typeface="Noto Sans CJK KR"/>
-              </a:rPr>
-              <a:t>반영과 </a:t>
-            </a:r>
-            <a:r>
-              <a:rPr b="0" lang="en-US" sz="2000" spc="-1" strike="noStrike">
-                <a:solidFill>
-                  <a:srgbClr val="000000"/>
-                </a:solidFill>
-                <a:latin typeface="Noto Sans CJK KR"/>
-              </a:rPr>
-              <a:t>import-</a:t>
-            </a:r>
-            <a:r>
-              <a:rPr b="0" lang="en-US" sz="2000" spc="-1" strike="noStrike">
-                <a:solidFill>
-                  <a:srgbClr val="000000"/>
-                </a:solidFill>
-                <a:latin typeface="Noto Sans CJK KR"/>
-              </a:rPr>
-              <a:t>check, </a:t>
-            </a:r>
-            <a:r>
-              <a:rPr b="0" lang="en-US" sz="2000" spc="-1" strike="noStrike">
-                <a:solidFill>
-                  <a:srgbClr val="000000"/>
-                </a:solidFill>
-                <a:latin typeface="Noto Sans CJK KR"/>
-              </a:rPr>
-              <a:t>registry </a:t>
-            </a:r>
-            <a:r>
-              <a:rPr b="0" lang="ko-KR" sz="2000" spc="-1" strike="noStrike">
-                <a:solidFill>
-                  <a:srgbClr val="000000"/>
-                </a:solidFill>
-                <a:latin typeface="Noto Sans CJK KR"/>
-              </a:rPr>
-              <a:t>상태 </a:t>
-            </a:r>
-            <a:r>
-              <a:rPr b="0" lang="ko-KR" sz="2000" spc="-1" strike="noStrike">
-                <a:solidFill>
-                  <a:srgbClr val="000000"/>
-                </a:solidFill>
-                <a:latin typeface="Noto Sans CJK KR"/>
-              </a:rPr>
-              <a:t>갱신까지 </a:t>
-            </a:r>
-            <a:r>
-              <a:rPr b="0" lang="ko-KR" sz="2000" spc="-1" strike="noStrike">
-                <a:solidFill>
-                  <a:srgbClr val="000000"/>
-                </a:solidFill>
-                <a:latin typeface="Noto Sans CJK KR"/>
-              </a:rPr>
-              <a:t>묶은 상위 </a:t>
-            </a:r>
-            <a:r>
-              <a:rPr b="0" lang="ko-KR" sz="2000" spc="-1" strike="noStrike">
-                <a:solidFill>
-                  <a:srgbClr val="000000"/>
-                </a:solidFill>
-                <a:latin typeface="Noto Sans CJK KR"/>
-              </a:rPr>
-              <a:t>흐름이 </a:t>
+              <a:t>상태 갱신까지 묶은 상위 흐름이 </a:t>
             </a:r>
             <a:r>
               <a:rPr b="0" lang="en-US" sz="2000" spc="-1" strike="noStrike">
@@ -5624,16 +5327,7 @@
                 </a:solidFill>
                 <a:latin typeface="Noto Sans CJK KR"/>
               </a:rPr>
-              <a:t>어려운 용어 </a:t>
-            </a:r>
-            <a:r>
-              <a:rPr b="0" lang="ko-KR" sz="2000" spc="-1" strike="noStrike">
-                <a:solidFill>
-                  <a:srgbClr val="000000"/>
-                </a:solidFill>
-                <a:latin typeface="Noto Sans CJK KR"/>
-              </a:rPr>
-              <a:t>쉽게 설명</a:t>
+              <a:t>어려운 용어 쉽게 설명</a:t>
             </a:r>
             <a:endParaRPr b="0" lang="en-US" sz="2000" spc="-1" strike="noStrike">
               <a:solidFill>
@@ -5659,7 +5353,16 @@
                 </a:solidFill>
                 <a:latin typeface="Noto Sans CJK KR"/>
               </a:rPr>
-              <a:t>colcon </a:t>
+              <a:t>colcon build</a:t>
+            </a:r>
+            <a:r>
+              <a:rPr b="0" lang="ko-KR" sz="2000" spc="-1" strike="noStrike">
+                <a:solidFill>
+                  <a:srgbClr val="000000"/>
+                </a:solidFill>
+                <a:latin typeface="Noto Sans CJK KR"/>
+              </a:rPr>
+              <a:t>는 </a:t>
             </a:r>
             <a:r>
               <a:rPr b="0" lang="en-US" sz="2000" spc="-1" strike="noStrike">
@@ -5668,7 +5371,7 @@
                 </a:solidFill>
                 <a:latin typeface="Noto Sans CJK KR"/>
               </a:rPr>
-              <a:t>build</a:t>
+              <a:t>ROS2 workspace</a:t>
             </a:r>
             <a:r>
               <a:rPr b="0" lang="ko-KR" sz="2000" spc="-1" strike="noStrike">
@@ -5677,7 +5380,7 @@
                 </a:solidFill>
                 <a:latin typeface="Noto Sans CJK KR"/>
               </a:rPr>
-              <a:t>는 </a:t>
+              <a:t>의 패키지를 빌드하는 명령입니다</a:t>
             </a:r>
             <a:r>
               <a:rPr b="0" lang="en-US" sz="2000" spc="-1" strike="noStrike">
@@ -5686,7 +5389,16 @@
                 </a:solidFill>
                 <a:latin typeface="Noto Sans CJK KR"/>
               </a:rPr>
-              <a:t>ROS2 </a:t>
+              <a:t>. import-check</a:t>
+            </a:r>
+            <a:r>
+              <a:rPr b="0" lang="ko-KR" sz="2000" spc="-1" strike="noStrike">
+                <a:solidFill>
+                  <a:srgbClr val="000000"/>
+                </a:solidFill>
+                <a:latin typeface="Noto Sans CJK KR"/>
+              </a:rPr>
+              <a:t>는 생성된 </a:t>
             </a:r>
             <a:r>
               <a:rPr b="0" lang="en-US" sz="2000" spc="-1" strike="noStrike">
@@ -5695,7 +5407,16 @@
                 </a:solidFill>
                 <a:latin typeface="Noto Sans CJK KR"/>
               </a:rPr>
-              <a:t>workspac</a:t>
+              <a:t>Python </a:t>
+            </a:r>
+            <a:r>
+              <a:rPr b="0" lang="ko-KR" sz="2000" spc="-1" strike="noStrike">
+                <a:solidFill>
+                  <a:srgbClr val="000000"/>
+                </a:solidFill>
+                <a:latin typeface="Noto Sans CJK KR"/>
+              </a:rPr>
+              <a:t>타입을 </a:t>
             </a:r>
             <a:r>
               <a:rPr b="0" lang="en-US" sz="2000" spc="-1" strike="noStrike">
@@ -5704,7 +5425,7 @@
                 </a:solidFill>
                 <a:latin typeface="Noto Sans CJK KR"/>
               </a:rPr>
-              <a:t>e</a:t>
+              <a:t>Backend</a:t>
             </a:r>
             <a:r>
               <a:rPr b="0" lang="ko-KR" sz="2000" spc="-1" strike="noStrike">
@@ -5713,142 +5434,7 @@
                 </a:solidFill>
                 <a:latin typeface="Noto Sans CJK KR"/>
               </a:rPr>
-              <a:t>의 </a:t>
-            </a:r>
-            <a:r>
-              <a:rPr b="0" lang="ko-KR" sz="2000" spc="-1" strike="noStrike">
-                <a:solidFill>
-                  <a:srgbClr val="000000"/>
-                </a:solidFill>
-                <a:latin typeface="Noto Sans CJK KR"/>
-              </a:rPr>
-              <a:t>패키지를 </a:t>
-            </a:r>
-            <a:r>
-              <a:rPr b="0" lang="ko-KR" sz="2000" spc="-1" strike="noStrike">
-                <a:solidFill>
-                  <a:srgbClr val="000000"/>
-                </a:solidFill>
-                <a:latin typeface="Noto Sans CJK KR"/>
-              </a:rPr>
-              <a:t>빌드하는 </a:t>
-            </a:r>
-            <a:r>
-              <a:rPr b="0" lang="ko-KR" sz="2000" spc="-1" strike="noStrike">
-                <a:solidFill>
-                  <a:srgbClr val="000000"/>
-                </a:solidFill>
-                <a:latin typeface="Noto Sans CJK KR"/>
-              </a:rPr>
-              <a:t>명령입니다</a:t>
-            </a:r>
-            <a:r>
-              <a:rPr b="0" lang="en-US" sz="2000" spc="-1" strike="noStrike">
-                <a:solidFill>
-                  <a:srgbClr val="000000"/>
-                </a:solidFill>
-                <a:latin typeface="Noto Sans CJK KR"/>
-              </a:rPr>
-              <a:t>. </a:t>
-            </a:r>
-            <a:r>
-              <a:rPr b="0" lang="en-US" sz="2000" spc="-1" strike="noStrike">
-                <a:solidFill>
-                  <a:srgbClr val="000000"/>
-                </a:solidFill>
-                <a:latin typeface="Noto Sans CJK KR"/>
-              </a:rPr>
-              <a:t>import-</a:t>
-            </a:r>
-            <a:r>
-              <a:rPr b="0" lang="en-US" sz="2000" spc="-1" strike="noStrike">
-                <a:solidFill>
-                  <a:srgbClr val="000000"/>
-                </a:solidFill>
-                <a:latin typeface="Noto Sans CJK KR"/>
-              </a:rPr>
-              <a:t>check</a:t>
-            </a:r>
-            <a:r>
-              <a:rPr b="0" lang="ko-KR" sz="2000" spc="-1" strike="noStrike">
-                <a:solidFill>
-                  <a:srgbClr val="000000"/>
-                </a:solidFill>
-                <a:latin typeface="Noto Sans CJK KR"/>
-              </a:rPr>
-              <a:t>는 </a:t>
-            </a:r>
-            <a:r>
-              <a:rPr b="0" lang="ko-KR" sz="2000" spc="-1" strike="noStrike">
-                <a:solidFill>
-                  <a:srgbClr val="000000"/>
-                </a:solidFill>
-                <a:latin typeface="Noto Sans CJK KR"/>
-              </a:rPr>
-              <a:t>생성된 </a:t>
-            </a:r>
-            <a:r>
-              <a:rPr b="0" lang="en-US" sz="2000" spc="-1" strike="noStrike">
-                <a:solidFill>
-                  <a:srgbClr val="000000"/>
-                </a:solidFill>
-                <a:latin typeface="Noto Sans CJK KR"/>
-              </a:rPr>
-              <a:t>Python </a:t>
-            </a:r>
-            <a:r>
-              <a:rPr b="0" lang="ko-KR" sz="2000" spc="-1" strike="noStrike">
-                <a:solidFill>
-                  <a:srgbClr val="000000"/>
-                </a:solidFill>
-                <a:latin typeface="Noto Sans CJK KR"/>
-              </a:rPr>
-              <a:t>타입을 </a:t>
-            </a:r>
-            <a:r>
-              <a:rPr b="0" lang="en-US" sz="2000" spc="-1" strike="noStrike">
-                <a:solidFill>
-                  <a:srgbClr val="000000"/>
-                </a:solidFill>
-                <a:latin typeface="Noto Sans CJK KR"/>
-              </a:rPr>
-              <a:t>Backend</a:t>
-            </a:r>
-            <a:r>
-              <a:rPr b="0" lang="ko-KR" sz="2000" spc="-1" strike="noStrike">
-                <a:solidFill>
-                  <a:srgbClr val="000000"/>
-                </a:solidFill>
-                <a:latin typeface="Noto Sans CJK KR"/>
-              </a:rPr>
-              <a:t>가 실제로 </a:t>
-            </a:r>
-            <a:r>
-              <a:rPr b="0" lang="ko-KR" sz="2000" spc="-1" strike="noStrike">
-                <a:solidFill>
-                  <a:srgbClr val="000000"/>
-                </a:solidFill>
-                <a:latin typeface="Noto Sans CJK KR"/>
-              </a:rPr>
-              <a:t>불러올 수 </a:t>
-            </a:r>
-            <a:r>
-              <a:rPr b="0" lang="ko-KR" sz="2000" spc="-1" strike="noStrike">
-                <a:solidFill>
-                  <a:srgbClr val="000000"/>
-                </a:solidFill>
-                <a:latin typeface="Noto Sans CJK KR"/>
-              </a:rPr>
-              <a:t>있는지 </a:t>
-            </a:r>
-            <a:r>
-              <a:rPr b="0" lang="ko-KR" sz="2000" spc="-1" strike="noStrike">
-                <a:solidFill>
-                  <a:srgbClr val="000000"/>
-                </a:solidFill>
-                <a:latin typeface="Noto Sans CJK KR"/>
-              </a:rPr>
-              <a:t>확인합니다</a:t>
+              <a:t>가 실제로 불러올 수 있는지 확인합니다</a:t>
             </a:r>
             <a:r>
               <a:rPr b="0" lang="en-US" sz="2000" spc="-1" strike="noStrike">
@@ -5935,34 +5521,7 @@
                 </a:solidFill>
                 <a:latin typeface="Noto Sans CJK KR"/>
               </a:rPr>
-              <a:t>성공이면 </a:t>
-            </a:r>
-            <a:r>
-              <a:rPr b="0" lang="ko-KR" sz="2000" spc="-1" strike="noStrike">
-                <a:solidFill>
-                  <a:srgbClr val="000000"/>
-                </a:solidFill>
-                <a:latin typeface="Noto Sans CJK KR"/>
-              </a:rPr>
-              <a:t>바로 실행 </a:t>
-            </a:r>
-            <a:r>
-              <a:rPr b="0" lang="ko-KR" sz="2000" spc="-1" strike="noStrike">
-                <a:solidFill>
-                  <a:srgbClr val="000000"/>
-                </a:solidFill>
-                <a:latin typeface="Noto Sans CJK KR"/>
-              </a:rPr>
-              <a:t>가능한가</a:t>
-            </a:r>
-            <a:r>
-              <a:rPr b="0" lang="ko-KR" sz="2000" spc="-1" strike="noStrike">
-                <a:solidFill>
-                  <a:srgbClr val="000000"/>
-                </a:solidFill>
-                <a:latin typeface="Noto Sans CJK KR"/>
-              </a:rPr>
-              <a:t>요</a:t>
+              <a:t>성공이면 바로 실행 가능한가요</a:t>
             </a:r>
             <a:r>
               <a:rPr b="0" lang="en-US" sz="2000" spc="-1" strike="noStrike">
@@ -6040,7 +5599,16 @@
                 </a:solidFill>
                 <a:latin typeface="Noto Sans CJK KR"/>
               </a:rPr>
-              <a:t>항상 </a:t>
+              <a:t>항상 그렇지는 않습니다</a:t>
+            </a:r>
+            <a:r>
+              <a:rPr b="0" lang="en-US" sz="2000" spc="-1" strike="noStrike">
+                <a:solidFill>
+                  <a:srgbClr val="000000"/>
+                </a:solidFill>
+                <a:latin typeface="Noto Sans CJK KR"/>
+              </a:rPr>
+              <a:t>. install </a:t>
             </a:r>
             <a:r>
               <a:rPr b="0" lang="ko-KR" sz="2000" spc="-1" strike="noStrike">
@@ -6049,7 +5617,16 @@
                 </a:solidFill>
                 <a:latin typeface="Noto Sans CJK KR"/>
               </a:rPr>
-              <a:t>그렇지는 </a:t>
+              <a:t>환경 반영과 </a:t>
+            </a:r>
+            <a:r>
+              <a:rPr b="0" lang="en-US" sz="2000" spc="-1" strike="noStrike">
+                <a:solidFill>
+                  <a:srgbClr val="000000"/>
+                </a:solidFill>
+                <a:latin typeface="Noto Sans CJK KR"/>
+              </a:rPr>
+              <a:t>import-check</a:t>
             </a:r>
             <a:r>
               <a:rPr b="0" lang="ko-KR" sz="2000" spc="-1" strike="noStrike">
@@ -6058,7 +5635,7 @@
                 </a:solidFill>
                 <a:latin typeface="Noto Sans CJK KR"/>
               </a:rPr>
-              <a:t>않습니다</a:t>
+              <a:t>까지 통과해 </a:t>
             </a:r>
             <a:r>
               <a:rPr b="0" lang="en-US" sz="2000" spc="-1" strike="noStrike">
@@ -6067,7 +5644,16 @@
                 </a:solidFill>
                 <a:latin typeface="Noto Sans CJK KR"/>
               </a:rPr>
-              <a:t>. </a:t>
+              <a:t>Backend</a:t>
+            </a:r>
+            <a:r>
+              <a:rPr b="0" lang="ko-KR" sz="2000" spc="-1" strike="noStrike">
+                <a:solidFill>
+                  <a:srgbClr val="000000"/>
+                </a:solidFill>
+                <a:latin typeface="Noto Sans CJK KR"/>
+              </a:rPr>
+              <a:t>에서 </a:t>
             </a:r>
             <a:r>
               <a:rPr b="0" lang="en-US" sz="2000" spc="-1" strike="noStrike">
@@ -6076,7 +5662,7 @@
                 </a:solidFill>
                 <a:latin typeface="Noto Sans CJK KR"/>
               </a:rPr>
-              <a:t>install </a:t>
+              <a:t>import </a:t>
             </a:r>
             <a:r>
               <a:rPr b="0" lang="ko-KR" sz="2000" spc="-1" strike="noStrike">
@@ -6085,115 +5671,7 @@
                 </a:solidFill>
                 <a:latin typeface="Noto Sans CJK KR"/>
               </a:rPr>
-              <a:t>환경 </a:t>
-            </a:r>
-            <a:r>
-              <a:rPr b="0" lang="ko-KR" sz="2000" spc="-1" strike="noStrike">
-                <a:solidFill>
-                  <a:srgbClr val="000000"/>
-                </a:solidFill>
-                <a:latin typeface="Noto Sans CJK KR"/>
-              </a:rPr>
-              <a:t>반영과 </a:t>
-            </a:r>
-            <a:r>
-              <a:rPr b="0" lang="en-US" sz="2000" spc="-1" strike="noStrike">
-                <a:solidFill>
-                  <a:srgbClr val="000000"/>
-                </a:solidFill>
-                <a:latin typeface="Noto Sans CJK KR"/>
-              </a:rPr>
-              <a:t>import-</a:t>
-            </a:r>
-            <a:r>
-              <a:rPr b="0" lang="en-US" sz="2000" spc="-1" strike="noStrike">
-                <a:solidFill>
-                  <a:srgbClr val="000000"/>
-                </a:solidFill>
-                <a:latin typeface="Noto Sans CJK KR"/>
-              </a:rPr>
-              <a:t>check</a:t>
-            </a:r>
-            <a:r>
-              <a:rPr b="0" lang="ko-KR" sz="2000" spc="-1" strike="noStrike">
-                <a:solidFill>
-                  <a:srgbClr val="000000"/>
-                </a:solidFill>
-                <a:latin typeface="Noto Sans CJK KR"/>
-              </a:rPr>
-              <a:t>까지 </a:t>
-            </a:r>
-            <a:r>
-              <a:rPr b="0" lang="ko-KR" sz="2000" spc="-1" strike="noStrike">
-                <a:solidFill>
-                  <a:srgbClr val="000000"/>
-                </a:solidFill>
-                <a:latin typeface="Noto Sans CJK KR"/>
-              </a:rPr>
-              <a:t>통과해 </a:t>
-            </a:r>
-            <a:r>
-              <a:rPr b="0" lang="en-US" sz="2000" spc="-1" strike="noStrike">
-                <a:solidFill>
-                  <a:srgbClr val="000000"/>
-                </a:solidFill>
-                <a:latin typeface="Noto Sans CJK KR"/>
-              </a:rPr>
-              <a:t>Backend</a:t>
-            </a:r>
-            <a:r>
-              <a:rPr b="0" lang="ko-KR" sz="2000" spc="-1" strike="noStrike">
-                <a:solidFill>
-                  <a:srgbClr val="000000"/>
-                </a:solidFill>
-                <a:latin typeface="Noto Sans CJK KR"/>
-              </a:rPr>
-              <a:t>에서 </a:t>
-            </a:r>
-            <a:r>
-              <a:rPr b="0" lang="en-US" sz="2000" spc="-1" strike="noStrike">
-                <a:solidFill>
-                  <a:srgbClr val="000000"/>
-                </a:solidFill>
-                <a:latin typeface="Noto Sans CJK KR"/>
-              </a:rPr>
-              <a:t>import </a:t>
-            </a:r>
-            <a:r>
-              <a:rPr b="0" lang="ko-KR" sz="2000" spc="-1" strike="noStrike">
-                <a:solidFill>
-                  <a:srgbClr val="000000"/>
-                </a:solidFill>
-                <a:latin typeface="Noto Sans CJK KR"/>
-              </a:rPr>
-              <a:t>가능한 </a:t>
-            </a:r>
-            <a:r>
-              <a:rPr b="0" lang="ko-KR" sz="2000" spc="-1" strike="noStrike">
-                <a:solidFill>
-                  <a:srgbClr val="000000"/>
-                </a:solidFill>
-                <a:latin typeface="Noto Sans CJK KR"/>
-              </a:rPr>
-              <a:t>상태인지 </a:t>
-            </a:r>
-            <a:r>
-              <a:rPr b="0" lang="ko-KR" sz="2000" spc="-1" strike="noStrike">
-                <a:solidFill>
-                  <a:srgbClr val="000000"/>
-                </a:solidFill>
-                <a:latin typeface="Noto Sans CJK KR"/>
-              </a:rPr>
-              <a:t>확인해야 </a:t>
-            </a:r>
-            <a:r>
-              <a:rPr b="0" lang="ko-KR" sz="2000" spc="-1" strike="noStrike">
-                <a:solidFill>
-                  <a:srgbClr val="000000"/>
-                </a:solidFill>
-                <a:latin typeface="Noto Sans CJK KR"/>
-              </a:rPr>
-              <a:t>합니다</a:t>
+              <a:t>가능한 상태인지 확인해야 합니다</a:t>
             </a:r>
             <a:r>
               <a:rPr b="0" lang="en-US" sz="2000" spc="-1" strike="noStrike">
@@ -7126,16 +6604,7 @@
                 </a:solidFill>
                 <a:latin typeface="Noto Sans CJK KR"/>
               </a:rPr>
-              <a:t>핵</a:t>
-            </a:r>
-            <a:r>
-              <a:rPr b="0" lang="ko-KR" sz="2000" spc="-1" strike="noStrike">
-                <a:solidFill>
-                  <a:srgbClr val="000000"/>
-                </a:solidFill>
-                <a:latin typeface="Noto Sans CJK KR"/>
-              </a:rPr>
-              <a:t>심</a:t>
+              <a:t>핵심</a:t>
             </a:r>
             <a:r>
               <a:rPr b="0" lang="en-US" sz="2000" spc="-1" strike="noStrike">
@@ -7144,43 +6613,7 @@
                 </a:solidFill>
                 <a:latin typeface="Noto Sans CJK KR"/>
               </a:rPr>
-              <a:t> </a:t>
-            </a:r>
-            <a:r>
-              <a:rPr b="0" lang="ko-KR" sz="2000" spc="-1" strike="noStrike">
-                <a:solidFill>
-                  <a:srgbClr val="000000"/>
-                </a:solidFill>
-                <a:latin typeface="Noto Sans CJK KR"/>
-              </a:rPr>
-              <a:t>한</a:t>
-            </a:r>
-            <a:r>
-              <a:rPr b="0" lang="en-US" sz="2000" spc="-1" strike="noStrike">
-                <a:solidFill>
-                  <a:srgbClr val="000000"/>
-                </a:solidFill>
-                <a:latin typeface="Noto Sans CJK KR"/>
-              </a:rPr>
-              <a:t> </a:t>
-            </a:r>
-            <a:r>
-              <a:rPr b="0" lang="ko-KR" sz="2000" spc="-1" strike="noStrike">
-                <a:solidFill>
-                  <a:srgbClr val="000000"/>
-                </a:solidFill>
-                <a:latin typeface="Noto Sans CJK KR"/>
-              </a:rPr>
-              <a:t>문</a:t>
-            </a:r>
-            <a:r>
-              <a:rPr b="0" lang="ko-KR" sz="2000" spc="-1" strike="noStrike">
-                <a:solidFill>
-                  <a:srgbClr val="000000"/>
-                </a:solidFill>
-                <a:latin typeface="Noto Sans CJK KR"/>
-              </a:rPr>
-              <a:t>장</a:t>
+              <a:t> 한 문장</a:t>
             </a:r>
             <a:endParaRPr b="0" lang="en-US" sz="2000" spc="-1" strike="noStrike">
               <a:solidFill>
@@ -7206,7 +6639,16 @@
                 </a:solidFill>
                 <a:latin typeface="Noto Sans CJK KR"/>
               </a:rPr>
-              <a:t>S</a:t>
+              <a:t>Service</a:t>
+            </a:r>
+            <a:r>
+              <a:rPr b="0" lang="ko-KR" sz="2000" spc="-1" strike="noStrike">
+                <a:solidFill>
+                  <a:srgbClr val="000000"/>
+                </a:solidFill>
+                <a:latin typeface="Noto Sans CJK KR"/>
+              </a:rPr>
+              <a:t>와 </a:t>
             </a:r>
             <a:r>
               <a:rPr b="0" lang="en-US" sz="2000" spc="-1" strike="noStrike">
@@ -7215,52 +6657,7 @@
                 </a:solidFill>
                 <a:latin typeface="Noto Sans CJK KR"/>
               </a:rPr>
-              <a:t>e</a:t>
-            </a:r>
-            <a:r>
-              <a:rPr b="0" lang="en-US" sz="2000" spc="-1" strike="noStrike">
-                <a:solidFill>
-                  <a:srgbClr val="000000"/>
-                </a:solidFill>
-                <a:latin typeface="Noto Sans CJK KR"/>
-              </a:rPr>
-              <a:t>r</a:t>
-            </a:r>
-            <a:r>
-              <a:rPr b="0" lang="en-US" sz="2000" spc="-1" strike="noStrike">
-                <a:solidFill>
-                  <a:srgbClr val="000000"/>
-                </a:solidFill>
-                <a:latin typeface="Noto Sans CJK KR"/>
-              </a:rPr>
-              <a:t>v</a:t>
-            </a:r>
-            <a:r>
-              <a:rPr b="0" lang="en-US" sz="2000" spc="-1" strike="noStrike">
-                <a:solidFill>
-                  <a:srgbClr val="000000"/>
-                </a:solidFill>
-                <a:latin typeface="Noto Sans CJK KR"/>
-              </a:rPr>
-              <a:t>i</a:t>
-            </a:r>
-            <a:r>
-              <a:rPr b="0" lang="en-US" sz="2000" spc="-1" strike="noStrike">
-                <a:solidFill>
-                  <a:srgbClr val="000000"/>
-                </a:solidFill>
-                <a:latin typeface="Noto Sans CJK KR"/>
-              </a:rPr>
-              <a:t>c</a:t>
-            </a:r>
-            <a:r>
-              <a:rPr b="0" lang="en-US" sz="2000" spc="-1" strike="noStrike">
-                <a:solidFill>
-                  <a:srgbClr val="000000"/>
-                </a:solidFill>
-                <a:latin typeface="Noto Sans CJK KR"/>
-              </a:rPr>
-              <a:t>e</a:t>
+              <a:t>Action</a:t>
             </a:r>
             <a:r>
               <a:rPr b="0" lang="ko-KR" sz="2000" spc="-1" strike="noStrike">
@@ -7269,304 +6666,7 @@
                 </a:solidFill>
                 <a:latin typeface="Noto Sans CJK KR"/>
               </a:rPr>
-              <a:t>와</a:t>
-            </a:r>
-            <a:r>
-              <a:rPr b="0" lang="en-US" sz="2000" spc="-1" strike="noStrike">
-                <a:solidFill>
-                  <a:srgbClr val="000000"/>
-                </a:solidFill>
-                <a:latin typeface="Noto Sans CJK KR"/>
-              </a:rPr>
-              <a:t> </a:t>
-            </a:r>
-            <a:r>
-              <a:rPr b="0" lang="en-US" sz="2000" spc="-1" strike="noStrike">
-                <a:solidFill>
-                  <a:srgbClr val="000000"/>
-                </a:solidFill>
-                <a:latin typeface="Noto Sans CJK KR"/>
-              </a:rPr>
-              <a:t>A</a:t>
-            </a:r>
-            <a:r>
-              <a:rPr b="0" lang="en-US" sz="2000" spc="-1" strike="noStrike">
-                <a:solidFill>
-                  <a:srgbClr val="000000"/>
-                </a:solidFill>
-                <a:latin typeface="Noto Sans CJK KR"/>
-              </a:rPr>
-              <a:t>c</a:t>
-            </a:r>
-            <a:r>
-              <a:rPr b="0" lang="en-US" sz="2000" spc="-1" strike="noStrike">
-                <a:solidFill>
-                  <a:srgbClr val="000000"/>
-                </a:solidFill>
-                <a:latin typeface="Noto Sans CJK KR"/>
-              </a:rPr>
-              <a:t>t</a:t>
-            </a:r>
-            <a:r>
-              <a:rPr b="0" lang="en-US" sz="2000" spc="-1" strike="noStrike">
-                <a:solidFill>
-                  <a:srgbClr val="000000"/>
-                </a:solidFill>
-                <a:latin typeface="Noto Sans CJK KR"/>
-              </a:rPr>
-              <a:t>i</a:t>
-            </a:r>
-            <a:r>
-              <a:rPr b="0" lang="en-US" sz="2000" spc="-1" strike="noStrike">
-                <a:solidFill>
-                  <a:srgbClr val="000000"/>
-                </a:solidFill>
-                <a:latin typeface="Noto Sans CJK KR"/>
-              </a:rPr>
-              <a:t>o</a:t>
-            </a:r>
-            <a:r>
-              <a:rPr b="0" lang="en-US" sz="2000" spc="-1" strike="noStrike">
-                <a:solidFill>
-                  <a:srgbClr val="000000"/>
-                </a:solidFill>
-                <a:latin typeface="Noto Sans CJK KR"/>
-              </a:rPr>
-              <a:t>n</a:t>
-            </a:r>
-            <a:r>
-              <a:rPr b="0" lang="ko-KR" sz="2000" spc="-1" strike="noStrike">
-                <a:solidFill>
-                  <a:srgbClr val="000000"/>
-                </a:solidFill>
-                <a:latin typeface="Noto Sans CJK KR"/>
-              </a:rPr>
-              <a:t>은</a:t>
-            </a:r>
-            <a:r>
-              <a:rPr b="0" lang="en-US" sz="2000" spc="-1" strike="noStrike">
-                <a:solidFill>
-                  <a:srgbClr val="000000"/>
-                </a:solidFill>
-                <a:latin typeface="Noto Sans CJK KR"/>
-              </a:rPr>
-              <a:t> </a:t>
-            </a:r>
-            <a:r>
-              <a:rPr b="0" lang="ko-KR" sz="2000" spc="-1" strike="noStrike">
-                <a:solidFill>
-                  <a:srgbClr val="000000"/>
-                </a:solidFill>
-                <a:latin typeface="Noto Sans CJK KR"/>
-              </a:rPr>
-              <a:t>둘</a:t>
-            </a:r>
-            <a:r>
-              <a:rPr b="0" lang="en-US" sz="2000" spc="-1" strike="noStrike">
-                <a:solidFill>
-                  <a:srgbClr val="000000"/>
-                </a:solidFill>
-                <a:latin typeface="Noto Sans CJK KR"/>
-              </a:rPr>
-              <a:t> </a:t>
-            </a:r>
-            <a:r>
-              <a:rPr b="0" lang="ko-KR" sz="2000" spc="-1" strike="noStrike">
-                <a:solidFill>
-                  <a:srgbClr val="000000"/>
-                </a:solidFill>
-                <a:latin typeface="Noto Sans CJK KR"/>
-              </a:rPr>
-              <a:t>다</a:t>
-            </a:r>
-            <a:r>
-              <a:rPr b="0" lang="en-US" sz="2000" spc="-1" strike="noStrike">
-                <a:solidFill>
-                  <a:srgbClr val="000000"/>
-                </a:solidFill>
-                <a:latin typeface="Noto Sans CJK KR"/>
-              </a:rPr>
-              <a:t> </a:t>
-            </a:r>
-            <a:r>
-              <a:rPr b="0" lang="ko-KR" sz="2000" spc="-1" strike="noStrike">
-                <a:solidFill>
-                  <a:srgbClr val="000000"/>
-                </a:solidFill>
-                <a:latin typeface="Noto Sans CJK KR"/>
-              </a:rPr>
-              <a:t>직</a:t>
-            </a:r>
-            <a:r>
-              <a:rPr b="0" lang="ko-KR" sz="2000" spc="-1" strike="noStrike">
-                <a:solidFill>
-                  <a:srgbClr val="000000"/>
-                </a:solidFill>
-                <a:latin typeface="Noto Sans CJK KR"/>
-              </a:rPr>
-              <a:t>접</a:t>
-            </a:r>
-            <a:r>
-              <a:rPr b="0" lang="en-US" sz="2000" spc="-1" strike="noStrike">
-                <a:solidFill>
-                  <a:srgbClr val="000000"/>
-                </a:solidFill>
-                <a:latin typeface="Noto Sans CJK KR"/>
-              </a:rPr>
-              <a:t> </a:t>
-            </a:r>
-            <a:r>
-              <a:rPr b="0" lang="ko-KR" sz="2000" spc="-1" strike="noStrike">
-                <a:solidFill>
-                  <a:srgbClr val="000000"/>
-                </a:solidFill>
-                <a:latin typeface="Noto Sans CJK KR"/>
-              </a:rPr>
-              <a:t>실</a:t>
-            </a:r>
-            <a:r>
-              <a:rPr b="0" lang="ko-KR" sz="2000" spc="-1" strike="noStrike">
-                <a:solidFill>
-                  <a:srgbClr val="000000"/>
-                </a:solidFill>
-                <a:latin typeface="Noto Sans CJK KR"/>
-              </a:rPr>
-              <a:t>행</a:t>
-            </a:r>
-            <a:r>
-              <a:rPr b="0" lang="ko-KR" sz="2000" spc="-1" strike="noStrike">
-                <a:solidFill>
-                  <a:srgbClr val="000000"/>
-                </a:solidFill>
-                <a:latin typeface="Noto Sans CJK KR"/>
-              </a:rPr>
-              <a:t>하</a:t>
-            </a:r>
-            <a:r>
-              <a:rPr b="0" lang="ko-KR" sz="2000" spc="-1" strike="noStrike">
-                <a:solidFill>
-                  <a:srgbClr val="000000"/>
-                </a:solidFill>
-                <a:latin typeface="Noto Sans CJK KR"/>
-              </a:rPr>
-              <a:t>지</a:t>
-            </a:r>
-            <a:r>
-              <a:rPr b="0" lang="ko-KR" sz="2000" spc="-1" strike="noStrike">
-                <a:solidFill>
-                  <a:srgbClr val="000000"/>
-                </a:solidFill>
-                <a:latin typeface="Noto Sans CJK KR"/>
-              </a:rPr>
-              <a:t>만</a:t>
-            </a:r>
-            <a:r>
-              <a:rPr b="0" lang="en-US" sz="2000" spc="-1" strike="noStrike">
-                <a:solidFill>
-                  <a:srgbClr val="000000"/>
-                </a:solidFill>
-                <a:latin typeface="Noto Sans CJK KR"/>
-              </a:rPr>
-              <a:t> </a:t>
-            </a:r>
-            <a:r>
-              <a:rPr b="0" lang="ko-KR" sz="2000" spc="-1" strike="noStrike">
-                <a:solidFill>
-                  <a:srgbClr val="000000"/>
-                </a:solidFill>
-                <a:latin typeface="Noto Sans CJK KR"/>
-              </a:rPr>
-              <a:t>응</a:t>
-            </a:r>
-            <a:r>
-              <a:rPr b="0" lang="ko-KR" sz="2000" spc="-1" strike="noStrike">
-                <a:solidFill>
-                  <a:srgbClr val="000000"/>
-                </a:solidFill>
-                <a:latin typeface="Noto Sans CJK KR"/>
-              </a:rPr>
-              <a:t>답</a:t>
-            </a:r>
-            <a:r>
-              <a:rPr b="0" lang="en-US" sz="2000" spc="-1" strike="noStrike">
-                <a:solidFill>
-                  <a:srgbClr val="000000"/>
-                </a:solidFill>
-                <a:latin typeface="Noto Sans CJK KR"/>
-              </a:rPr>
-              <a:t> </a:t>
-            </a:r>
-            <a:r>
-              <a:rPr b="0" lang="ko-KR" sz="2000" spc="-1" strike="noStrike">
-                <a:solidFill>
-                  <a:srgbClr val="000000"/>
-                </a:solidFill>
-                <a:latin typeface="Noto Sans CJK KR"/>
-              </a:rPr>
-              <a:t>구</a:t>
-            </a:r>
-            <a:r>
-              <a:rPr b="0" lang="ko-KR" sz="2000" spc="-1" strike="noStrike">
-                <a:solidFill>
-                  <a:srgbClr val="000000"/>
-                </a:solidFill>
-                <a:latin typeface="Noto Sans CJK KR"/>
-              </a:rPr>
-              <a:t>조</a:t>
-            </a:r>
-            <a:r>
-              <a:rPr b="0" lang="ko-KR" sz="2000" spc="-1" strike="noStrike">
-                <a:solidFill>
-                  <a:srgbClr val="000000"/>
-                </a:solidFill>
-                <a:latin typeface="Noto Sans CJK KR"/>
-              </a:rPr>
-              <a:t>가</a:t>
-            </a:r>
-            <a:r>
-              <a:rPr b="0" lang="en-US" sz="2000" spc="-1" strike="noStrike">
-                <a:solidFill>
-                  <a:srgbClr val="000000"/>
-                </a:solidFill>
-                <a:latin typeface="Noto Sans CJK KR"/>
-              </a:rPr>
-              <a:t> </a:t>
-            </a:r>
-            <a:r>
-              <a:rPr b="0" lang="ko-KR" sz="2000" spc="-1" strike="noStrike">
-                <a:solidFill>
-                  <a:srgbClr val="000000"/>
-                </a:solidFill>
-                <a:latin typeface="Noto Sans CJK KR"/>
-              </a:rPr>
-              <a:t>다</a:t>
-            </a:r>
-            <a:r>
-              <a:rPr b="0" lang="ko-KR" sz="2000" spc="-1" strike="noStrike">
-                <a:solidFill>
-                  <a:srgbClr val="000000"/>
-                </a:solidFill>
-                <a:latin typeface="Noto Sans CJK KR"/>
-              </a:rPr>
-              <a:t>릅</a:t>
-            </a:r>
-            <a:r>
-              <a:rPr b="0" lang="ko-KR" sz="2000" spc="-1" strike="noStrike">
-                <a:solidFill>
-                  <a:srgbClr val="000000"/>
-                </a:solidFill>
-                <a:latin typeface="Noto Sans CJK KR"/>
-              </a:rPr>
-              <a:t>니</a:t>
-            </a:r>
-            <a:r>
-              <a:rPr b="0" lang="ko-KR" sz="2000" spc="-1" strike="noStrike">
-                <a:solidFill>
-                  <a:srgbClr val="000000"/>
-                </a:solidFill>
-                <a:latin typeface="Noto Sans CJK KR"/>
-              </a:rPr>
-              <a:t>다</a:t>
+              <a:t>은 둘 다 직접 실행하지만 응답 구조가 다릅니다</a:t>
             </a:r>
             <a:r>
               <a:rPr b="0" lang="en-US" sz="2000" spc="-1" strike="noStrike">
@@ -7618,43 +6718,7 @@
                 </a:solidFill>
                 <a:latin typeface="Noto Sans CJK KR"/>
               </a:rPr>
-              <a:t>발</a:t>
-            </a:r>
-            <a:r>
-              <a:rPr b="0" lang="ko-KR" sz="2000" spc="-1" strike="noStrike">
-                <a:solidFill>
-                  <a:srgbClr val="000000"/>
-                </a:solidFill>
-                <a:latin typeface="Noto Sans CJK KR"/>
-              </a:rPr>
-              <a:t>표</a:t>
-            </a:r>
-            <a:r>
-              <a:rPr b="0" lang="en-US" sz="2000" spc="-1" strike="noStrike">
-                <a:solidFill>
-                  <a:srgbClr val="000000"/>
-                </a:solidFill>
-                <a:latin typeface="Noto Sans CJK KR"/>
-              </a:rPr>
-              <a:t> </a:t>
-            </a:r>
-            <a:r>
-              <a:rPr b="0" lang="ko-KR" sz="2000" spc="-1" strike="noStrike">
-                <a:solidFill>
-                  <a:srgbClr val="000000"/>
-                </a:solidFill>
-                <a:latin typeface="Noto Sans CJK KR"/>
-              </a:rPr>
-              <a:t>멘</a:t>
-            </a:r>
-            <a:r>
-              <a:rPr b="0" lang="ko-KR" sz="2000" spc="-1" strike="noStrike">
-                <a:solidFill>
-                  <a:srgbClr val="000000"/>
-                </a:solidFill>
-                <a:latin typeface="Noto Sans CJK KR"/>
-              </a:rPr>
-              <a:t>트</a:t>
+              <a:t>발표 멘트</a:t>
             </a:r>
             <a:endParaRPr b="0" lang="en-US" sz="2000" spc="-1" strike="noStrike">
               <a:solidFill>
@@ -7680,7 +6744,16 @@
                 </a:solidFill>
                 <a:latin typeface="Noto Sans CJK KR"/>
               </a:rPr>
-              <a:t>S</a:t>
+              <a:t>Service</a:t>
+            </a:r>
+            <a:r>
+              <a:rPr b="0" lang="ko-KR" sz="2000" spc="-1" strike="noStrike">
+                <a:solidFill>
+                  <a:srgbClr val="000000"/>
+                </a:solidFill>
+                <a:latin typeface="Noto Sans CJK KR"/>
+              </a:rPr>
+              <a:t>는 </a:t>
             </a:r>
             <a:r>
               <a:rPr b="0" lang="en-US" sz="2000" spc="-1" strike="noStrike">
@@ -7689,7 +6762,16 @@
                 </a:solidFill>
                 <a:latin typeface="Noto Sans CJK KR"/>
               </a:rPr>
-              <a:t>e</a:t>
+              <a:t>Request</a:t>
+            </a:r>
+            <a:r>
+              <a:rPr b="0" lang="ko-KR" sz="2000" spc="-1" strike="noStrike">
+                <a:solidFill>
+                  <a:srgbClr val="000000"/>
+                </a:solidFill>
+                <a:latin typeface="Noto Sans CJK KR"/>
+              </a:rPr>
+              <a:t>를 보내고 한 번의 </a:t>
             </a:r>
             <a:r>
               <a:rPr b="0" lang="en-US" sz="2000" spc="-1" strike="noStrike">
@@ -7698,7 +6780,16 @@
                 </a:solidFill>
                 <a:latin typeface="Noto Sans CJK KR"/>
               </a:rPr>
-              <a:t>r</a:t>
+              <a:t>Response</a:t>
+            </a:r>
+            <a:r>
+              <a:rPr b="0" lang="ko-KR" sz="2000" spc="-1" strike="noStrike">
+                <a:solidFill>
+                  <a:srgbClr val="000000"/>
+                </a:solidFill>
+                <a:latin typeface="Noto Sans CJK KR"/>
+              </a:rPr>
+              <a:t>를 받습니다</a:t>
             </a:r>
             <a:r>
               <a:rPr b="0" lang="en-US" sz="2000" spc="-1" strike="noStrike">
@@ -7707,7 +6798,16 @@
                 </a:solidFill>
                 <a:latin typeface="Noto Sans CJK KR"/>
               </a:rPr>
-              <a:t>v</a:t>
+              <a:t>. Action</a:t>
+            </a:r>
+            <a:r>
+              <a:rPr b="0" lang="ko-KR" sz="2000" spc="-1" strike="noStrike">
+                <a:solidFill>
+                  <a:srgbClr val="000000"/>
+                </a:solidFill>
+                <a:latin typeface="Noto Sans CJK KR"/>
+              </a:rPr>
+              <a:t>은 </a:t>
             </a:r>
             <a:r>
               <a:rPr b="0" lang="en-US" sz="2000" spc="-1" strike="noStrike">
@@ -7716,7 +6816,16 @@
                 </a:solidFill>
                 <a:latin typeface="Noto Sans CJK KR"/>
               </a:rPr>
-              <a:t>i</a:t>
+              <a:t>Goal</a:t>
+            </a:r>
+            <a:r>
+              <a:rPr b="0" lang="ko-KR" sz="2000" spc="-1" strike="noStrike">
+                <a:solidFill>
+                  <a:srgbClr val="000000"/>
+                </a:solidFill>
+                <a:latin typeface="Noto Sans CJK KR"/>
+              </a:rPr>
+              <a:t>을 보내고 </a:t>
             </a:r>
             <a:r>
               <a:rPr b="0" lang="en-US" sz="2000" spc="-1" strike="noStrike">
@@ -7725,7 +6834,16 @@
                 </a:solidFill>
                 <a:latin typeface="Noto Sans CJK KR"/>
               </a:rPr>
-              <a:t>c</a:t>
+              <a:t>accepted </a:t>
+            </a:r>
+            <a:r>
+              <a:rPr b="0" lang="ko-KR" sz="2000" spc="-1" strike="noStrike">
+                <a:solidFill>
+                  <a:srgbClr val="000000"/>
+                </a:solidFill>
+                <a:latin typeface="Noto Sans CJK KR"/>
+              </a:rPr>
+              <a:t>여부</a:t>
             </a:r>
             <a:r>
               <a:rPr b="0" lang="en-US" sz="2000" spc="-1" strike="noStrike">
@@ -7734,7 +6852,7 @@
                 </a:solidFill>
                 <a:latin typeface="Noto Sans CJK KR"/>
               </a:rPr>
-              <a:t>e</a:t>
+              <a:t>, </a:t>
             </a:r>
             <a:r>
               <a:rPr b="0" lang="ko-KR" sz="2000" spc="-1" strike="noStrike">
@@ -7743,7 +6861,7 @@
                 </a:solidFill>
                 <a:latin typeface="Noto Sans CJK KR"/>
               </a:rPr>
-              <a:t>는</a:t>
+              <a:t>중간 </a:t>
             </a:r>
             <a:r>
               <a:rPr b="0" lang="en-US" sz="2000" spc="-1" strike="noStrike">
@@ -7752,7 +6870,16 @@
                 </a:solidFill>
                 <a:latin typeface="Noto Sans CJK KR"/>
               </a:rPr>
-              <a:t> </a:t>
+              <a:t>Feedback, </a:t>
+            </a:r>
+            <a:r>
+              <a:rPr b="0" lang="ko-KR" sz="2000" spc="-1" strike="noStrike">
+                <a:solidFill>
+                  <a:srgbClr val="000000"/>
+                </a:solidFill>
+                <a:latin typeface="Noto Sans CJK KR"/>
+              </a:rPr>
+              <a:t>최종 </a:t>
             </a:r>
             <a:r>
               <a:rPr b="0" lang="en-US" sz="2000" spc="-1" strike="noStrike">
@@ -7761,7 +6888,16 @@
                 </a:solidFill>
                 <a:latin typeface="Noto Sans CJK KR"/>
               </a:rPr>
-              <a:t>R</a:t>
+              <a:t>Result</a:t>
+            </a:r>
+            <a:r>
+              <a:rPr b="0" lang="ko-KR" sz="2000" spc="-1" strike="noStrike">
+                <a:solidFill>
+                  <a:srgbClr val="000000"/>
+                </a:solidFill>
+                <a:latin typeface="Noto Sans CJK KR"/>
+              </a:rPr>
+              <a:t>를 받습니다</a:t>
             </a:r>
             <a:r>
               <a:rPr b="0" lang="en-US" sz="2000" spc="-1" strike="noStrike">
@@ -7770,7 +6906,16 @@
                 </a:solidFill>
                 <a:latin typeface="Noto Sans CJK KR"/>
               </a:rPr>
-              <a:t>e</a:t>
+              <a:t>. </a:t>
+            </a:r>
+            <a:r>
+              <a:rPr b="0" lang="ko-KR" sz="2000" spc="-1" strike="noStrike">
+                <a:solidFill>
+                  <a:srgbClr val="000000"/>
+                </a:solidFill>
+                <a:latin typeface="Noto Sans CJK KR"/>
+              </a:rPr>
+              <a:t>두 기능 모두 등록과 </a:t>
             </a:r>
             <a:r>
               <a:rPr b="0" lang="en-US" sz="2000" spc="-1" strike="noStrike">
@@ -7779,7 +6924,16 @@
                 </a:solidFill>
                 <a:latin typeface="Noto Sans CJK KR"/>
               </a:rPr>
-              <a:t>q</a:t>
+              <a:t>import</a:t>
+            </a:r>
+            <a:r>
+              <a:rPr b="0" lang="ko-KR" sz="2000" spc="-1" strike="noStrike">
+                <a:solidFill>
+                  <a:srgbClr val="000000"/>
+                </a:solidFill>
+                <a:latin typeface="Noto Sans CJK KR"/>
+              </a:rPr>
+              <a:t>가 가능하고</a:t>
             </a:r>
             <a:r>
               <a:rPr b="0" lang="en-US" sz="2000" spc="-1" strike="noStrike">
@@ -7788,7 +6942,16 @@
                 </a:solidFill>
                 <a:latin typeface="Noto Sans CJK KR"/>
               </a:rPr>
-              <a:t>u</a:t>
+              <a:t>, </a:t>
+            </a:r>
+            <a:r>
+              <a:rPr b="0" lang="ko-KR" sz="2000" spc="-1" strike="noStrike">
+                <a:solidFill>
+                  <a:srgbClr val="000000"/>
+                </a:solidFill>
+                <a:latin typeface="Noto Sans CJK KR"/>
+              </a:rPr>
+              <a:t>현재 </a:t>
             </a:r>
             <a:r>
               <a:rPr b="0" lang="en-US" sz="2000" spc="-1" strike="noStrike">
@@ -7797,7 +6960,16 @@
                 </a:solidFill>
                 <a:latin typeface="Noto Sans CJK KR"/>
               </a:rPr>
-              <a:t>e</a:t>
+              <a:t>Graph</a:t>
+            </a:r>
+            <a:r>
+              <a:rPr b="0" lang="ko-KR" sz="2000" spc="-1" strike="noStrike">
+                <a:solidFill>
+                  <a:srgbClr val="000000"/>
+                </a:solidFill>
+                <a:latin typeface="Noto Sans CJK KR"/>
+              </a:rPr>
+              <a:t>의 이름과 </a:t>
             </a:r>
             <a:r>
               <a:rPr b="0" lang="en-US" sz="2000" spc="-1" strike="noStrike">
@@ -7806,16 +6978,7 @@
                 </a:solidFill>
                 <a:latin typeface="Noto Sans CJK KR"/>
               </a:rPr>
-              <a:t>s</a:t>
-            </a:r>
-            <a:r>
-              <a:rPr b="0" lang="en-US" sz="2000" spc="-1" strike="noStrike">
-                <a:solidFill>
-                  <a:srgbClr val="000000"/>
-                </a:solidFill>
-                <a:latin typeface="Noto Sans CJK KR"/>
-              </a:rPr>
-              <a:t>t</a:t>
+              <a:t>full type</a:t>
             </a:r>
             <a:r>
               <a:rPr b="0" lang="ko-KR" sz="2000" spc="-1" strike="noStrike">
@@ -7824,1366 +6987,7 @@
                 </a:solidFill>
                 <a:latin typeface="Noto Sans CJK KR"/>
               </a:rPr>
-              <a:t>를</a:t>
-            </a:r>
-            <a:r>
-              <a:rPr b="0" lang="en-US" sz="2000" spc="-1" strike="noStrike">
-                <a:solidFill>
-                  <a:srgbClr val="000000"/>
-                </a:solidFill>
-                <a:latin typeface="Noto Sans CJK KR"/>
-              </a:rPr>
-              <a:t> </a:t>
-            </a:r>
-            <a:r>
-              <a:rPr b="0" lang="ko-KR" sz="2000" spc="-1" strike="noStrike">
-                <a:solidFill>
-                  <a:srgbClr val="000000"/>
-                </a:solidFill>
-                <a:latin typeface="Noto Sans CJK KR"/>
-              </a:rPr>
-              <a:t>보</a:t>
-            </a:r>
-            <a:r>
-              <a:rPr b="0" lang="ko-KR" sz="2000" spc="-1" strike="noStrike">
-                <a:solidFill>
-                  <a:srgbClr val="000000"/>
-                </a:solidFill>
-                <a:latin typeface="Noto Sans CJK KR"/>
-              </a:rPr>
-              <a:t>내</a:t>
-            </a:r>
-            <a:r>
-              <a:rPr b="0" lang="ko-KR" sz="2000" spc="-1" strike="noStrike">
-                <a:solidFill>
-                  <a:srgbClr val="000000"/>
-                </a:solidFill>
-                <a:latin typeface="Noto Sans CJK KR"/>
-              </a:rPr>
-              <a:t>고</a:t>
-            </a:r>
-            <a:r>
-              <a:rPr b="0" lang="en-US" sz="2000" spc="-1" strike="noStrike">
-                <a:solidFill>
-                  <a:srgbClr val="000000"/>
-                </a:solidFill>
-                <a:latin typeface="Noto Sans CJK KR"/>
-              </a:rPr>
-              <a:t> </a:t>
-            </a:r>
-            <a:r>
-              <a:rPr b="0" lang="ko-KR" sz="2000" spc="-1" strike="noStrike">
-                <a:solidFill>
-                  <a:srgbClr val="000000"/>
-                </a:solidFill>
-                <a:latin typeface="Noto Sans CJK KR"/>
-              </a:rPr>
-              <a:t>한</a:t>
-            </a:r>
-            <a:r>
-              <a:rPr b="0" lang="en-US" sz="2000" spc="-1" strike="noStrike">
-                <a:solidFill>
-                  <a:srgbClr val="000000"/>
-                </a:solidFill>
-                <a:latin typeface="Noto Sans CJK KR"/>
-              </a:rPr>
-              <a:t> </a:t>
-            </a:r>
-            <a:r>
-              <a:rPr b="0" lang="ko-KR" sz="2000" spc="-1" strike="noStrike">
-                <a:solidFill>
-                  <a:srgbClr val="000000"/>
-                </a:solidFill>
-                <a:latin typeface="Noto Sans CJK KR"/>
-              </a:rPr>
-              <a:t>번</a:t>
-            </a:r>
-            <a:r>
-              <a:rPr b="0" lang="ko-KR" sz="2000" spc="-1" strike="noStrike">
-                <a:solidFill>
-                  <a:srgbClr val="000000"/>
-                </a:solidFill>
-                <a:latin typeface="Noto Sans CJK KR"/>
-              </a:rPr>
-              <a:t>의</a:t>
-            </a:r>
-            <a:r>
-              <a:rPr b="0" lang="en-US" sz="2000" spc="-1" strike="noStrike">
-                <a:solidFill>
-                  <a:srgbClr val="000000"/>
-                </a:solidFill>
-                <a:latin typeface="Noto Sans CJK KR"/>
-              </a:rPr>
-              <a:t> </a:t>
-            </a:r>
-            <a:r>
-              <a:rPr b="0" lang="en-US" sz="2000" spc="-1" strike="noStrike">
-                <a:solidFill>
-                  <a:srgbClr val="000000"/>
-                </a:solidFill>
-                <a:latin typeface="Noto Sans CJK KR"/>
-              </a:rPr>
-              <a:t>R</a:t>
-            </a:r>
-            <a:r>
-              <a:rPr b="0" lang="en-US" sz="2000" spc="-1" strike="noStrike">
-                <a:solidFill>
-                  <a:srgbClr val="000000"/>
-                </a:solidFill>
-                <a:latin typeface="Noto Sans CJK KR"/>
-              </a:rPr>
-              <a:t>e</a:t>
-            </a:r>
-            <a:r>
-              <a:rPr b="0" lang="en-US" sz="2000" spc="-1" strike="noStrike">
-                <a:solidFill>
-                  <a:srgbClr val="000000"/>
-                </a:solidFill>
-                <a:latin typeface="Noto Sans CJK KR"/>
-              </a:rPr>
-              <a:t>s</a:t>
-            </a:r>
-            <a:r>
-              <a:rPr b="0" lang="en-US" sz="2000" spc="-1" strike="noStrike">
-                <a:solidFill>
-                  <a:srgbClr val="000000"/>
-                </a:solidFill>
-                <a:latin typeface="Noto Sans CJK KR"/>
-              </a:rPr>
-              <a:t>p</a:t>
-            </a:r>
-            <a:r>
-              <a:rPr b="0" lang="en-US" sz="2000" spc="-1" strike="noStrike">
-                <a:solidFill>
-                  <a:srgbClr val="000000"/>
-                </a:solidFill>
-                <a:latin typeface="Noto Sans CJK KR"/>
-              </a:rPr>
-              <a:t>o</a:t>
-            </a:r>
-            <a:r>
-              <a:rPr b="0" lang="en-US" sz="2000" spc="-1" strike="noStrike">
-                <a:solidFill>
-                  <a:srgbClr val="000000"/>
-                </a:solidFill>
-                <a:latin typeface="Noto Sans CJK KR"/>
-              </a:rPr>
-              <a:t>n</a:t>
-            </a:r>
-            <a:r>
-              <a:rPr b="0" lang="en-US" sz="2000" spc="-1" strike="noStrike">
-                <a:solidFill>
-                  <a:srgbClr val="000000"/>
-                </a:solidFill>
-                <a:latin typeface="Noto Sans CJK KR"/>
-              </a:rPr>
-              <a:t>s</a:t>
-            </a:r>
-            <a:r>
-              <a:rPr b="0" lang="en-US" sz="2000" spc="-1" strike="noStrike">
-                <a:solidFill>
-                  <a:srgbClr val="000000"/>
-                </a:solidFill>
-                <a:latin typeface="Noto Sans CJK KR"/>
-              </a:rPr>
-              <a:t>e</a:t>
-            </a:r>
-            <a:r>
-              <a:rPr b="0" lang="ko-KR" sz="2000" spc="-1" strike="noStrike">
-                <a:solidFill>
-                  <a:srgbClr val="000000"/>
-                </a:solidFill>
-                <a:latin typeface="Noto Sans CJK KR"/>
-              </a:rPr>
-              <a:t>를</a:t>
-            </a:r>
-            <a:r>
-              <a:rPr b="0" lang="en-US" sz="2000" spc="-1" strike="noStrike">
-                <a:solidFill>
-                  <a:srgbClr val="000000"/>
-                </a:solidFill>
-                <a:latin typeface="Noto Sans CJK KR"/>
-              </a:rPr>
-              <a:t> </a:t>
-            </a:r>
-            <a:r>
-              <a:rPr b="0" lang="ko-KR" sz="2000" spc="-1" strike="noStrike">
-                <a:solidFill>
-                  <a:srgbClr val="000000"/>
-                </a:solidFill>
-                <a:latin typeface="Noto Sans CJK KR"/>
-              </a:rPr>
-              <a:t>받</a:t>
-            </a:r>
-            <a:r>
-              <a:rPr b="0" lang="ko-KR" sz="2000" spc="-1" strike="noStrike">
-                <a:solidFill>
-                  <a:srgbClr val="000000"/>
-                </a:solidFill>
-                <a:latin typeface="Noto Sans CJK KR"/>
-              </a:rPr>
-              <a:t>습</a:t>
-            </a:r>
-            <a:r>
-              <a:rPr b="0" lang="ko-KR" sz="2000" spc="-1" strike="noStrike">
-                <a:solidFill>
-                  <a:srgbClr val="000000"/>
-                </a:solidFill>
-                <a:latin typeface="Noto Sans CJK KR"/>
-              </a:rPr>
-              <a:t>니</a:t>
-            </a:r>
-            <a:r>
-              <a:rPr b="0" lang="ko-KR" sz="2000" spc="-1" strike="noStrike">
-                <a:solidFill>
-                  <a:srgbClr val="000000"/>
-                </a:solidFill>
-                <a:latin typeface="Noto Sans CJK KR"/>
-              </a:rPr>
-              <a:t>다</a:t>
-            </a:r>
-            <a:r>
-              <a:rPr b="0" lang="en-US" sz="2000" spc="-1" strike="noStrike">
-                <a:solidFill>
-                  <a:srgbClr val="000000"/>
-                </a:solidFill>
-                <a:latin typeface="Noto Sans CJK KR"/>
-              </a:rPr>
-              <a:t>. </a:t>
-            </a:r>
-            <a:r>
-              <a:rPr b="0" lang="en-US" sz="2000" spc="-1" strike="noStrike">
-                <a:solidFill>
-                  <a:srgbClr val="000000"/>
-                </a:solidFill>
-                <a:latin typeface="Noto Sans CJK KR"/>
-              </a:rPr>
-              <a:t>A</a:t>
-            </a:r>
-            <a:r>
-              <a:rPr b="0" lang="en-US" sz="2000" spc="-1" strike="noStrike">
-                <a:solidFill>
-                  <a:srgbClr val="000000"/>
-                </a:solidFill>
-                <a:latin typeface="Noto Sans CJK KR"/>
-              </a:rPr>
-              <a:t>c</a:t>
-            </a:r>
-            <a:r>
-              <a:rPr b="0" lang="en-US" sz="2000" spc="-1" strike="noStrike">
-                <a:solidFill>
-                  <a:srgbClr val="000000"/>
-                </a:solidFill>
-                <a:latin typeface="Noto Sans CJK KR"/>
-              </a:rPr>
-              <a:t>t</a:t>
-            </a:r>
-            <a:r>
-              <a:rPr b="0" lang="en-US" sz="2000" spc="-1" strike="noStrike">
-                <a:solidFill>
-                  <a:srgbClr val="000000"/>
-                </a:solidFill>
-                <a:latin typeface="Noto Sans CJK KR"/>
-              </a:rPr>
-              <a:t>i</a:t>
-            </a:r>
-            <a:r>
-              <a:rPr b="0" lang="en-US" sz="2000" spc="-1" strike="noStrike">
-                <a:solidFill>
-                  <a:srgbClr val="000000"/>
-                </a:solidFill>
-                <a:latin typeface="Noto Sans CJK KR"/>
-              </a:rPr>
-              <a:t>o</a:t>
-            </a:r>
-            <a:r>
-              <a:rPr b="0" lang="en-US" sz="2000" spc="-1" strike="noStrike">
-                <a:solidFill>
-                  <a:srgbClr val="000000"/>
-                </a:solidFill>
-                <a:latin typeface="Noto Sans CJK KR"/>
-              </a:rPr>
-              <a:t>n</a:t>
-            </a:r>
-            <a:r>
-              <a:rPr b="0" lang="ko-KR" sz="2000" spc="-1" strike="noStrike">
-                <a:solidFill>
-                  <a:srgbClr val="000000"/>
-                </a:solidFill>
-                <a:latin typeface="Noto Sans CJK KR"/>
-              </a:rPr>
-              <a:t>은</a:t>
-            </a:r>
-            <a:r>
-              <a:rPr b="0" lang="en-US" sz="2000" spc="-1" strike="noStrike">
-                <a:solidFill>
-                  <a:srgbClr val="000000"/>
-                </a:solidFill>
-                <a:latin typeface="Noto Sans CJK KR"/>
-              </a:rPr>
-              <a:t> </a:t>
-            </a:r>
-            <a:r>
-              <a:rPr b="0" lang="en-US" sz="2000" spc="-1" strike="noStrike">
-                <a:solidFill>
-                  <a:srgbClr val="000000"/>
-                </a:solidFill>
-                <a:latin typeface="Noto Sans CJK KR"/>
-              </a:rPr>
-              <a:t>G</a:t>
-            </a:r>
-            <a:r>
-              <a:rPr b="0" lang="en-US" sz="2000" spc="-1" strike="noStrike">
-                <a:solidFill>
-                  <a:srgbClr val="000000"/>
-                </a:solidFill>
-                <a:latin typeface="Noto Sans CJK KR"/>
-              </a:rPr>
-              <a:t>o</a:t>
-            </a:r>
-            <a:r>
-              <a:rPr b="0" lang="en-US" sz="2000" spc="-1" strike="noStrike">
-                <a:solidFill>
-                  <a:srgbClr val="000000"/>
-                </a:solidFill>
-                <a:latin typeface="Noto Sans CJK KR"/>
-              </a:rPr>
-              <a:t>a</a:t>
-            </a:r>
-            <a:r>
-              <a:rPr b="0" lang="en-US" sz="2000" spc="-1" strike="noStrike">
-                <a:solidFill>
-                  <a:srgbClr val="000000"/>
-                </a:solidFill>
-                <a:latin typeface="Noto Sans CJK KR"/>
-              </a:rPr>
-              <a:t>l</a:t>
-            </a:r>
-            <a:r>
-              <a:rPr b="0" lang="ko-KR" sz="2000" spc="-1" strike="noStrike">
-                <a:solidFill>
-                  <a:srgbClr val="000000"/>
-                </a:solidFill>
-                <a:latin typeface="Noto Sans CJK KR"/>
-              </a:rPr>
-              <a:t>을</a:t>
-            </a:r>
-            <a:r>
-              <a:rPr b="0" lang="en-US" sz="2000" spc="-1" strike="noStrike">
-                <a:solidFill>
-                  <a:srgbClr val="000000"/>
-                </a:solidFill>
-                <a:latin typeface="Noto Sans CJK KR"/>
-              </a:rPr>
-              <a:t> </a:t>
-            </a:r>
-            <a:r>
-              <a:rPr b="0" lang="ko-KR" sz="2000" spc="-1" strike="noStrike">
-                <a:solidFill>
-                  <a:srgbClr val="000000"/>
-                </a:solidFill>
-                <a:latin typeface="Noto Sans CJK KR"/>
-              </a:rPr>
-              <a:t>보</a:t>
-            </a:r>
-            <a:r>
-              <a:rPr b="0" lang="ko-KR" sz="2000" spc="-1" strike="noStrike">
-                <a:solidFill>
-                  <a:srgbClr val="000000"/>
-                </a:solidFill>
-                <a:latin typeface="Noto Sans CJK KR"/>
-              </a:rPr>
-              <a:t>내</a:t>
-            </a:r>
-            <a:r>
-              <a:rPr b="0" lang="ko-KR" sz="2000" spc="-1" strike="noStrike">
-                <a:solidFill>
-                  <a:srgbClr val="000000"/>
-                </a:solidFill>
-                <a:latin typeface="Noto Sans CJK KR"/>
-              </a:rPr>
-              <a:t>고</a:t>
-            </a:r>
-            <a:r>
-              <a:rPr b="0" lang="en-US" sz="2000" spc="-1" strike="noStrike">
-                <a:solidFill>
-                  <a:srgbClr val="000000"/>
-                </a:solidFill>
-                <a:latin typeface="Noto Sans CJK KR"/>
-              </a:rPr>
-              <a:t> </a:t>
-            </a:r>
-            <a:r>
-              <a:rPr b="0" lang="en-US" sz="2000" spc="-1" strike="noStrike">
-                <a:solidFill>
-                  <a:srgbClr val="000000"/>
-                </a:solidFill>
-                <a:latin typeface="Noto Sans CJK KR"/>
-              </a:rPr>
-              <a:t>a</a:t>
-            </a:r>
-            <a:r>
-              <a:rPr b="0" lang="en-US" sz="2000" spc="-1" strike="noStrike">
-                <a:solidFill>
-                  <a:srgbClr val="000000"/>
-                </a:solidFill>
-                <a:latin typeface="Noto Sans CJK KR"/>
-              </a:rPr>
-              <a:t>c</a:t>
-            </a:r>
-            <a:r>
-              <a:rPr b="0" lang="en-US" sz="2000" spc="-1" strike="noStrike">
-                <a:solidFill>
-                  <a:srgbClr val="000000"/>
-                </a:solidFill>
-                <a:latin typeface="Noto Sans CJK KR"/>
-              </a:rPr>
-              <a:t>c</a:t>
-            </a:r>
-            <a:r>
-              <a:rPr b="0" lang="en-US" sz="2000" spc="-1" strike="noStrike">
-                <a:solidFill>
-                  <a:srgbClr val="000000"/>
-                </a:solidFill>
-                <a:latin typeface="Noto Sans CJK KR"/>
-              </a:rPr>
-              <a:t>e</a:t>
-            </a:r>
-            <a:r>
-              <a:rPr b="0" lang="en-US" sz="2000" spc="-1" strike="noStrike">
-                <a:solidFill>
-                  <a:srgbClr val="000000"/>
-                </a:solidFill>
-                <a:latin typeface="Noto Sans CJK KR"/>
-              </a:rPr>
-              <a:t>p</a:t>
-            </a:r>
-            <a:r>
-              <a:rPr b="0" lang="en-US" sz="2000" spc="-1" strike="noStrike">
-                <a:solidFill>
-                  <a:srgbClr val="000000"/>
-                </a:solidFill>
-                <a:latin typeface="Noto Sans CJK KR"/>
-              </a:rPr>
-              <a:t>t</a:t>
-            </a:r>
-            <a:r>
-              <a:rPr b="0" lang="en-US" sz="2000" spc="-1" strike="noStrike">
-                <a:solidFill>
-                  <a:srgbClr val="000000"/>
-                </a:solidFill>
-                <a:latin typeface="Noto Sans CJK KR"/>
-              </a:rPr>
-              <a:t>e</a:t>
-            </a:r>
-            <a:r>
-              <a:rPr b="0" lang="en-US" sz="2000" spc="-1" strike="noStrike">
-                <a:solidFill>
-                  <a:srgbClr val="000000"/>
-                </a:solidFill>
-                <a:latin typeface="Noto Sans CJK KR"/>
-              </a:rPr>
-              <a:t>d</a:t>
-            </a:r>
-            <a:r>
-              <a:rPr b="0" lang="en-US" sz="2000" spc="-1" strike="noStrike">
-                <a:solidFill>
-                  <a:srgbClr val="000000"/>
-                </a:solidFill>
-                <a:latin typeface="Noto Sans CJK KR"/>
-              </a:rPr>
-              <a:t> </a:t>
-            </a:r>
-            <a:r>
-              <a:rPr b="0" lang="ko-KR" sz="2000" spc="-1" strike="noStrike">
-                <a:solidFill>
-                  <a:srgbClr val="000000"/>
-                </a:solidFill>
-                <a:latin typeface="Noto Sans CJK KR"/>
-              </a:rPr>
-              <a:t>여</a:t>
-            </a:r>
-            <a:r>
-              <a:rPr b="0" lang="ko-KR" sz="2000" spc="-1" strike="noStrike">
-                <a:solidFill>
-                  <a:srgbClr val="000000"/>
-                </a:solidFill>
-                <a:latin typeface="Noto Sans CJK KR"/>
-              </a:rPr>
-              <a:t>부</a:t>
-            </a:r>
-            <a:r>
-              <a:rPr b="0" lang="en-US" sz="2000" spc="-1" strike="noStrike">
-                <a:solidFill>
-                  <a:srgbClr val="000000"/>
-                </a:solidFill>
-                <a:latin typeface="Noto Sans CJK KR"/>
-              </a:rPr>
-              <a:t>, </a:t>
-            </a:r>
-            <a:r>
-              <a:rPr b="0" lang="ko-KR" sz="2000" spc="-1" strike="noStrike">
-                <a:solidFill>
-                  <a:srgbClr val="000000"/>
-                </a:solidFill>
-                <a:latin typeface="Noto Sans CJK KR"/>
-              </a:rPr>
-              <a:t>중</a:t>
-            </a:r>
-            <a:r>
-              <a:rPr b="0" lang="ko-KR" sz="2000" spc="-1" strike="noStrike">
-                <a:solidFill>
-                  <a:srgbClr val="000000"/>
-                </a:solidFill>
-                <a:latin typeface="Noto Sans CJK KR"/>
-              </a:rPr>
-              <a:t>간</a:t>
-            </a:r>
-            <a:r>
-              <a:rPr b="0" lang="en-US" sz="2000" spc="-1" strike="noStrike">
-                <a:solidFill>
-                  <a:srgbClr val="000000"/>
-                </a:solidFill>
-                <a:latin typeface="Noto Sans CJK KR"/>
-              </a:rPr>
-              <a:t> </a:t>
-            </a:r>
-            <a:r>
-              <a:rPr b="0" lang="en-US" sz="2000" spc="-1" strike="noStrike">
-                <a:solidFill>
-                  <a:srgbClr val="000000"/>
-                </a:solidFill>
-                <a:latin typeface="Noto Sans CJK KR"/>
-              </a:rPr>
-              <a:t>F</a:t>
-            </a:r>
-            <a:r>
-              <a:rPr b="0" lang="en-US" sz="2000" spc="-1" strike="noStrike">
-                <a:solidFill>
-                  <a:srgbClr val="000000"/>
-                </a:solidFill>
-                <a:latin typeface="Noto Sans CJK KR"/>
-              </a:rPr>
-              <a:t>e</a:t>
-            </a:r>
-            <a:r>
-              <a:rPr b="0" lang="en-US" sz="2000" spc="-1" strike="noStrike">
-                <a:solidFill>
-                  <a:srgbClr val="000000"/>
-                </a:solidFill>
-                <a:latin typeface="Noto Sans CJK KR"/>
-              </a:rPr>
-              <a:t>e</a:t>
-            </a:r>
-            <a:r>
-              <a:rPr b="0" lang="en-US" sz="2000" spc="-1" strike="noStrike">
-                <a:solidFill>
-                  <a:srgbClr val="000000"/>
-                </a:solidFill>
-                <a:latin typeface="Noto Sans CJK KR"/>
-              </a:rPr>
-              <a:t>d</a:t>
-            </a:r>
-            <a:r>
-              <a:rPr b="0" lang="en-US" sz="2000" spc="-1" strike="noStrike">
-                <a:solidFill>
-                  <a:srgbClr val="000000"/>
-                </a:solidFill>
-                <a:latin typeface="Noto Sans CJK KR"/>
-              </a:rPr>
-              <a:t>b</a:t>
-            </a:r>
-            <a:r>
-              <a:rPr b="0" lang="en-US" sz="2000" spc="-1" strike="noStrike">
-                <a:solidFill>
-                  <a:srgbClr val="000000"/>
-                </a:solidFill>
-                <a:latin typeface="Noto Sans CJK KR"/>
-              </a:rPr>
-              <a:t>a</a:t>
-            </a:r>
-            <a:r>
-              <a:rPr b="0" lang="en-US" sz="2000" spc="-1" strike="noStrike">
-                <a:solidFill>
-                  <a:srgbClr val="000000"/>
-                </a:solidFill>
-                <a:latin typeface="Noto Sans CJK KR"/>
-              </a:rPr>
-              <a:t>c</a:t>
-            </a:r>
-            <a:r>
-              <a:rPr b="0" lang="en-US" sz="2000" spc="-1" strike="noStrike">
-                <a:solidFill>
-                  <a:srgbClr val="000000"/>
-                </a:solidFill>
-                <a:latin typeface="Noto Sans CJK KR"/>
-              </a:rPr>
-              <a:t>k</a:t>
-            </a:r>
-            <a:r>
-              <a:rPr b="0" lang="en-US" sz="2000" spc="-1" strike="noStrike">
-                <a:solidFill>
-                  <a:srgbClr val="000000"/>
-                </a:solidFill>
-                <a:latin typeface="Noto Sans CJK KR"/>
-              </a:rPr>
-              <a:t>, </a:t>
-            </a:r>
-            <a:r>
-              <a:rPr b="0" lang="ko-KR" sz="2000" spc="-1" strike="noStrike">
-                <a:solidFill>
-                  <a:srgbClr val="000000"/>
-                </a:solidFill>
-                <a:latin typeface="Noto Sans CJK KR"/>
-              </a:rPr>
-              <a:t>최</a:t>
-            </a:r>
-            <a:r>
-              <a:rPr b="0" lang="ko-KR" sz="2000" spc="-1" strike="noStrike">
-                <a:solidFill>
-                  <a:srgbClr val="000000"/>
-                </a:solidFill>
-                <a:latin typeface="Noto Sans CJK KR"/>
-              </a:rPr>
-              <a:t>종</a:t>
-            </a:r>
-            <a:r>
-              <a:rPr b="0" lang="en-US" sz="2000" spc="-1" strike="noStrike">
-                <a:solidFill>
-                  <a:srgbClr val="000000"/>
-                </a:solidFill>
-                <a:latin typeface="Noto Sans CJK KR"/>
-              </a:rPr>
-              <a:t> </a:t>
-            </a:r>
-            <a:r>
-              <a:rPr b="0" lang="en-US" sz="2000" spc="-1" strike="noStrike">
-                <a:solidFill>
-                  <a:srgbClr val="000000"/>
-                </a:solidFill>
-                <a:latin typeface="Noto Sans CJK KR"/>
-              </a:rPr>
-              <a:t>R</a:t>
-            </a:r>
-            <a:r>
-              <a:rPr b="0" lang="en-US" sz="2000" spc="-1" strike="noStrike">
-                <a:solidFill>
-                  <a:srgbClr val="000000"/>
-                </a:solidFill>
-                <a:latin typeface="Noto Sans CJK KR"/>
-              </a:rPr>
-              <a:t>e</a:t>
-            </a:r>
-            <a:r>
-              <a:rPr b="0" lang="en-US" sz="2000" spc="-1" strike="noStrike">
-                <a:solidFill>
-                  <a:srgbClr val="000000"/>
-                </a:solidFill>
-                <a:latin typeface="Noto Sans CJK KR"/>
-              </a:rPr>
-              <a:t>s</a:t>
-            </a:r>
-            <a:r>
-              <a:rPr b="0" lang="en-US" sz="2000" spc="-1" strike="noStrike">
-                <a:solidFill>
-                  <a:srgbClr val="000000"/>
-                </a:solidFill>
-                <a:latin typeface="Noto Sans CJK KR"/>
-              </a:rPr>
-              <a:t>u</a:t>
-            </a:r>
-            <a:r>
-              <a:rPr b="0" lang="en-US" sz="2000" spc="-1" strike="noStrike">
-                <a:solidFill>
-                  <a:srgbClr val="000000"/>
-                </a:solidFill>
-                <a:latin typeface="Noto Sans CJK KR"/>
-              </a:rPr>
-              <a:t>l</a:t>
-            </a:r>
-            <a:r>
-              <a:rPr b="0" lang="en-US" sz="2000" spc="-1" strike="noStrike">
-                <a:solidFill>
-                  <a:srgbClr val="000000"/>
-                </a:solidFill>
-                <a:latin typeface="Noto Sans CJK KR"/>
-              </a:rPr>
-              <a:t>t</a:t>
-            </a:r>
-            <a:r>
-              <a:rPr b="0" lang="ko-KR" sz="2000" spc="-1" strike="noStrike">
-                <a:solidFill>
-                  <a:srgbClr val="000000"/>
-                </a:solidFill>
-                <a:latin typeface="Noto Sans CJK KR"/>
-              </a:rPr>
-              <a:t>를</a:t>
-            </a:r>
-            <a:r>
-              <a:rPr b="0" lang="en-US" sz="2000" spc="-1" strike="noStrike">
-                <a:solidFill>
-                  <a:srgbClr val="000000"/>
-                </a:solidFill>
-                <a:latin typeface="Noto Sans CJK KR"/>
-              </a:rPr>
-              <a:t> </a:t>
-            </a:r>
-            <a:r>
-              <a:rPr b="0" lang="ko-KR" sz="2000" spc="-1" strike="noStrike">
-                <a:solidFill>
-                  <a:srgbClr val="000000"/>
-                </a:solidFill>
-                <a:latin typeface="Noto Sans CJK KR"/>
-              </a:rPr>
-              <a:t>받</a:t>
-            </a:r>
-            <a:r>
-              <a:rPr b="0" lang="ko-KR" sz="2000" spc="-1" strike="noStrike">
-                <a:solidFill>
-                  <a:srgbClr val="000000"/>
-                </a:solidFill>
-                <a:latin typeface="Noto Sans CJK KR"/>
-              </a:rPr>
-              <a:t>습</a:t>
-            </a:r>
-            <a:r>
-              <a:rPr b="0" lang="ko-KR" sz="2000" spc="-1" strike="noStrike">
-                <a:solidFill>
-                  <a:srgbClr val="000000"/>
-                </a:solidFill>
-                <a:latin typeface="Noto Sans CJK KR"/>
-              </a:rPr>
-              <a:t>니</a:t>
-            </a:r>
-            <a:r>
-              <a:rPr b="0" lang="ko-KR" sz="2000" spc="-1" strike="noStrike">
-                <a:solidFill>
-                  <a:srgbClr val="000000"/>
-                </a:solidFill>
-                <a:latin typeface="Noto Sans CJK KR"/>
-              </a:rPr>
-              <a:t>다</a:t>
-            </a:r>
-            <a:r>
-              <a:rPr b="0" lang="en-US" sz="2000" spc="-1" strike="noStrike">
-                <a:solidFill>
-                  <a:srgbClr val="000000"/>
-                </a:solidFill>
-                <a:latin typeface="Noto Sans CJK KR"/>
-              </a:rPr>
-              <a:t>. </a:t>
-            </a:r>
-            <a:r>
-              <a:rPr b="0" lang="ko-KR" sz="2000" spc="-1" strike="noStrike">
-                <a:solidFill>
-                  <a:srgbClr val="000000"/>
-                </a:solidFill>
-                <a:latin typeface="Noto Sans CJK KR"/>
-              </a:rPr>
-              <a:t>두</a:t>
-            </a:r>
-            <a:r>
-              <a:rPr b="0" lang="en-US" sz="2000" spc="-1" strike="noStrike">
-                <a:solidFill>
-                  <a:srgbClr val="000000"/>
-                </a:solidFill>
-                <a:latin typeface="Noto Sans CJK KR"/>
-              </a:rPr>
-              <a:t> </a:t>
-            </a:r>
-            <a:r>
-              <a:rPr b="0" lang="ko-KR" sz="2000" spc="-1" strike="noStrike">
-                <a:solidFill>
-                  <a:srgbClr val="000000"/>
-                </a:solidFill>
-                <a:latin typeface="Noto Sans CJK KR"/>
-              </a:rPr>
-              <a:t>기</a:t>
-            </a:r>
-            <a:r>
-              <a:rPr b="0" lang="ko-KR" sz="2000" spc="-1" strike="noStrike">
-                <a:solidFill>
-                  <a:srgbClr val="000000"/>
-                </a:solidFill>
-                <a:latin typeface="Noto Sans CJK KR"/>
-              </a:rPr>
-              <a:t>능</a:t>
-            </a:r>
-            <a:r>
-              <a:rPr b="0" lang="en-US" sz="2000" spc="-1" strike="noStrike">
-                <a:solidFill>
-                  <a:srgbClr val="000000"/>
-                </a:solidFill>
-                <a:latin typeface="Noto Sans CJK KR"/>
-              </a:rPr>
-              <a:t> </a:t>
-            </a:r>
-            <a:r>
-              <a:rPr b="0" lang="ko-KR" sz="2000" spc="-1" strike="noStrike">
-                <a:solidFill>
-                  <a:srgbClr val="000000"/>
-                </a:solidFill>
-                <a:latin typeface="Noto Sans CJK KR"/>
-              </a:rPr>
-              <a:t>모</a:t>
-            </a:r>
-            <a:r>
-              <a:rPr b="0" lang="ko-KR" sz="2000" spc="-1" strike="noStrike">
-                <a:solidFill>
-                  <a:srgbClr val="000000"/>
-                </a:solidFill>
-                <a:latin typeface="Noto Sans CJK KR"/>
-              </a:rPr>
-              <a:t>두</a:t>
-            </a:r>
-            <a:r>
-              <a:rPr b="0" lang="en-US" sz="2000" spc="-1" strike="noStrike">
-                <a:solidFill>
-                  <a:srgbClr val="000000"/>
-                </a:solidFill>
-                <a:latin typeface="Noto Sans CJK KR"/>
-              </a:rPr>
-              <a:t> </a:t>
-            </a:r>
-            <a:r>
-              <a:rPr b="0" lang="ko-KR" sz="2000" spc="-1" strike="noStrike">
-                <a:solidFill>
-                  <a:srgbClr val="000000"/>
-                </a:solidFill>
-                <a:latin typeface="Noto Sans CJK KR"/>
-              </a:rPr>
-              <a:t>등</a:t>
-            </a:r>
-            <a:r>
-              <a:rPr b="0" lang="ko-KR" sz="2000" spc="-1" strike="noStrike">
-                <a:solidFill>
-                  <a:srgbClr val="000000"/>
-                </a:solidFill>
-                <a:latin typeface="Noto Sans CJK KR"/>
-              </a:rPr>
-              <a:t>록</a:t>
-            </a:r>
-            <a:r>
-              <a:rPr b="0" lang="ko-KR" sz="2000" spc="-1" strike="noStrike">
-                <a:solidFill>
-                  <a:srgbClr val="000000"/>
-                </a:solidFill>
-                <a:latin typeface="Noto Sans CJK KR"/>
-              </a:rPr>
-              <a:t>과</a:t>
-            </a:r>
-            <a:r>
-              <a:rPr b="0" lang="en-US" sz="2000" spc="-1" strike="noStrike">
-                <a:solidFill>
-                  <a:srgbClr val="000000"/>
-                </a:solidFill>
-                <a:latin typeface="Noto Sans CJK KR"/>
-              </a:rPr>
-              <a:t> </a:t>
-            </a:r>
-            <a:r>
-              <a:rPr b="0" lang="en-US" sz="2000" spc="-1" strike="noStrike">
-                <a:solidFill>
-                  <a:srgbClr val="000000"/>
-                </a:solidFill>
-                <a:latin typeface="Noto Sans CJK KR"/>
-              </a:rPr>
-              <a:t>i</a:t>
-            </a:r>
-            <a:r>
-              <a:rPr b="0" lang="en-US" sz="2000" spc="-1" strike="noStrike">
-                <a:solidFill>
-                  <a:srgbClr val="000000"/>
-                </a:solidFill>
-                <a:latin typeface="Noto Sans CJK KR"/>
-              </a:rPr>
-              <a:t>m</a:t>
-            </a:r>
-            <a:r>
-              <a:rPr b="0" lang="en-US" sz="2000" spc="-1" strike="noStrike">
-                <a:solidFill>
-                  <a:srgbClr val="000000"/>
-                </a:solidFill>
-                <a:latin typeface="Noto Sans CJK KR"/>
-              </a:rPr>
-              <a:t>p</a:t>
-            </a:r>
-            <a:r>
-              <a:rPr b="0" lang="en-US" sz="2000" spc="-1" strike="noStrike">
-                <a:solidFill>
-                  <a:srgbClr val="000000"/>
-                </a:solidFill>
-                <a:latin typeface="Noto Sans CJK KR"/>
-              </a:rPr>
-              <a:t>o</a:t>
-            </a:r>
-            <a:r>
-              <a:rPr b="0" lang="en-US" sz="2000" spc="-1" strike="noStrike">
-                <a:solidFill>
-                  <a:srgbClr val="000000"/>
-                </a:solidFill>
-                <a:latin typeface="Noto Sans CJK KR"/>
-              </a:rPr>
-              <a:t>r</a:t>
-            </a:r>
-            <a:r>
-              <a:rPr b="0" lang="en-US" sz="2000" spc="-1" strike="noStrike">
-                <a:solidFill>
-                  <a:srgbClr val="000000"/>
-                </a:solidFill>
-                <a:latin typeface="Noto Sans CJK KR"/>
-              </a:rPr>
-              <a:t>t</a:t>
-            </a:r>
-            <a:r>
-              <a:rPr b="0" lang="ko-KR" sz="2000" spc="-1" strike="noStrike">
-                <a:solidFill>
-                  <a:srgbClr val="000000"/>
-                </a:solidFill>
-                <a:latin typeface="Noto Sans CJK KR"/>
-              </a:rPr>
-              <a:t>가</a:t>
-            </a:r>
-            <a:r>
-              <a:rPr b="0" lang="en-US" sz="2000" spc="-1" strike="noStrike">
-                <a:solidFill>
-                  <a:srgbClr val="000000"/>
-                </a:solidFill>
-                <a:latin typeface="Noto Sans CJK KR"/>
-              </a:rPr>
-              <a:t> </a:t>
-            </a:r>
-            <a:r>
-              <a:rPr b="0" lang="ko-KR" sz="2000" spc="-1" strike="noStrike">
-                <a:solidFill>
-                  <a:srgbClr val="000000"/>
-                </a:solidFill>
-                <a:latin typeface="Noto Sans CJK KR"/>
-              </a:rPr>
-              <a:t>가</a:t>
-            </a:r>
-            <a:r>
-              <a:rPr b="0" lang="ko-KR" sz="2000" spc="-1" strike="noStrike">
-                <a:solidFill>
-                  <a:srgbClr val="000000"/>
-                </a:solidFill>
-                <a:latin typeface="Noto Sans CJK KR"/>
-              </a:rPr>
-              <a:t>능</a:t>
-            </a:r>
-            <a:r>
-              <a:rPr b="0" lang="ko-KR" sz="2000" spc="-1" strike="noStrike">
-                <a:solidFill>
-                  <a:srgbClr val="000000"/>
-                </a:solidFill>
-                <a:latin typeface="Noto Sans CJK KR"/>
-              </a:rPr>
-              <a:t>하</a:t>
-            </a:r>
-            <a:r>
-              <a:rPr b="0" lang="ko-KR" sz="2000" spc="-1" strike="noStrike">
-                <a:solidFill>
-                  <a:srgbClr val="000000"/>
-                </a:solidFill>
-                <a:latin typeface="Noto Sans CJK KR"/>
-              </a:rPr>
-              <a:t>고</a:t>
-            </a:r>
-            <a:r>
-              <a:rPr b="0" lang="en-US" sz="2000" spc="-1" strike="noStrike">
-                <a:solidFill>
-                  <a:srgbClr val="000000"/>
-                </a:solidFill>
-                <a:latin typeface="Noto Sans CJK KR"/>
-              </a:rPr>
-              <a:t>, </a:t>
-            </a:r>
-            <a:r>
-              <a:rPr b="0" lang="ko-KR" sz="2000" spc="-1" strike="noStrike">
-                <a:solidFill>
-                  <a:srgbClr val="000000"/>
-                </a:solidFill>
-                <a:latin typeface="Noto Sans CJK KR"/>
-              </a:rPr>
-              <a:t>현</a:t>
-            </a:r>
-            <a:r>
-              <a:rPr b="0" lang="ko-KR" sz="2000" spc="-1" strike="noStrike">
-                <a:solidFill>
-                  <a:srgbClr val="000000"/>
-                </a:solidFill>
-                <a:latin typeface="Noto Sans CJK KR"/>
-              </a:rPr>
-              <a:t>재</a:t>
-            </a:r>
-            <a:r>
-              <a:rPr b="0" lang="en-US" sz="2000" spc="-1" strike="noStrike">
-                <a:solidFill>
-                  <a:srgbClr val="000000"/>
-                </a:solidFill>
-                <a:latin typeface="Noto Sans CJK KR"/>
-              </a:rPr>
-              <a:t> </a:t>
-            </a:r>
-            <a:r>
-              <a:rPr b="0" lang="en-US" sz="2000" spc="-1" strike="noStrike">
-                <a:solidFill>
-                  <a:srgbClr val="000000"/>
-                </a:solidFill>
-                <a:latin typeface="Noto Sans CJK KR"/>
-              </a:rPr>
-              <a:t>G</a:t>
-            </a:r>
-            <a:r>
-              <a:rPr b="0" lang="en-US" sz="2000" spc="-1" strike="noStrike">
-                <a:solidFill>
-                  <a:srgbClr val="000000"/>
-                </a:solidFill>
-                <a:latin typeface="Noto Sans CJK KR"/>
-              </a:rPr>
-              <a:t>r</a:t>
-            </a:r>
-            <a:r>
-              <a:rPr b="0" lang="en-US" sz="2000" spc="-1" strike="noStrike">
-                <a:solidFill>
-                  <a:srgbClr val="000000"/>
-                </a:solidFill>
-                <a:latin typeface="Noto Sans CJK KR"/>
-              </a:rPr>
-              <a:t>a</a:t>
-            </a:r>
-            <a:r>
-              <a:rPr b="0" lang="en-US" sz="2000" spc="-1" strike="noStrike">
-                <a:solidFill>
-                  <a:srgbClr val="000000"/>
-                </a:solidFill>
-                <a:latin typeface="Noto Sans CJK KR"/>
-              </a:rPr>
-              <a:t>p</a:t>
-            </a:r>
-            <a:r>
-              <a:rPr b="0" lang="en-US" sz="2000" spc="-1" strike="noStrike">
-                <a:solidFill>
-                  <a:srgbClr val="000000"/>
-                </a:solidFill>
-                <a:latin typeface="Noto Sans CJK KR"/>
-              </a:rPr>
-              <a:t>h</a:t>
-            </a:r>
-            <a:r>
-              <a:rPr b="0" lang="ko-KR" sz="2000" spc="-1" strike="noStrike">
-                <a:solidFill>
-                  <a:srgbClr val="000000"/>
-                </a:solidFill>
-                <a:latin typeface="Noto Sans CJK KR"/>
-              </a:rPr>
-              <a:t>의</a:t>
-            </a:r>
-            <a:r>
-              <a:rPr b="0" lang="en-US" sz="2000" spc="-1" strike="noStrike">
-                <a:solidFill>
-                  <a:srgbClr val="000000"/>
-                </a:solidFill>
-                <a:latin typeface="Noto Sans CJK KR"/>
-              </a:rPr>
-              <a:t> </a:t>
-            </a:r>
-            <a:r>
-              <a:rPr b="0" lang="ko-KR" sz="2000" spc="-1" strike="noStrike">
-                <a:solidFill>
-                  <a:srgbClr val="000000"/>
-                </a:solidFill>
-                <a:latin typeface="Noto Sans CJK KR"/>
-              </a:rPr>
-              <a:t>이</a:t>
-            </a:r>
-            <a:r>
-              <a:rPr b="0" lang="ko-KR" sz="2000" spc="-1" strike="noStrike">
-                <a:solidFill>
-                  <a:srgbClr val="000000"/>
-                </a:solidFill>
-                <a:latin typeface="Noto Sans CJK KR"/>
-              </a:rPr>
-              <a:t>름</a:t>
-            </a:r>
-            <a:r>
-              <a:rPr b="0" lang="ko-KR" sz="2000" spc="-1" strike="noStrike">
-                <a:solidFill>
-                  <a:srgbClr val="000000"/>
-                </a:solidFill>
-                <a:latin typeface="Noto Sans CJK KR"/>
-              </a:rPr>
-              <a:t>과</a:t>
-            </a:r>
-            <a:r>
-              <a:rPr b="0" lang="en-US" sz="2000" spc="-1" strike="noStrike">
-                <a:solidFill>
-                  <a:srgbClr val="000000"/>
-                </a:solidFill>
-                <a:latin typeface="Noto Sans CJK KR"/>
-              </a:rPr>
-              <a:t> </a:t>
-            </a:r>
-            <a:r>
-              <a:rPr b="0" lang="en-US" sz="2000" spc="-1" strike="noStrike">
-                <a:solidFill>
-                  <a:srgbClr val="000000"/>
-                </a:solidFill>
-                <a:latin typeface="Noto Sans CJK KR"/>
-              </a:rPr>
-              <a:t>f</a:t>
-            </a:r>
-            <a:r>
-              <a:rPr b="0" lang="en-US" sz="2000" spc="-1" strike="noStrike">
-                <a:solidFill>
-                  <a:srgbClr val="000000"/>
-                </a:solidFill>
-                <a:latin typeface="Noto Sans CJK KR"/>
-              </a:rPr>
-              <a:t>u</a:t>
-            </a:r>
-            <a:r>
-              <a:rPr b="0" lang="en-US" sz="2000" spc="-1" strike="noStrike">
-                <a:solidFill>
-                  <a:srgbClr val="000000"/>
-                </a:solidFill>
-                <a:latin typeface="Noto Sans CJK KR"/>
-              </a:rPr>
-              <a:t>l</a:t>
-            </a:r>
-            <a:r>
-              <a:rPr b="0" lang="en-US" sz="2000" spc="-1" strike="noStrike">
-                <a:solidFill>
-                  <a:srgbClr val="000000"/>
-                </a:solidFill>
-                <a:latin typeface="Noto Sans CJK KR"/>
-              </a:rPr>
-              <a:t>l </a:t>
-            </a:r>
-            <a:r>
-              <a:rPr b="0" lang="en-US" sz="2000" spc="-1" strike="noStrike">
-                <a:solidFill>
-                  <a:srgbClr val="000000"/>
-                </a:solidFill>
-                <a:latin typeface="Noto Sans CJK KR"/>
-              </a:rPr>
-              <a:t>t</a:t>
-            </a:r>
-            <a:r>
-              <a:rPr b="0" lang="en-US" sz="2000" spc="-1" strike="noStrike">
-                <a:solidFill>
-                  <a:srgbClr val="000000"/>
-                </a:solidFill>
-                <a:latin typeface="Noto Sans CJK KR"/>
-              </a:rPr>
-              <a:t>y</a:t>
-            </a:r>
-            <a:r>
-              <a:rPr b="0" lang="en-US" sz="2000" spc="-1" strike="noStrike">
-                <a:solidFill>
-                  <a:srgbClr val="000000"/>
-                </a:solidFill>
-                <a:latin typeface="Noto Sans CJK KR"/>
-              </a:rPr>
-              <a:t>p</a:t>
-            </a:r>
-            <a:r>
-              <a:rPr b="0" lang="en-US" sz="2000" spc="-1" strike="noStrike">
-                <a:solidFill>
-                  <a:srgbClr val="000000"/>
-                </a:solidFill>
-                <a:latin typeface="Noto Sans CJK KR"/>
-              </a:rPr>
-              <a:t>e</a:t>
-            </a:r>
-            <a:r>
-              <a:rPr b="0" lang="ko-KR" sz="2000" spc="-1" strike="noStrike">
-                <a:solidFill>
-                  <a:srgbClr val="000000"/>
-                </a:solidFill>
-                <a:latin typeface="Noto Sans CJK KR"/>
-              </a:rPr>
-              <a:t>이</a:t>
-            </a:r>
-            <a:r>
-              <a:rPr b="0" lang="en-US" sz="2000" spc="-1" strike="noStrike">
-                <a:solidFill>
-                  <a:srgbClr val="000000"/>
-                </a:solidFill>
-                <a:latin typeface="Noto Sans CJK KR"/>
-              </a:rPr>
-              <a:t> </a:t>
-            </a:r>
-            <a:r>
-              <a:rPr b="0" lang="ko-KR" sz="2000" spc="-1" strike="noStrike">
-                <a:solidFill>
-                  <a:srgbClr val="000000"/>
-                </a:solidFill>
-                <a:latin typeface="Noto Sans CJK KR"/>
-              </a:rPr>
-              <a:t>정</a:t>
-            </a:r>
-            <a:r>
-              <a:rPr b="0" lang="ko-KR" sz="2000" spc="-1" strike="noStrike">
-                <a:solidFill>
-                  <a:srgbClr val="000000"/>
-                </a:solidFill>
-                <a:latin typeface="Noto Sans CJK KR"/>
-              </a:rPr>
-              <a:t>확</a:t>
-            </a:r>
-            <a:r>
-              <a:rPr b="0" lang="ko-KR" sz="2000" spc="-1" strike="noStrike">
-                <a:solidFill>
-                  <a:srgbClr val="000000"/>
-                </a:solidFill>
-                <a:latin typeface="Noto Sans CJK KR"/>
-              </a:rPr>
-              <a:t>히</a:t>
-            </a:r>
-            <a:r>
-              <a:rPr b="0" lang="en-US" sz="2000" spc="-1" strike="noStrike">
-                <a:solidFill>
-                  <a:srgbClr val="000000"/>
-                </a:solidFill>
-                <a:latin typeface="Noto Sans CJK KR"/>
-              </a:rPr>
-              <a:t> </a:t>
-            </a:r>
-            <a:r>
-              <a:rPr b="0" lang="ko-KR" sz="2000" spc="-1" strike="noStrike">
-                <a:solidFill>
-                  <a:srgbClr val="000000"/>
-                </a:solidFill>
-                <a:latin typeface="Noto Sans CJK KR"/>
-              </a:rPr>
-              <a:t>일</a:t>
-            </a:r>
-            <a:r>
-              <a:rPr b="0" lang="ko-KR" sz="2000" spc="-1" strike="noStrike">
-                <a:solidFill>
-                  <a:srgbClr val="000000"/>
-                </a:solidFill>
-                <a:latin typeface="Noto Sans CJK KR"/>
-              </a:rPr>
-              <a:t>치</a:t>
-            </a:r>
-            <a:r>
-              <a:rPr b="0" lang="ko-KR" sz="2000" spc="-1" strike="noStrike">
-                <a:solidFill>
-                  <a:srgbClr val="000000"/>
-                </a:solidFill>
-                <a:latin typeface="Noto Sans CJK KR"/>
-              </a:rPr>
-              <a:t>해</a:t>
-            </a:r>
-            <a:r>
-              <a:rPr b="0" lang="ko-KR" sz="2000" spc="-1" strike="noStrike">
-                <a:solidFill>
-                  <a:srgbClr val="000000"/>
-                </a:solidFill>
-                <a:latin typeface="Noto Sans CJK KR"/>
-              </a:rPr>
-              <a:t>야</a:t>
-            </a:r>
-            <a:r>
-              <a:rPr b="0" lang="en-US" sz="2000" spc="-1" strike="noStrike">
-                <a:solidFill>
-                  <a:srgbClr val="000000"/>
-                </a:solidFill>
-                <a:latin typeface="Noto Sans CJK KR"/>
-              </a:rPr>
-              <a:t> </a:t>
-            </a:r>
-            <a:r>
-              <a:rPr b="0" lang="ko-KR" sz="2000" spc="-1" strike="noStrike">
-                <a:solidFill>
-                  <a:srgbClr val="000000"/>
-                </a:solidFill>
-                <a:latin typeface="Noto Sans CJK KR"/>
-              </a:rPr>
-              <a:t>실</a:t>
-            </a:r>
-            <a:r>
-              <a:rPr b="0" lang="ko-KR" sz="2000" spc="-1" strike="noStrike">
-                <a:solidFill>
-                  <a:srgbClr val="000000"/>
-                </a:solidFill>
-                <a:latin typeface="Noto Sans CJK KR"/>
-              </a:rPr>
-              <a:t>행</a:t>
-            </a:r>
-            <a:r>
-              <a:rPr b="0" lang="en-US" sz="2000" spc="-1" strike="noStrike">
-                <a:solidFill>
-                  <a:srgbClr val="000000"/>
-                </a:solidFill>
-                <a:latin typeface="Noto Sans CJK KR"/>
-              </a:rPr>
-              <a:t> </a:t>
-            </a:r>
-            <a:r>
-              <a:rPr b="0" lang="ko-KR" sz="2000" spc="-1" strike="noStrike">
-                <a:solidFill>
-                  <a:srgbClr val="000000"/>
-                </a:solidFill>
-                <a:latin typeface="Noto Sans CJK KR"/>
-              </a:rPr>
-              <a:t>후</a:t>
-            </a:r>
-            <a:r>
-              <a:rPr b="0" lang="ko-KR" sz="2000" spc="-1" strike="noStrike">
-                <a:solidFill>
-                  <a:srgbClr val="000000"/>
-                </a:solidFill>
-                <a:latin typeface="Noto Sans CJK KR"/>
-              </a:rPr>
-              <a:t>보</a:t>
-            </a:r>
-            <a:r>
-              <a:rPr b="0" lang="ko-KR" sz="2000" spc="-1" strike="noStrike">
-                <a:solidFill>
-                  <a:srgbClr val="000000"/>
-                </a:solidFill>
-                <a:latin typeface="Noto Sans CJK KR"/>
-              </a:rPr>
-              <a:t>가</a:t>
-            </a:r>
-            <a:r>
-              <a:rPr b="0" lang="en-US" sz="2000" spc="-1" strike="noStrike">
-                <a:solidFill>
-                  <a:srgbClr val="000000"/>
-                </a:solidFill>
-                <a:latin typeface="Noto Sans CJK KR"/>
-              </a:rPr>
-              <a:t> </a:t>
-            </a:r>
-            <a:r>
-              <a:rPr b="0" lang="ko-KR" sz="2000" spc="-1" strike="noStrike">
-                <a:solidFill>
-                  <a:srgbClr val="000000"/>
-                </a:solidFill>
-                <a:latin typeface="Noto Sans CJK KR"/>
-              </a:rPr>
-              <a:t>됩</a:t>
-            </a:r>
-            <a:r>
-              <a:rPr b="0" lang="ko-KR" sz="2000" spc="-1" strike="noStrike">
-                <a:solidFill>
-                  <a:srgbClr val="000000"/>
-                </a:solidFill>
-                <a:latin typeface="Noto Sans CJK KR"/>
-              </a:rPr>
-              <a:t>니</a:t>
-            </a:r>
-            <a:r>
-              <a:rPr b="0" lang="ko-KR" sz="2000" spc="-1" strike="noStrike">
-                <a:solidFill>
-                  <a:srgbClr val="000000"/>
-                </a:solidFill>
-                <a:latin typeface="Noto Sans CJK KR"/>
-              </a:rPr>
-              <a:t>다</a:t>
+              <a:t>이 정확히 일치해야 실행 후보가 됩니다</a:t>
             </a:r>
             <a:r>
               <a:rPr b="0" lang="en-US" sz="2000" spc="-1" strike="noStrike">
@@ -9235,106 +7039,7 @@
                 </a:solidFill>
                 <a:latin typeface="Noto Sans CJK KR"/>
               </a:rPr>
-              <a:t>어</a:t>
-            </a:r>
-            <a:r>
-              <a:rPr b="0" lang="ko-KR" sz="2000" spc="-1" strike="noStrike">
-                <a:solidFill>
-                  <a:srgbClr val="000000"/>
-                </a:solidFill>
-                <a:latin typeface="Noto Sans CJK KR"/>
-              </a:rPr>
-              <a:t>려</a:t>
-            </a:r>
-            <a:r>
-              <a:rPr b="0" lang="ko-KR" sz="2000" spc="-1" strike="noStrike">
-                <a:solidFill>
-                  <a:srgbClr val="000000"/>
-                </a:solidFill>
-                <a:latin typeface="Noto Sans CJK KR"/>
-              </a:rPr>
-              <a:t>운</a:t>
-            </a:r>
-            <a:r>
-              <a:rPr b="0" lang="en-US" sz="2000" spc="-1" strike="noStrike">
-                <a:solidFill>
-                  <a:srgbClr val="000000"/>
-                </a:solidFill>
-                <a:latin typeface="Noto Sans CJK KR"/>
-              </a:rPr>
-              <a:t> </a:t>
-            </a:r>
-            <a:r>
-              <a:rPr b="0" lang="ko-KR" sz="2000" spc="-1" strike="noStrike">
-                <a:solidFill>
-                  <a:srgbClr val="000000"/>
-                </a:solidFill>
-                <a:latin typeface="Noto Sans CJK KR"/>
-              </a:rPr>
-              <a:t>용</a:t>
-            </a:r>
-            <a:r>
-              <a:rPr b="0" lang="ko-KR" sz="2000" spc="-1" strike="noStrike">
-                <a:solidFill>
-                  <a:srgbClr val="000000"/>
-                </a:solidFill>
-                <a:latin typeface="Noto Sans CJK KR"/>
-              </a:rPr>
-              <a:t>어</a:t>
-            </a:r>
-            <a:r>
-              <a:rPr b="0" lang="en-US" sz="2000" spc="-1" strike="noStrike">
-                <a:solidFill>
-                  <a:srgbClr val="000000"/>
-                </a:solidFill>
-                <a:latin typeface="Noto Sans CJK KR"/>
-              </a:rPr>
-              <a:t> </a:t>
-            </a:r>
-            <a:r>
-              <a:rPr b="0" lang="ko-KR" sz="2000" spc="-1" strike="noStrike">
-                <a:solidFill>
-                  <a:srgbClr val="000000"/>
-                </a:solidFill>
-                <a:latin typeface="Noto Sans CJK KR"/>
-              </a:rPr>
-              <a:t>쉽</a:t>
-            </a:r>
-            <a:r>
-              <a:rPr b="0" lang="ko-KR" sz="2000" spc="-1" strike="noStrike">
-                <a:solidFill>
-                  <a:srgbClr val="000000"/>
-                </a:solidFill>
-                <a:latin typeface="Noto Sans CJK KR"/>
-              </a:rPr>
-              <a:t>게</a:t>
-            </a:r>
-            <a:r>
-              <a:rPr b="0" lang="en-US" sz="2000" spc="-1" strike="noStrike">
-                <a:solidFill>
-                  <a:srgbClr val="000000"/>
-                </a:solidFill>
-                <a:latin typeface="Noto Sans CJK KR"/>
-              </a:rPr>
-              <a:t> </a:t>
-            </a:r>
-            <a:r>
-              <a:rPr b="0" lang="ko-KR" sz="2000" spc="-1" strike="noStrike">
-                <a:solidFill>
-                  <a:srgbClr val="000000"/>
-                </a:solidFill>
-                <a:latin typeface="Noto Sans CJK KR"/>
-              </a:rPr>
-              <a:t>설</a:t>
-            </a:r>
-            <a:r>
-              <a:rPr b="0" lang="ko-KR" sz="2000" spc="-1" strike="noStrike">
-                <a:solidFill>
-                  <a:srgbClr val="000000"/>
-                </a:solidFill>
-                <a:latin typeface="Noto Sans CJK KR"/>
-              </a:rPr>
-              <a:t>명</a:t>
+              <a:t>어려운 용어 쉽게 설명</a:t>
             </a:r>
             <a:endParaRPr b="0" lang="en-US" sz="2000" spc="-1" strike="noStrike">
               <a:solidFill>
@@ -9360,7 +7065,16 @@
                 </a:solidFill>
                 <a:latin typeface="Noto Sans CJK KR"/>
               </a:rPr>
-              <a:t>e</a:t>
+              <a:t>exact match</a:t>
+            </a:r>
+            <a:r>
+              <a:rPr b="0" lang="ko-KR" sz="2000" spc="-1" strike="noStrike">
+                <a:solidFill>
+                  <a:srgbClr val="000000"/>
+                </a:solidFill>
+                <a:latin typeface="Noto Sans CJK KR"/>
+              </a:rPr>
+              <a:t>는 통신 이름과 전체 타입이 모두 정확히 같아야 한다는 뜻입니다</a:t>
             </a:r>
             <a:r>
               <a:rPr b="0" lang="en-US" sz="2000" spc="-1" strike="noStrike">
@@ -9369,7 +7083,16 @@
                 </a:solidFill>
                 <a:latin typeface="Noto Sans CJK KR"/>
               </a:rPr>
-              <a:t>x</a:t>
+              <a:t>. validation</a:t>
+            </a:r>
+            <a:r>
+              <a:rPr b="0" lang="ko-KR" sz="2000" spc="-1" strike="noStrike">
+                <a:solidFill>
+                  <a:srgbClr val="000000"/>
+                </a:solidFill>
+                <a:latin typeface="Noto Sans CJK KR"/>
+              </a:rPr>
+              <a:t>은 </a:t>
             </a:r>
             <a:r>
               <a:rPr b="0" lang="en-US" sz="2000" spc="-1" strike="noStrike">
@@ -9378,7 +7101,16 @@
                 </a:solidFill>
                 <a:latin typeface="Noto Sans CJK KR"/>
               </a:rPr>
-              <a:t>a</a:t>
+              <a:t>payload</a:t>
+            </a:r>
+            <a:r>
+              <a:rPr b="0" lang="ko-KR" sz="2000" spc="-1" strike="noStrike">
+                <a:solidFill>
+                  <a:srgbClr val="000000"/>
+                </a:solidFill>
+                <a:latin typeface="Noto Sans CJK KR"/>
+              </a:rPr>
+              <a:t>가 </a:t>
             </a:r>
             <a:r>
               <a:rPr b="0" lang="en-US" sz="2000" spc="-1" strike="noStrike">
@@ -9387,70 +7119,7 @@
                 </a:solidFill>
                 <a:latin typeface="Noto Sans CJK KR"/>
               </a:rPr>
-              <a:t>c</a:t>
-            </a:r>
-            <a:r>
-              <a:rPr b="0" lang="en-US" sz="2000" spc="-1" strike="noStrike">
-                <a:solidFill>
-                  <a:srgbClr val="000000"/>
-                </a:solidFill>
-                <a:latin typeface="Noto Sans CJK KR"/>
-              </a:rPr>
-              <a:t>t</a:t>
-            </a:r>
-            <a:r>
-              <a:rPr b="0" lang="en-US" sz="2000" spc="-1" strike="noStrike">
-                <a:solidFill>
-                  <a:srgbClr val="000000"/>
-                </a:solidFill>
-                <a:latin typeface="Noto Sans CJK KR"/>
-              </a:rPr>
-              <a:t> </a:t>
-            </a:r>
-            <a:r>
-              <a:rPr b="0" lang="en-US" sz="2000" spc="-1" strike="noStrike">
-                <a:solidFill>
-                  <a:srgbClr val="000000"/>
-                </a:solidFill>
-                <a:latin typeface="Noto Sans CJK KR"/>
-              </a:rPr>
-              <a:t>m</a:t>
-            </a:r>
-            <a:r>
-              <a:rPr b="0" lang="en-US" sz="2000" spc="-1" strike="noStrike">
-                <a:solidFill>
-                  <a:srgbClr val="000000"/>
-                </a:solidFill>
-                <a:latin typeface="Noto Sans CJK KR"/>
-              </a:rPr>
-              <a:t>a</a:t>
-            </a:r>
-            <a:r>
-              <a:rPr b="0" lang="en-US" sz="2000" spc="-1" strike="noStrike">
-                <a:solidFill>
-                  <a:srgbClr val="000000"/>
-                </a:solidFill>
-                <a:latin typeface="Noto Sans CJK KR"/>
-              </a:rPr>
-              <a:t>t</a:t>
-            </a:r>
-            <a:r>
-              <a:rPr b="0" lang="en-US" sz="2000" spc="-1" strike="noStrike">
-                <a:solidFill>
-                  <a:srgbClr val="000000"/>
-                </a:solidFill>
-                <a:latin typeface="Noto Sans CJK KR"/>
-              </a:rPr>
-              <a:t>c</a:t>
-            </a:r>
-            <a:r>
-              <a:rPr b="0" lang="en-US" sz="2000" spc="-1" strike="noStrike">
-                <a:solidFill>
-                  <a:srgbClr val="000000"/>
-                </a:solidFill>
-                <a:latin typeface="Noto Sans CJK KR"/>
-              </a:rPr>
-              <a:t>h</a:t>
+              <a:t>Interface </a:t>
             </a:r>
             <a:r>
               <a:rPr b="0" lang="ko-KR" sz="2000" spc="-1" strike="noStrike">
@@ -9459,745 +7128,7 @@
                 </a:solidFill>
                 <a:latin typeface="Noto Sans CJK KR"/>
               </a:rPr>
-              <a:t>는</a:t>
-            </a:r>
-            <a:r>
-              <a:rPr b="0" lang="en-US" sz="2000" spc="-1" strike="noStrike">
-                <a:solidFill>
-                  <a:srgbClr val="000000"/>
-                </a:solidFill>
-                <a:latin typeface="Noto Sans CJK KR"/>
-              </a:rPr>
-              <a:t> </a:t>
-            </a:r>
-            <a:r>
-              <a:rPr b="0" lang="ko-KR" sz="2000" spc="-1" strike="noStrike">
-                <a:solidFill>
-                  <a:srgbClr val="000000"/>
-                </a:solidFill>
-                <a:latin typeface="Noto Sans CJK KR"/>
-              </a:rPr>
-              <a:t>통</a:t>
-            </a:r>
-            <a:r>
-              <a:rPr b="0" lang="ko-KR" sz="2000" spc="-1" strike="noStrike">
-                <a:solidFill>
-                  <a:srgbClr val="000000"/>
-                </a:solidFill>
-                <a:latin typeface="Noto Sans CJK KR"/>
-              </a:rPr>
-              <a:t>신</a:t>
-            </a:r>
-            <a:r>
-              <a:rPr b="0" lang="en-US" sz="2000" spc="-1" strike="noStrike">
-                <a:solidFill>
-                  <a:srgbClr val="000000"/>
-                </a:solidFill>
-                <a:latin typeface="Noto Sans CJK KR"/>
-              </a:rPr>
-              <a:t> </a:t>
-            </a:r>
-            <a:r>
-              <a:rPr b="0" lang="ko-KR" sz="2000" spc="-1" strike="noStrike">
-                <a:solidFill>
-                  <a:srgbClr val="000000"/>
-                </a:solidFill>
-                <a:latin typeface="Noto Sans CJK KR"/>
-              </a:rPr>
-              <a:t>이</a:t>
-            </a:r>
-            <a:r>
-              <a:rPr b="0" lang="ko-KR" sz="2000" spc="-1" strike="noStrike">
-                <a:solidFill>
-                  <a:srgbClr val="000000"/>
-                </a:solidFill>
-                <a:latin typeface="Noto Sans CJK KR"/>
-              </a:rPr>
-              <a:t>름</a:t>
-            </a:r>
-            <a:r>
-              <a:rPr b="0" lang="ko-KR" sz="2000" spc="-1" strike="noStrike">
-                <a:solidFill>
-                  <a:srgbClr val="000000"/>
-                </a:solidFill>
-                <a:latin typeface="Noto Sans CJK KR"/>
-              </a:rPr>
-              <a:t>과</a:t>
-            </a:r>
-            <a:r>
-              <a:rPr b="0" lang="en-US" sz="2000" spc="-1" strike="noStrike">
-                <a:solidFill>
-                  <a:srgbClr val="000000"/>
-                </a:solidFill>
-                <a:latin typeface="Noto Sans CJK KR"/>
-              </a:rPr>
-              <a:t> </a:t>
-            </a:r>
-            <a:r>
-              <a:rPr b="0" lang="ko-KR" sz="2000" spc="-1" strike="noStrike">
-                <a:solidFill>
-                  <a:srgbClr val="000000"/>
-                </a:solidFill>
-                <a:latin typeface="Noto Sans CJK KR"/>
-              </a:rPr>
-              <a:t>전</a:t>
-            </a:r>
-            <a:r>
-              <a:rPr b="0" lang="ko-KR" sz="2000" spc="-1" strike="noStrike">
-                <a:solidFill>
-                  <a:srgbClr val="000000"/>
-                </a:solidFill>
-                <a:latin typeface="Noto Sans CJK KR"/>
-              </a:rPr>
-              <a:t>체</a:t>
-            </a:r>
-            <a:r>
-              <a:rPr b="0" lang="en-US" sz="2000" spc="-1" strike="noStrike">
-                <a:solidFill>
-                  <a:srgbClr val="000000"/>
-                </a:solidFill>
-                <a:latin typeface="Noto Sans CJK KR"/>
-              </a:rPr>
-              <a:t> </a:t>
-            </a:r>
-            <a:r>
-              <a:rPr b="0" lang="ko-KR" sz="2000" spc="-1" strike="noStrike">
-                <a:solidFill>
-                  <a:srgbClr val="000000"/>
-                </a:solidFill>
-                <a:latin typeface="Noto Sans CJK KR"/>
-              </a:rPr>
-              <a:t>타</a:t>
-            </a:r>
-            <a:r>
-              <a:rPr b="0" lang="ko-KR" sz="2000" spc="-1" strike="noStrike">
-                <a:solidFill>
-                  <a:srgbClr val="000000"/>
-                </a:solidFill>
-                <a:latin typeface="Noto Sans CJK KR"/>
-              </a:rPr>
-              <a:t>입</a:t>
-            </a:r>
-            <a:r>
-              <a:rPr b="0" lang="ko-KR" sz="2000" spc="-1" strike="noStrike">
-                <a:solidFill>
-                  <a:srgbClr val="000000"/>
-                </a:solidFill>
-                <a:latin typeface="Noto Sans CJK KR"/>
-              </a:rPr>
-              <a:t>이</a:t>
-            </a:r>
-            <a:r>
-              <a:rPr b="0" lang="en-US" sz="2000" spc="-1" strike="noStrike">
-                <a:solidFill>
-                  <a:srgbClr val="000000"/>
-                </a:solidFill>
-                <a:latin typeface="Noto Sans CJK KR"/>
-              </a:rPr>
-              <a:t> </a:t>
-            </a:r>
-            <a:r>
-              <a:rPr b="0" lang="ko-KR" sz="2000" spc="-1" strike="noStrike">
-                <a:solidFill>
-                  <a:srgbClr val="000000"/>
-                </a:solidFill>
-                <a:latin typeface="Noto Sans CJK KR"/>
-              </a:rPr>
-              <a:t>모</a:t>
-            </a:r>
-            <a:r>
-              <a:rPr b="0" lang="ko-KR" sz="2000" spc="-1" strike="noStrike">
-                <a:solidFill>
-                  <a:srgbClr val="000000"/>
-                </a:solidFill>
-                <a:latin typeface="Noto Sans CJK KR"/>
-              </a:rPr>
-              <a:t>두</a:t>
-            </a:r>
-            <a:r>
-              <a:rPr b="0" lang="en-US" sz="2000" spc="-1" strike="noStrike">
-                <a:solidFill>
-                  <a:srgbClr val="000000"/>
-                </a:solidFill>
-                <a:latin typeface="Noto Sans CJK KR"/>
-              </a:rPr>
-              <a:t> </a:t>
-            </a:r>
-            <a:r>
-              <a:rPr b="0" lang="ko-KR" sz="2000" spc="-1" strike="noStrike">
-                <a:solidFill>
-                  <a:srgbClr val="000000"/>
-                </a:solidFill>
-                <a:latin typeface="Noto Sans CJK KR"/>
-              </a:rPr>
-              <a:t>정</a:t>
-            </a:r>
-            <a:r>
-              <a:rPr b="0" lang="ko-KR" sz="2000" spc="-1" strike="noStrike">
-                <a:solidFill>
-                  <a:srgbClr val="000000"/>
-                </a:solidFill>
-                <a:latin typeface="Noto Sans CJK KR"/>
-              </a:rPr>
-              <a:t>확</a:t>
-            </a:r>
-            <a:r>
-              <a:rPr b="0" lang="ko-KR" sz="2000" spc="-1" strike="noStrike">
-                <a:solidFill>
-                  <a:srgbClr val="000000"/>
-                </a:solidFill>
-                <a:latin typeface="Noto Sans CJK KR"/>
-              </a:rPr>
-              <a:t>히</a:t>
-            </a:r>
-            <a:r>
-              <a:rPr b="0" lang="en-US" sz="2000" spc="-1" strike="noStrike">
-                <a:solidFill>
-                  <a:srgbClr val="000000"/>
-                </a:solidFill>
-                <a:latin typeface="Noto Sans CJK KR"/>
-              </a:rPr>
-              <a:t> </a:t>
-            </a:r>
-            <a:r>
-              <a:rPr b="0" lang="ko-KR" sz="2000" spc="-1" strike="noStrike">
-                <a:solidFill>
-                  <a:srgbClr val="000000"/>
-                </a:solidFill>
-                <a:latin typeface="Noto Sans CJK KR"/>
-              </a:rPr>
-              <a:t>같</a:t>
-            </a:r>
-            <a:r>
-              <a:rPr b="0" lang="ko-KR" sz="2000" spc="-1" strike="noStrike">
-                <a:solidFill>
-                  <a:srgbClr val="000000"/>
-                </a:solidFill>
-                <a:latin typeface="Noto Sans CJK KR"/>
-              </a:rPr>
-              <a:t>아</a:t>
-            </a:r>
-            <a:r>
-              <a:rPr b="0" lang="ko-KR" sz="2000" spc="-1" strike="noStrike">
-                <a:solidFill>
-                  <a:srgbClr val="000000"/>
-                </a:solidFill>
-                <a:latin typeface="Noto Sans CJK KR"/>
-              </a:rPr>
-              <a:t>야</a:t>
-            </a:r>
-            <a:r>
-              <a:rPr b="0" lang="en-US" sz="2000" spc="-1" strike="noStrike">
-                <a:solidFill>
-                  <a:srgbClr val="000000"/>
-                </a:solidFill>
-                <a:latin typeface="Noto Sans CJK KR"/>
-              </a:rPr>
-              <a:t> </a:t>
-            </a:r>
-            <a:r>
-              <a:rPr b="0" lang="ko-KR" sz="2000" spc="-1" strike="noStrike">
-                <a:solidFill>
-                  <a:srgbClr val="000000"/>
-                </a:solidFill>
-                <a:latin typeface="Noto Sans CJK KR"/>
-              </a:rPr>
-              <a:t>한</a:t>
-            </a:r>
-            <a:r>
-              <a:rPr b="0" lang="ko-KR" sz="2000" spc="-1" strike="noStrike">
-                <a:solidFill>
-                  <a:srgbClr val="000000"/>
-                </a:solidFill>
-                <a:latin typeface="Noto Sans CJK KR"/>
-              </a:rPr>
-              <a:t>다</a:t>
-            </a:r>
-            <a:r>
-              <a:rPr b="0" lang="ko-KR" sz="2000" spc="-1" strike="noStrike">
-                <a:solidFill>
-                  <a:srgbClr val="000000"/>
-                </a:solidFill>
-                <a:latin typeface="Noto Sans CJK KR"/>
-              </a:rPr>
-              <a:t>는</a:t>
-            </a:r>
-            <a:r>
-              <a:rPr b="0" lang="en-US" sz="2000" spc="-1" strike="noStrike">
-                <a:solidFill>
-                  <a:srgbClr val="000000"/>
-                </a:solidFill>
-                <a:latin typeface="Noto Sans CJK KR"/>
-              </a:rPr>
-              <a:t> </a:t>
-            </a:r>
-            <a:r>
-              <a:rPr b="0" lang="ko-KR" sz="2000" spc="-1" strike="noStrike">
-                <a:solidFill>
-                  <a:srgbClr val="000000"/>
-                </a:solidFill>
-                <a:latin typeface="Noto Sans CJK KR"/>
-              </a:rPr>
-              <a:t>뜻</a:t>
-            </a:r>
-            <a:r>
-              <a:rPr b="0" lang="ko-KR" sz="2000" spc="-1" strike="noStrike">
-                <a:solidFill>
-                  <a:srgbClr val="000000"/>
-                </a:solidFill>
-                <a:latin typeface="Noto Sans CJK KR"/>
-              </a:rPr>
-              <a:t>입</a:t>
-            </a:r>
-            <a:r>
-              <a:rPr b="0" lang="ko-KR" sz="2000" spc="-1" strike="noStrike">
-                <a:solidFill>
-                  <a:srgbClr val="000000"/>
-                </a:solidFill>
-                <a:latin typeface="Noto Sans CJK KR"/>
-              </a:rPr>
-              <a:t>니</a:t>
-            </a:r>
-            <a:r>
-              <a:rPr b="0" lang="ko-KR" sz="2000" spc="-1" strike="noStrike">
-                <a:solidFill>
-                  <a:srgbClr val="000000"/>
-                </a:solidFill>
-                <a:latin typeface="Noto Sans CJK KR"/>
-              </a:rPr>
-              <a:t>다</a:t>
-            </a:r>
-            <a:r>
-              <a:rPr b="0" lang="en-US" sz="2000" spc="-1" strike="noStrike">
-                <a:solidFill>
-                  <a:srgbClr val="000000"/>
-                </a:solidFill>
-                <a:latin typeface="Noto Sans CJK KR"/>
-              </a:rPr>
-              <a:t>. </a:t>
-            </a:r>
-            <a:r>
-              <a:rPr b="0" lang="en-US" sz="2000" spc="-1" strike="noStrike">
-                <a:solidFill>
-                  <a:srgbClr val="000000"/>
-                </a:solidFill>
-                <a:latin typeface="Noto Sans CJK KR"/>
-              </a:rPr>
-              <a:t>v</a:t>
-            </a:r>
-            <a:r>
-              <a:rPr b="0" lang="en-US" sz="2000" spc="-1" strike="noStrike">
-                <a:solidFill>
-                  <a:srgbClr val="000000"/>
-                </a:solidFill>
-                <a:latin typeface="Noto Sans CJK KR"/>
-              </a:rPr>
-              <a:t>a</a:t>
-            </a:r>
-            <a:r>
-              <a:rPr b="0" lang="en-US" sz="2000" spc="-1" strike="noStrike">
-                <a:solidFill>
-                  <a:srgbClr val="000000"/>
-                </a:solidFill>
-                <a:latin typeface="Noto Sans CJK KR"/>
-              </a:rPr>
-              <a:t>l</a:t>
-            </a:r>
-            <a:r>
-              <a:rPr b="0" lang="en-US" sz="2000" spc="-1" strike="noStrike">
-                <a:solidFill>
-                  <a:srgbClr val="000000"/>
-                </a:solidFill>
-                <a:latin typeface="Noto Sans CJK KR"/>
-              </a:rPr>
-              <a:t>i</a:t>
-            </a:r>
-            <a:r>
-              <a:rPr b="0" lang="en-US" sz="2000" spc="-1" strike="noStrike">
-                <a:solidFill>
-                  <a:srgbClr val="000000"/>
-                </a:solidFill>
-                <a:latin typeface="Noto Sans CJK KR"/>
-              </a:rPr>
-              <a:t>d</a:t>
-            </a:r>
-            <a:r>
-              <a:rPr b="0" lang="en-US" sz="2000" spc="-1" strike="noStrike">
-                <a:solidFill>
-                  <a:srgbClr val="000000"/>
-                </a:solidFill>
-                <a:latin typeface="Noto Sans CJK KR"/>
-              </a:rPr>
-              <a:t>a</a:t>
-            </a:r>
-            <a:r>
-              <a:rPr b="0" lang="en-US" sz="2000" spc="-1" strike="noStrike">
-                <a:solidFill>
-                  <a:srgbClr val="000000"/>
-                </a:solidFill>
-                <a:latin typeface="Noto Sans CJK KR"/>
-              </a:rPr>
-              <a:t>t</a:t>
-            </a:r>
-            <a:r>
-              <a:rPr b="0" lang="en-US" sz="2000" spc="-1" strike="noStrike">
-                <a:solidFill>
-                  <a:srgbClr val="000000"/>
-                </a:solidFill>
-                <a:latin typeface="Noto Sans CJK KR"/>
-              </a:rPr>
-              <a:t>i</a:t>
-            </a:r>
-            <a:r>
-              <a:rPr b="0" lang="en-US" sz="2000" spc="-1" strike="noStrike">
-                <a:solidFill>
-                  <a:srgbClr val="000000"/>
-                </a:solidFill>
-                <a:latin typeface="Noto Sans CJK KR"/>
-              </a:rPr>
-              <a:t>o</a:t>
-            </a:r>
-            <a:r>
-              <a:rPr b="0" lang="en-US" sz="2000" spc="-1" strike="noStrike">
-                <a:solidFill>
-                  <a:srgbClr val="000000"/>
-                </a:solidFill>
-                <a:latin typeface="Noto Sans CJK KR"/>
-              </a:rPr>
-              <a:t>n</a:t>
-            </a:r>
-            <a:r>
-              <a:rPr b="0" lang="ko-KR" sz="2000" spc="-1" strike="noStrike">
-                <a:solidFill>
-                  <a:srgbClr val="000000"/>
-                </a:solidFill>
-                <a:latin typeface="Noto Sans CJK KR"/>
-              </a:rPr>
-              <a:t>은</a:t>
-            </a:r>
-            <a:r>
-              <a:rPr b="0" lang="en-US" sz="2000" spc="-1" strike="noStrike">
-                <a:solidFill>
-                  <a:srgbClr val="000000"/>
-                </a:solidFill>
-                <a:latin typeface="Noto Sans CJK KR"/>
-              </a:rPr>
-              <a:t> </a:t>
-            </a:r>
-            <a:r>
-              <a:rPr b="0" lang="en-US" sz="2000" spc="-1" strike="noStrike">
-                <a:solidFill>
-                  <a:srgbClr val="000000"/>
-                </a:solidFill>
-                <a:latin typeface="Noto Sans CJK KR"/>
-              </a:rPr>
-              <a:t>p</a:t>
-            </a:r>
-            <a:r>
-              <a:rPr b="0" lang="en-US" sz="2000" spc="-1" strike="noStrike">
-                <a:solidFill>
-                  <a:srgbClr val="000000"/>
-                </a:solidFill>
-                <a:latin typeface="Noto Sans CJK KR"/>
-              </a:rPr>
-              <a:t>a</a:t>
-            </a:r>
-            <a:r>
-              <a:rPr b="0" lang="en-US" sz="2000" spc="-1" strike="noStrike">
-                <a:solidFill>
-                  <a:srgbClr val="000000"/>
-                </a:solidFill>
-                <a:latin typeface="Noto Sans CJK KR"/>
-              </a:rPr>
-              <a:t>y</a:t>
-            </a:r>
-            <a:r>
-              <a:rPr b="0" lang="en-US" sz="2000" spc="-1" strike="noStrike">
-                <a:solidFill>
-                  <a:srgbClr val="000000"/>
-                </a:solidFill>
-                <a:latin typeface="Noto Sans CJK KR"/>
-              </a:rPr>
-              <a:t>l</a:t>
-            </a:r>
-            <a:r>
-              <a:rPr b="0" lang="en-US" sz="2000" spc="-1" strike="noStrike">
-                <a:solidFill>
-                  <a:srgbClr val="000000"/>
-                </a:solidFill>
-                <a:latin typeface="Noto Sans CJK KR"/>
-              </a:rPr>
-              <a:t>o</a:t>
-            </a:r>
-            <a:r>
-              <a:rPr b="0" lang="en-US" sz="2000" spc="-1" strike="noStrike">
-                <a:solidFill>
-                  <a:srgbClr val="000000"/>
-                </a:solidFill>
-                <a:latin typeface="Noto Sans CJK KR"/>
-              </a:rPr>
-              <a:t>a</a:t>
-            </a:r>
-            <a:r>
-              <a:rPr b="0" lang="en-US" sz="2000" spc="-1" strike="noStrike">
-                <a:solidFill>
-                  <a:srgbClr val="000000"/>
-                </a:solidFill>
-                <a:latin typeface="Noto Sans CJK KR"/>
-              </a:rPr>
-              <a:t>d</a:t>
-            </a:r>
-            <a:r>
-              <a:rPr b="0" lang="ko-KR" sz="2000" spc="-1" strike="noStrike">
-                <a:solidFill>
-                  <a:srgbClr val="000000"/>
-                </a:solidFill>
-                <a:latin typeface="Noto Sans CJK KR"/>
-              </a:rPr>
-              <a:t>가</a:t>
-            </a:r>
-            <a:r>
-              <a:rPr b="0" lang="en-US" sz="2000" spc="-1" strike="noStrike">
-                <a:solidFill>
-                  <a:srgbClr val="000000"/>
-                </a:solidFill>
-                <a:latin typeface="Noto Sans CJK KR"/>
-              </a:rPr>
-              <a:t> </a:t>
-            </a:r>
-            <a:r>
-              <a:rPr b="0" lang="en-US" sz="2000" spc="-1" strike="noStrike">
-                <a:solidFill>
-                  <a:srgbClr val="000000"/>
-                </a:solidFill>
-                <a:latin typeface="Noto Sans CJK KR"/>
-              </a:rPr>
-              <a:t>I</a:t>
-            </a:r>
-            <a:r>
-              <a:rPr b="0" lang="en-US" sz="2000" spc="-1" strike="noStrike">
-                <a:solidFill>
-                  <a:srgbClr val="000000"/>
-                </a:solidFill>
-                <a:latin typeface="Noto Sans CJK KR"/>
-              </a:rPr>
-              <a:t>n</a:t>
-            </a:r>
-            <a:r>
-              <a:rPr b="0" lang="en-US" sz="2000" spc="-1" strike="noStrike">
-                <a:solidFill>
-                  <a:srgbClr val="000000"/>
-                </a:solidFill>
-                <a:latin typeface="Noto Sans CJK KR"/>
-              </a:rPr>
-              <a:t>t</a:t>
-            </a:r>
-            <a:r>
-              <a:rPr b="0" lang="en-US" sz="2000" spc="-1" strike="noStrike">
-                <a:solidFill>
-                  <a:srgbClr val="000000"/>
-                </a:solidFill>
-                <a:latin typeface="Noto Sans CJK KR"/>
-              </a:rPr>
-              <a:t>e</a:t>
-            </a:r>
-            <a:r>
-              <a:rPr b="0" lang="en-US" sz="2000" spc="-1" strike="noStrike">
-                <a:solidFill>
-                  <a:srgbClr val="000000"/>
-                </a:solidFill>
-                <a:latin typeface="Noto Sans CJK KR"/>
-              </a:rPr>
-              <a:t>r</a:t>
-            </a:r>
-            <a:r>
-              <a:rPr b="0" lang="en-US" sz="2000" spc="-1" strike="noStrike">
-                <a:solidFill>
-                  <a:srgbClr val="000000"/>
-                </a:solidFill>
-                <a:latin typeface="Noto Sans CJK KR"/>
-              </a:rPr>
-              <a:t>f</a:t>
-            </a:r>
-            <a:r>
-              <a:rPr b="0" lang="en-US" sz="2000" spc="-1" strike="noStrike">
-                <a:solidFill>
-                  <a:srgbClr val="000000"/>
-                </a:solidFill>
-                <a:latin typeface="Noto Sans CJK KR"/>
-              </a:rPr>
-              <a:t>a</a:t>
-            </a:r>
-            <a:r>
-              <a:rPr b="0" lang="en-US" sz="2000" spc="-1" strike="noStrike">
-                <a:solidFill>
-                  <a:srgbClr val="000000"/>
-                </a:solidFill>
-                <a:latin typeface="Noto Sans CJK KR"/>
-              </a:rPr>
-              <a:t>c</a:t>
-            </a:r>
-            <a:r>
-              <a:rPr b="0" lang="en-US" sz="2000" spc="-1" strike="noStrike">
-                <a:solidFill>
-                  <a:srgbClr val="000000"/>
-                </a:solidFill>
-                <a:latin typeface="Noto Sans CJK KR"/>
-              </a:rPr>
-              <a:t>e</a:t>
-            </a:r>
-            <a:r>
-              <a:rPr b="0" lang="en-US" sz="2000" spc="-1" strike="noStrike">
-                <a:solidFill>
-                  <a:srgbClr val="000000"/>
-                </a:solidFill>
-                <a:latin typeface="Noto Sans CJK KR"/>
-              </a:rPr>
-              <a:t> </a:t>
-            </a:r>
-            <a:r>
-              <a:rPr b="0" lang="ko-KR" sz="2000" spc="-1" strike="noStrike">
-                <a:solidFill>
-                  <a:srgbClr val="000000"/>
-                </a:solidFill>
-                <a:latin typeface="Noto Sans CJK KR"/>
-              </a:rPr>
-              <a:t>필</a:t>
-            </a:r>
-            <a:r>
-              <a:rPr b="0" lang="ko-KR" sz="2000" spc="-1" strike="noStrike">
-                <a:solidFill>
-                  <a:srgbClr val="000000"/>
-                </a:solidFill>
-                <a:latin typeface="Noto Sans CJK KR"/>
-              </a:rPr>
-              <a:t>드</a:t>
-            </a:r>
-            <a:r>
-              <a:rPr b="0" lang="en-US" sz="2000" spc="-1" strike="noStrike">
-                <a:solidFill>
-                  <a:srgbClr val="000000"/>
-                </a:solidFill>
-                <a:latin typeface="Noto Sans CJK KR"/>
-              </a:rPr>
-              <a:t> </a:t>
-            </a:r>
-            <a:r>
-              <a:rPr b="0" lang="ko-KR" sz="2000" spc="-1" strike="noStrike">
-                <a:solidFill>
-                  <a:srgbClr val="000000"/>
-                </a:solidFill>
-                <a:latin typeface="Noto Sans CJK KR"/>
-              </a:rPr>
-              <a:t>구</a:t>
-            </a:r>
-            <a:r>
-              <a:rPr b="0" lang="ko-KR" sz="2000" spc="-1" strike="noStrike">
-                <a:solidFill>
-                  <a:srgbClr val="000000"/>
-                </a:solidFill>
-                <a:latin typeface="Noto Sans CJK KR"/>
-              </a:rPr>
-              <a:t>조</a:t>
-            </a:r>
-            <a:r>
-              <a:rPr b="0" lang="ko-KR" sz="2000" spc="-1" strike="noStrike">
-                <a:solidFill>
-                  <a:srgbClr val="000000"/>
-                </a:solidFill>
-                <a:latin typeface="Noto Sans CJK KR"/>
-              </a:rPr>
-              <a:t>에</a:t>
-            </a:r>
-            <a:r>
-              <a:rPr b="0" lang="en-US" sz="2000" spc="-1" strike="noStrike">
-                <a:solidFill>
-                  <a:srgbClr val="000000"/>
-                </a:solidFill>
-                <a:latin typeface="Noto Sans CJK KR"/>
-              </a:rPr>
-              <a:t> </a:t>
-            </a:r>
-            <a:r>
-              <a:rPr b="0" lang="ko-KR" sz="2000" spc="-1" strike="noStrike">
-                <a:solidFill>
-                  <a:srgbClr val="000000"/>
-                </a:solidFill>
-                <a:latin typeface="Noto Sans CJK KR"/>
-              </a:rPr>
-              <a:t>맞</a:t>
-            </a:r>
-            <a:r>
-              <a:rPr b="0" lang="ko-KR" sz="2000" spc="-1" strike="noStrike">
-                <a:solidFill>
-                  <a:srgbClr val="000000"/>
-                </a:solidFill>
-                <a:latin typeface="Noto Sans CJK KR"/>
-              </a:rPr>
-              <a:t>는</a:t>
-            </a:r>
-            <a:r>
-              <a:rPr b="0" lang="ko-KR" sz="2000" spc="-1" strike="noStrike">
-                <a:solidFill>
-                  <a:srgbClr val="000000"/>
-                </a:solidFill>
-                <a:latin typeface="Noto Sans CJK KR"/>
-              </a:rPr>
-              <a:t>지</a:t>
-            </a:r>
-            <a:r>
-              <a:rPr b="0" lang="en-US" sz="2000" spc="-1" strike="noStrike">
-                <a:solidFill>
-                  <a:srgbClr val="000000"/>
-                </a:solidFill>
-                <a:latin typeface="Noto Sans CJK KR"/>
-              </a:rPr>
-              <a:t> </a:t>
-            </a:r>
-            <a:r>
-              <a:rPr b="0" lang="ko-KR" sz="2000" spc="-1" strike="noStrike">
-                <a:solidFill>
-                  <a:srgbClr val="000000"/>
-                </a:solidFill>
-                <a:latin typeface="Noto Sans CJK KR"/>
-              </a:rPr>
-              <a:t>확</a:t>
-            </a:r>
-            <a:r>
-              <a:rPr b="0" lang="ko-KR" sz="2000" spc="-1" strike="noStrike">
-                <a:solidFill>
-                  <a:srgbClr val="000000"/>
-                </a:solidFill>
-                <a:latin typeface="Noto Sans CJK KR"/>
-              </a:rPr>
-              <a:t>인</a:t>
-            </a:r>
-            <a:r>
-              <a:rPr b="0" lang="ko-KR" sz="2000" spc="-1" strike="noStrike">
-                <a:solidFill>
-                  <a:srgbClr val="000000"/>
-                </a:solidFill>
-                <a:latin typeface="Noto Sans CJK KR"/>
-              </a:rPr>
-              <a:t>합</a:t>
-            </a:r>
-            <a:r>
-              <a:rPr b="0" lang="ko-KR" sz="2000" spc="-1" strike="noStrike">
-                <a:solidFill>
-                  <a:srgbClr val="000000"/>
-                </a:solidFill>
-                <a:latin typeface="Noto Sans CJK KR"/>
-              </a:rPr>
-              <a:t>니</a:t>
-            </a:r>
-            <a:r>
-              <a:rPr b="0" lang="ko-KR" sz="2000" spc="-1" strike="noStrike">
-                <a:solidFill>
-                  <a:srgbClr val="000000"/>
-                </a:solidFill>
-                <a:latin typeface="Noto Sans CJK KR"/>
-              </a:rPr>
-              <a:t>다</a:t>
+              <a:t>필드 구조에 맞는지 확인합니다</a:t>
             </a:r>
             <a:r>
               <a:rPr b="0" lang="en-US" sz="2000" spc="-1" strike="noStrike">
@@ -10249,43 +7180,7 @@
                 </a:solidFill>
                 <a:latin typeface="Noto Sans CJK KR"/>
               </a:rPr>
-              <a:t>예</a:t>
-            </a:r>
-            <a:r>
-              <a:rPr b="0" lang="ko-KR" sz="2000" spc="-1" strike="noStrike">
-                <a:solidFill>
-                  <a:srgbClr val="000000"/>
-                </a:solidFill>
-                <a:latin typeface="Noto Sans CJK KR"/>
-              </a:rPr>
-              <a:t>상</a:t>
-            </a:r>
-            <a:r>
-              <a:rPr b="0" lang="en-US" sz="2000" spc="-1" strike="noStrike">
-                <a:solidFill>
-                  <a:srgbClr val="000000"/>
-                </a:solidFill>
-                <a:latin typeface="Noto Sans CJK KR"/>
-              </a:rPr>
-              <a:t> </a:t>
-            </a:r>
-            <a:r>
-              <a:rPr b="0" lang="ko-KR" sz="2000" spc="-1" strike="noStrike">
-                <a:solidFill>
-                  <a:srgbClr val="000000"/>
-                </a:solidFill>
-                <a:latin typeface="Noto Sans CJK KR"/>
-              </a:rPr>
-              <a:t>질</a:t>
-            </a:r>
-            <a:r>
-              <a:rPr b="0" lang="ko-KR" sz="2000" spc="-1" strike="noStrike">
-                <a:solidFill>
-                  <a:srgbClr val="000000"/>
-                </a:solidFill>
-                <a:latin typeface="Noto Sans CJK KR"/>
-              </a:rPr>
-              <a:t>문</a:t>
+              <a:t>예상 질문</a:t>
             </a:r>
             <a:endParaRPr b="0" lang="en-US" sz="2000" spc="-1" strike="noStrike">
               <a:solidFill>
@@ -10311,7 +7206,16 @@
                 </a:solidFill>
                 <a:latin typeface="Noto Sans CJK KR"/>
               </a:rPr>
-              <a:t>입</a:t>
+              <a:t>입력값이 틀려도 </a:t>
+            </a:r>
+            <a:r>
+              <a:rPr b="0" lang="en-US" sz="2000" spc="-1" strike="noStrike">
+                <a:solidFill>
+                  <a:srgbClr val="000000"/>
+                </a:solidFill>
+                <a:latin typeface="Noto Sans CJK KR"/>
+              </a:rPr>
+              <a:t>ROS2 Server</a:t>
             </a:r>
             <a:r>
               <a:rPr b="0" lang="ko-KR" sz="2000" spc="-1" strike="noStrike">
@@ -10320,232 +7224,7 @@
                 </a:solidFill>
                 <a:latin typeface="Noto Sans CJK KR"/>
               </a:rPr>
-              <a:t>력</a:t>
-            </a:r>
-            <a:r>
-              <a:rPr b="0" lang="ko-KR" sz="2000" spc="-1" strike="noStrike">
-                <a:solidFill>
-                  <a:srgbClr val="000000"/>
-                </a:solidFill>
-                <a:latin typeface="Noto Sans CJK KR"/>
-              </a:rPr>
-              <a:t>값</a:t>
-            </a:r>
-            <a:r>
-              <a:rPr b="0" lang="ko-KR" sz="2000" spc="-1" strike="noStrike">
-                <a:solidFill>
-                  <a:srgbClr val="000000"/>
-                </a:solidFill>
-                <a:latin typeface="Noto Sans CJK KR"/>
-              </a:rPr>
-              <a:t>이</a:t>
-            </a:r>
-            <a:r>
-              <a:rPr b="0" lang="en-US" sz="2000" spc="-1" strike="noStrike">
-                <a:solidFill>
-                  <a:srgbClr val="000000"/>
-                </a:solidFill>
-                <a:latin typeface="Noto Sans CJK KR"/>
-              </a:rPr>
-              <a:t> </a:t>
-            </a:r>
-            <a:r>
-              <a:rPr b="0" lang="ko-KR" sz="2000" spc="-1" strike="noStrike">
-                <a:solidFill>
-                  <a:srgbClr val="000000"/>
-                </a:solidFill>
-                <a:latin typeface="Noto Sans CJK KR"/>
-              </a:rPr>
-              <a:t>틀</a:t>
-            </a:r>
-            <a:r>
-              <a:rPr b="0" lang="ko-KR" sz="2000" spc="-1" strike="noStrike">
-                <a:solidFill>
-                  <a:srgbClr val="000000"/>
-                </a:solidFill>
-                <a:latin typeface="Noto Sans CJK KR"/>
-              </a:rPr>
-              <a:t>려</a:t>
-            </a:r>
-            <a:r>
-              <a:rPr b="0" lang="ko-KR" sz="2000" spc="-1" strike="noStrike">
-                <a:solidFill>
-                  <a:srgbClr val="000000"/>
-                </a:solidFill>
-                <a:latin typeface="Noto Sans CJK KR"/>
-              </a:rPr>
-              <a:t>도</a:t>
-            </a:r>
-            <a:r>
-              <a:rPr b="0" lang="en-US" sz="2000" spc="-1" strike="noStrike">
-                <a:solidFill>
-                  <a:srgbClr val="000000"/>
-                </a:solidFill>
-                <a:latin typeface="Noto Sans CJK KR"/>
-              </a:rPr>
-              <a:t> </a:t>
-            </a:r>
-            <a:r>
-              <a:rPr b="0" lang="en-US" sz="2000" spc="-1" strike="noStrike">
-                <a:solidFill>
-                  <a:srgbClr val="000000"/>
-                </a:solidFill>
-                <a:latin typeface="Noto Sans CJK KR"/>
-              </a:rPr>
-              <a:t>R</a:t>
-            </a:r>
-            <a:r>
-              <a:rPr b="0" lang="en-US" sz="2000" spc="-1" strike="noStrike">
-                <a:solidFill>
-                  <a:srgbClr val="000000"/>
-                </a:solidFill>
-                <a:latin typeface="Noto Sans CJK KR"/>
-              </a:rPr>
-              <a:t>O</a:t>
-            </a:r>
-            <a:r>
-              <a:rPr b="0" lang="en-US" sz="2000" spc="-1" strike="noStrike">
-                <a:solidFill>
-                  <a:srgbClr val="000000"/>
-                </a:solidFill>
-                <a:latin typeface="Noto Sans CJK KR"/>
-              </a:rPr>
-              <a:t>S</a:t>
-            </a:r>
-            <a:r>
-              <a:rPr b="0" lang="en-US" sz="2000" spc="-1" strike="noStrike">
-                <a:solidFill>
-                  <a:srgbClr val="000000"/>
-                </a:solidFill>
-                <a:latin typeface="Noto Sans CJK KR"/>
-              </a:rPr>
-              <a:t>2</a:t>
-            </a:r>
-            <a:r>
-              <a:rPr b="0" lang="en-US" sz="2000" spc="-1" strike="noStrike">
-                <a:solidFill>
-                  <a:srgbClr val="000000"/>
-                </a:solidFill>
-                <a:latin typeface="Noto Sans CJK KR"/>
-              </a:rPr>
-              <a:t> </a:t>
-            </a:r>
-            <a:r>
-              <a:rPr b="0" lang="en-US" sz="2000" spc="-1" strike="noStrike">
-                <a:solidFill>
-                  <a:srgbClr val="000000"/>
-                </a:solidFill>
-                <a:latin typeface="Noto Sans CJK KR"/>
-              </a:rPr>
-              <a:t>S</a:t>
-            </a:r>
-            <a:r>
-              <a:rPr b="0" lang="en-US" sz="2000" spc="-1" strike="noStrike">
-                <a:solidFill>
-                  <a:srgbClr val="000000"/>
-                </a:solidFill>
-                <a:latin typeface="Noto Sans CJK KR"/>
-              </a:rPr>
-              <a:t>e</a:t>
-            </a:r>
-            <a:r>
-              <a:rPr b="0" lang="en-US" sz="2000" spc="-1" strike="noStrike">
-                <a:solidFill>
-                  <a:srgbClr val="000000"/>
-                </a:solidFill>
-                <a:latin typeface="Noto Sans CJK KR"/>
-              </a:rPr>
-              <a:t>r</a:t>
-            </a:r>
-            <a:r>
-              <a:rPr b="0" lang="en-US" sz="2000" spc="-1" strike="noStrike">
-                <a:solidFill>
-                  <a:srgbClr val="000000"/>
-                </a:solidFill>
-                <a:latin typeface="Noto Sans CJK KR"/>
-              </a:rPr>
-              <a:t>v</a:t>
-            </a:r>
-            <a:r>
-              <a:rPr b="0" lang="en-US" sz="2000" spc="-1" strike="noStrike">
-                <a:solidFill>
-                  <a:srgbClr val="000000"/>
-                </a:solidFill>
-                <a:latin typeface="Noto Sans CJK KR"/>
-              </a:rPr>
-              <a:t>e</a:t>
-            </a:r>
-            <a:r>
-              <a:rPr b="0" lang="en-US" sz="2000" spc="-1" strike="noStrike">
-                <a:solidFill>
-                  <a:srgbClr val="000000"/>
-                </a:solidFill>
-                <a:latin typeface="Noto Sans CJK KR"/>
-              </a:rPr>
-              <a:t>r</a:t>
-            </a:r>
-            <a:r>
-              <a:rPr b="0" lang="ko-KR" sz="2000" spc="-1" strike="noStrike">
-                <a:solidFill>
-                  <a:srgbClr val="000000"/>
-                </a:solidFill>
-                <a:latin typeface="Noto Sans CJK KR"/>
-              </a:rPr>
-              <a:t>로</a:t>
-            </a:r>
-            <a:r>
-              <a:rPr b="0" lang="en-US" sz="2000" spc="-1" strike="noStrike">
-                <a:solidFill>
-                  <a:srgbClr val="000000"/>
-                </a:solidFill>
-                <a:latin typeface="Noto Sans CJK KR"/>
-              </a:rPr>
-              <a:t> </a:t>
-            </a:r>
-            <a:r>
-              <a:rPr b="0" lang="ko-KR" sz="2000" spc="-1" strike="noStrike">
-                <a:solidFill>
-                  <a:srgbClr val="000000"/>
-                </a:solidFill>
-                <a:latin typeface="Noto Sans CJK KR"/>
-              </a:rPr>
-              <a:t>전</a:t>
-            </a:r>
-            <a:r>
-              <a:rPr b="0" lang="ko-KR" sz="2000" spc="-1" strike="noStrike">
-                <a:solidFill>
-                  <a:srgbClr val="000000"/>
-                </a:solidFill>
-                <a:latin typeface="Noto Sans CJK KR"/>
-              </a:rPr>
-              <a:t>송</a:t>
-            </a:r>
-            <a:r>
-              <a:rPr b="0" lang="ko-KR" sz="2000" spc="-1" strike="noStrike">
-                <a:solidFill>
-                  <a:srgbClr val="000000"/>
-                </a:solidFill>
-                <a:latin typeface="Noto Sans CJK KR"/>
-              </a:rPr>
-              <a:t>되</a:t>
-            </a:r>
-            <a:r>
-              <a:rPr b="0" lang="ko-KR" sz="2000" spc="-1" strike="noStrike">
-                <a:solidFill>
-                  <a:srgbClr val="000000"/>
-                </a:solidFill>
-                <a:latin typeface="Noto Sans CJK KR"/>
-              </a:rPr>
-              <a:t>나</a:t>
-            </a:r>
-            <a:r>
-              <a:rPr b="0" lang="ko-KR" sz="2000" spc="-1" strike="noStrike">
-                <a:solidFill>
-                  <a:srgbClr val="000000"/>
-                </a:solidFill>
-                <a:latin typeface="Noto Sans CJK KR"/>
-              </a:rPr>
-              <a:t>요</a:t>
+              <a:t>로 전송되나요</a:t>
             </a:r>
             <a:r>
               <a:rPr b="0" lang="en-US" sz="2000" spc="-1" strike="noStrike">
@@ -10597,43 +7276,7 @@
                 </a:solidFill>
                 <a:latin typeface="Noto Sans CJK KR"/>
               </a:rPr>
-              <a:t>짧</a:t>
-            </a:r>
-            <a:r>
-              <a:rPr b="0" lang="ko-KR" sz="2000" spc="-1" strike="noStrike">
-                <a:solidFill>
-                  <a:srgbClr val="000000"/>
-                </a:solidFill>
-                <a:latin typeface="Noto Sans CJK KR"/>
-              </a:rPr>
-              <a:t>은</a:t>
-            </a:r>
-            <a:r>
-              <a:rPr b="0" lang="en-US" sz="2000" spc="-1" strike="noStrike">
-                <a:solidFill>
-                  <a:srgbClr val="000000"/>
-                </a:solidFill>
-                <a:latin typeface="Noto Sans CJK KR"/>
-              </a:rPr>
-              <a:t> </a:t>
-            </a:r>
-            <a:r>
-              <a:rPr b="0" lang="ko-KR" sz="2000" spc="-1" strike="noStrike">
-                <a:solidFill>
-                  <a:srgbClr val="000000"/>
-                </a:solidFill>
-                <a:latin typeface="Noto Sans CJK KR"/>
-              </a:rPr>
-              <a:t>답</a:t>
-            </a:r>
-            <a:r>
-              <a:rPr b="0" lang="ko-KR" sz="2000" spc="-1" strike="noStrike">
-                <a:solidFill>
-                  <a:srgbClr val="000000"/>
-                </a:solidFill>
-                <a:latin typeface="Noto Sans CJK KR"/>
-              </a:rPr>
-              <a:t>변</a:t>
+              <a:t>짧은 답변</a:t>
             </a:r>
             <a:endParaRPr b="0" lang="en-US" sz="2000" spc="-1" strike="noStrike">
               <a:solidFill>
@@ -10659,7 +7302,16 @@
                 </a:solidFill>
                 <a:latin typeface="Noto Sans CJK KR"/>
               </a:rPr>
-              <a:t>문</a:t>
+              <a:t>문서 기준으로 </a:t>
+            </a:r>
+            <a:r>
+              <a:rPr b="0" lang="en-US" sz="2000" spc="-1" strike="noStrike">
+                <a:solidFill>
+                  <a:srgbClr val="000000"/>
+                </a:solidFill>
+                <a:latin typeface="Noto Sans CJK KR"/>
+              </a:rPr>
+              <a:t>validation </a:t>
             </a:r>
             <a:r>
               <a:rPr b="0" lang="ko-KR" sz="2000" spc="-1" strike="noStrike">
@@ -10668,7 +7320,7 @@
                 </a:solidFill>
                 <a:latin typeface="Noto Sans CJK KR"/>
               </a:rPr>
-              <a:t>서</a:t>
+              <a:t>실패 시 전송하지 않고 </a:t>
             </a:r>
             <a:r>
               <a:rPr b="0" lang="en-US" sz="2000" spc="-1" strike="noStrike">
@@ -10677,7 +7329,7 @@
                 </a:solidFill>
                 <a:latin typeface="Noto Sans CJK KR"/>
               </a:rPr>
-              <a:t> </a:t>
+              <a:t>sent_to_server=false</a:t>
             </a:r>
             <a:r>
               <a:rPr b="0" lang="ko-KR" sz="2000" spc="-1" strike="noStrike">
@@ -10686,7 +7338,16 @@
                 </a:solidFill>
                 <a:latin typeface="Noto Sans CJK KR"/>
               </a:rPr>
-              <a:t>기</a:t>
+              <a:t>로 </a:t>
+            </a:r>
+            <a:r>
+              <a:rPr b="0" lang="en-US" sz="2000" spc="-1" strike="noStrike">
+                <a:solidFill>
+                  <a:srgbClr val="000000"/>
+                </a:solidFill>
+                <a:latin typeface="Noto Sans CJK KR"/>
+              </a:rPr>
+              <a:t>history</a:t>
             </a:r>
             <a:r>
               <a:rPr b="0" lang="ko-KR" sz="2000" spc="-1" strike="noStrike">
@@ -10695,574 +7356,7 @@
                 </a:solidFill>
                 <a:latin typeface="Noto Sans CJK KR"/>
               </a:rPr>
-              <a:t>준</a:t>
-            </a:r>
-            <a:r>
-              <a:rPr b="0" lang="ko-KR" sz="2000" spc="-1" strike="noStrike">
-                <a:solidFill>
-                  <a:srgbClr val="000000"/>
-                </a:solidFill>
-                <a:latin typeface="Noto Sans CJK KR"/>
-              </a:rPr>
-              <a:t>으</a:t>
-            </a:r>
-            <a:r>
-              <a:rPr b="0" lang="ko-KR" sz="2000" spc="-1" strike="noStrike">
-                <a:solidFill>
-                  <a:srgbClr val="000000"/>
-                </a:solidFill>
-                <a:latin typeface="Noto Sans CJK KR"/>
-              </a:rPr>
-              <a:t>로</a:t>
-            </a:r>
-            <a:r>
-              <a:rPr b="0" lang="en-US" sz="2000" spc="-1" strike="noStrike">
-                <a:solidFill>
-                  <a:srgbClr val="000000"/>
-                </a:solidFill>
-                <a:latin typeface="Noto Sans CJK KR"/>
-              </a:rPr>
-              <a:t> </a:t>
-            </a:r>
-            <a:r>
-              <a:rPr b="0" lang="en-US" sz="2000" spc="-1" strike="noStrike">
-                <a:solidFill>
-                  <a:srgbClr val="000000"/>
-                </a:solidFill>
-                <a:latin typeface="Noto Sans CJK KR"/>
-              </a:rPr>
-              <a:t>v</a:t>
-            </a:r>
-            <a:r>
-              <a:rPr b="0" lang="en-US" sz="2000" spc="-1" strike="noStrike">
-                <a:solidFill>
-                  <a:srgbClr val="000000"/>
-                </a:solidFill>
-                <a:latin typeface="Noto Sans CJK KR"/>
-              </a:rPr>
-              <a:t>a</a:t>
-            </a:r>
-            <a:r>
-              <a:rPr b="0" lang="en-US" sz="2000" spc="-1" strike="noStrike">
-                <a:solidFill>
-                  <a:srgbClr val="000000"/>
-                </a:solidFill>
-                <a:latin typeface="Noto Sans CJK KR"/>
-              </a:rPr>
-              <a:t>l</a:t>
-            </a:r>
-            <a:r>
-              <a:rPr b="0" lang="en-US" sz="2000" spc="-1" strike="noStrike">
-                <a:solidFill>
-                  <a:srgbClr val="000000"/>
-                </a:solidFill>
-                <a:latin typeface="Noto Sans CJK KR"/>
-              </a:rPr>
-              <a:t>i</a:t>
-            </a:r>
-            <a:r>
-              <a:rPr b="0" lang="en-US" sz="2000" spc="-1" strike="noStrike">
-                <a:solidFill>
-                  <a:srgbClr val="000000"/>
-                </a:solidFill>
-                <a:latin typeface="Noto Sans CJK KR"/>
-              </a:rPr>
-              <a:t>d</a:t>
-            </a:r>
-            <a:r>
-              <a:rPr b="0" lang="en-US" sz="2000" spc="-1" strike="noStrike">
-                <a:solidFill>
-                  <a:srgbClr val="000000"/>
-                </a:solidFill>
-                <a:latin typeface="Noto Sans CJK KR"/>
-              </a:rPr>
-              <a:t>a</a:t>
-            </a:r>
-            <a:r>
-              <a:rPr b="0" lang="en-US" sz="2000" spc="-1" strike="noStrike">
-                <a:solidFill>
-                  <a:srgbClr val="000000"/>
-                </a:solidFill>
-                <a:latin typeface="Noto Sans CJK KR"/>
-              </a:rPr>
-              <a:t>t</a:t>
-            </a:r>
-            <a:r>
-              <a:rPr b="0" lang="en-US" sz="2000" spc="-1" strike="noStrike">
-                <a:solidFill>
-                  <a:srgbClr val="000000"/>
-                </a:solidFill>
-                <a:latin typeface="Noto Sans CJK KR"/>
-              </a:rPr>
-              <a:t>i</a:t>
-            </a:r>
-            <a:r>
-              <a:rPr b="0" lang="en-US" sz="2000" spc="-1" strike="noStrike">
-                <a:solidFill>
-                  <a:srgbClr val="000000"/>
-                </a:solidFill>
-                <a:latin typeface="Noto Sans CJK KR"/>
-              </a:rPr>
-              <a:t>o</a:t>
-            </a:r>
-            <a:r>
-              <a:rPr b="0" lang="en-US" sz="2000" spc="-1" strike="noStrike">
-                <a:solidFill>
-                  <a:srgbClr val="000000"/>
-                </a:solidFill>
-                <a:latin typeface="Noto Sans CJK KR"/>
-              </a:rPr>
-              <a:t>n</a:t>
-            </a:r>
-            <a:r>
-              <a:rPr b="0" lang="en-US" sz="2000" spc="-1" strike="noStrike">
-                <a:solidFill>
-                  <a:srgbClr val="000000"/>
-                </a:solidFill>
-                <a:latin typeface="Noto Sans CJK KR"/>
-              </a:rPr>
-              <a:t> </a:t>
-            </a:r>
-            <a:r>
-              <a:rPr b="0" lang="ko-KR" sz="2000" spc="-1" strike="noStrike">
-                <a:solidFill>
-                  <a:srgbClr val="000000"/>
-                </a:solidFill>
-                <a:latin typeface="Noto Sans CJK KR"/>
-              </a:rPr>
-              <a:t>실</a:t>
-            </a:r>
-            <a:r>
-              <a:rPr b="0" lang="ko-KR" sz="2000" spc="-1" strike="noStrike">
-                <a:solidFill>
-                  <a:srgbClr val="000000"/>
-                </a:solidFill>
-                <a:latin typeface="Noto Sans CJK KR"/>
-              </a:rPr>
-              <a:t>패</a:t>
-            </a:r>
-            <a:r>
-              <a:rPr b="0" lang="en-US" sz="2000" spc="-1" strike="noStrike">
-                <a:solidFill>
-                  <a:srgbClr val="000000"/>
-                </a:solidFill>
-                <a:latin typeface="Noto Sans CJK KR"/>
-              </a:rPr>
-              <a:t> </a:t>
-            </a:r>
-            <a:r>
-              <a:rPr b="0" lang="ko-KR" sz="2000" spc="-1" strike="noStrike">
-                <a:solidFill>
-                  <a:srgbClr val="000000"/>
-                </a:solidFill>
-                <a:latin typeface="Noto Sans CJK KR"/>
-              </a:rPr>
-              <a:t>시</a:t>
-            </a:r>
-            <a:r>
-              <a:rPr b="0" lang="en-US" sz="2000" spc="-1" strike="noStrike">
-                <a:solidFill>
-                  <a:srgbClr val="000000"/>
-                </a:solidFill>
-                <a:latin typeface="Noto Sans CJK KR"/>
-              </a:rPr>
-              <a:t> </a:t>
-            </a:r>
-            <a:r>
-              <a:rPr b="0" lang="ko-KR" sz="2000" spc="-1" strike="noStrike">
-                <a:solidFill>
-                  <a:srgbClr val="000000"/>
-                </a:solidFill>
-                <a:latin typeface="Noto Sans CJK KR"/>
-              </a:rPr>
-              <a:t>전</a:t>
-            </a:r>
-            <a:r>
-              <a:rPr b="0" lang="ko-KR" sz="2000" spc="-1" strike="noStrike">
-                <a:solidFill>
-                  <a:srgbClr val="000000"/>
-                </a:solidFill>
-                <a:latin typeface="Noto Sans CJK KR"/>
-              </a:rPr>
-              <a:t>송</a:t>
-            </a:r>
-            <a:r>
-              <a:rPr b="0" lang="ko-KR" sz="2000" spc="-1" strike="noStrike">
-                <a:solidFill>
-                  <a:srgbClr val="000000"/>
-                </a:solidFill>
-                <a:latin typeface="Noto Sans CJK KR"/>
-              </a:rPr>
-              <a:t>하</a:t>
-            </a:r>
-            <a:r>
-              <a:rPr b="0" lang="ko-KR" sz="2000" spc="-1" strike="noStrike">
-                <a:solidFill>
-                  <a:srgbClr val="000000"/>
-                </a:solidFill>
-                <a:latin typeface="Noto Sans CJK KR"/>
-              </a:rPr>
-              <a:t>지</a:t>
-            </a:r>
-            <a:r>
-              <a:rPr b="0" lang="en-US" sz="2000" spc="-1" strike="noStrike">
-                <a:solidFill>
-                  <a:srgbClr val="000000"/>
-                </a:solidFill>
-                <a:latin typeface="Noto Sans CJK KR"/>
-              </a:rPr>
-              <a:t> </a:t>
-            </a:r>
-            <a:r>
-              <a:rPr b="0" lang="ko-KR" sz="2000" spc="-1" strike="noStrike">
-                <a:solidFill>
-                  <a:srgbClr val="000000"/>
-                </a:solidFill>
-                <a:latin typeface="Noto Sans CJK KR"/>
-              </a:rPr>
-              <a:t>않</a:t>
-            </a:r>
-            <a:r>
-              <a:rPr b="0" lang="ko-KR" sz="2000" spc="-1" strike="noStrike">
-                <a:solidFill>
-                  <a:srgbClr val="000000"/>
-                </a:solidFill>
-                <a:latin typeface="Noto Sans CJK KR"/>
-              </a:rPr>
-              <a:t>고</a:t>
-            </a:r>
-            <a:r>
-              <a:rPr b="0" lang="en-US" sz="2000" spc="-1" strike="noStrike">
-                <a:solidFill>
-                  <a:srgbClr val="000000"/>
-                </a:solidFill>
-                <a:latin typeface="Noto Sans CJK KR"/>
-              </a:rPr>
-              <a:t> </a:t>
-            </a:r>
-            <a:r>
-              <a:rPr b="0" lang="en-US" sz="2000" spc="-1" strike="noStrike">
-                <a:solidFill>
-                  <a:srgbClr val="000000"/>
-                </a:solidFill>
-                <a:latin typeface="Noto Sans CJK KR"/>
-              </a:rPr>
-              <a:t>s</a:t>
-            </a:r>
-            <a:r>
-              <a:rPr b="0" lang="en-US" sz="2000" spc="-1" strike="noStrike">
-                <a:solidFill>
-                  <a:srgbClr val="000000"/>
-                </a:solidFill>
-                <a:latin typeface="Noto Sans CJK KR"/>
-              </a:rPr>
-              <a:t>e</a:t>
-            </a:r>
-            <a:r>
-              <a:rPr b="0" lang="en-US" sz="2000" spc="-1" strike="noStrike">
-                <a:solidFill>
-                  <a:srgbClr val="000000"/>
-                </a:solidFill>
-                <a:latin typeface="Noto Sans CJK KR"/>
-              </a:rPr>
-              <a:t>n</a:t>
-            </a:r>
-            <a:r>
-              <a:rPr b="0" lang="en-US" sz="2000" spc="-1" strike="noStrike">
-                <a:solidFill>
-                  <a:srgbClr val="000000"/>
-                </a:solidFill>
-                <a:latin typeface="Noto Sans CJK KR"/>
-              </a:rPr>
-              <a:t>t</a:t>
-            </a:r>
-            <a:r>
-              <a:rPr b="0" lang="en-US" sz="2000" spc="-1" strike="noStrike">
-                <a:solidFill>
-                  <a:srgbClr val="000000"/>
-                </a:solidFill>
-                <a:latin typeface="Noto Sans CJK KR"/>
-              </a:rPr>
-              <a:t>_</a:t>
-            </a:r>
-            <a:r>
-              <a:rPr b="0" lang="en-US" sz="2000" spc="-1" strike="noStrike">
-                <a:solidFill>
-                  <a:srgbClr val="000000"/>
-                </a:solidFill>
-                <a:latin typeface="Noto Sans CJK KR"/>
-              </a:rPr>
-              <a:t>t</a:t>
-            </a:r>
-            <a:r>
-              <a:rPr b="0" lang="en-US" sz="2000" spc="-1" strike="noStrike">
-                <a:solidFill>
-                  <a:srgbClr val="000000"/>
-                </a:solidFill>
-                <a:latin typeface="Noto Sans CJK KR"/>
-              </a:rPr>
-              <a:t>o</a:t>
-            </a:r>
-            <a:r>
-              <a:rPr b="0" lang="en-US" sz="2000" spc="-1" strike="noStrike">
-                <a:solidFill>
-                  <a:srgbClr val="000000"/>
-                </a:solidFill>
-                <a:latin typeface="Noto Sans CJK KR"/>
-              </a:rPr>
-              <a:t>_</a:t>
-            </a:r>
-            <a:r>
-              <a:rPr b="0" lang="en-US" sz="2000" spc="-1" strike="noStrike">
-                <a:solidFill>
-                  <a:srgbClr val="000000"/>
-                </a:solidFill>
-                <a:latin typeface="Noto Sans CJK KR"/>
-              </a:rPr>
-              <a:t>s</a:t>
-            </a:r>
-            <a:r>
-              <a:rPr b="0" lang="en-US" sz="2000" spc="-1" strike="noStrike">
-                <a:solidFill>
-                  <a:srgbClr val="000000"/>
-                </a:solidFill>
-                <a:latin typeface="Noto Sans CJK KR"/>
-              </a:rPr>
-              <a:t>e</a:t>
-            </a:r>
-            <a:r>
-              <a:rPr b="0" lang="en-US" sz="2000" spc="-1" strike="noStrike">
-                <a:solidFill>
-                  <a:srgbClr val="000000"/>
-                </a:solidFill>
-                <a:latin typeface="Noto Sans CJK KR"/>
-              </a:rPr>
-              <a:t>r</a:t>
-            </a:r>
-            <a:r>
-              <a:rPr b="0" lang="en-US" sz="2000" spc="-1" strike="noStrike">
-                <a:solidFill>
-                  <a:srgbClr val="000000"/>
-                </a:solidFill>
-                <a:latin typeface="Noto Sans CJK KR"/>
-              </a:rPr>
-              <a:t>v</a:t>
-            </a:r>
-            <a:r>
-              <a:rPr b="0" lang="en-US" sz="2000" spc="-1" strike="noStrike">
-                <a:solidFill>
-                  <a:srgbClr val="000000"/>
-                </a:solidFill>
-                <a:latin typeface="Noto Sans CJK KR"/>
-              </a:rPr>
-              <a:t>e</a:t>
-            </a:r>
-            <a:r>
-              <a:rPr b="0" lang="en-US" sz="2000" spc="-1" strike="noStrike">
-                <a:solidFill>
-                  <a:srgbClr val="000000"/>
-                </a:solidFill>
-                <a:latin typeface="Noto Sans CJK KR"/>
-              </a:rPr>
-              <a:t>r</a:t>
-            </a:r>
-            <a:r>
-              <a:rPr b="0" lang="en-US" sz="2000" spc="-1" strike="noStrike">
-                <a:solidFill>
-                  <a:srgbClr val="000000"/>
-                </a:solidFill>
-                <a:latin typeface="Noto Sans CJK KR"/>
-              </a:rPr>
-              <a:t>=</a:t>
-            </a:r>
-            <a:r>
-              <a:rPr b="0" lang="en-US" sz="2000" spc="-1" strike="noStrike">
-                <a:solidFill>
-                  <a:srgbClr val="000000"/>
-                </a:solidFill>
-                <a:latin typeface="Noto Sans CJK KR"/>
-              </a:rPr>
-              <a:t>f</a:t>
-            </a:r>
-            <a:r>
-              <a:rPr b="0" lang="en-US" sz="2000" spc="-1" strike="noStrike">
-                <a:solidFill>
-                  <a:srgbClr val="000000"/>
-                </a:solidFill>
-                <a:latin typeface="Noto Sans CJK KR"/>
-              </a:rPr>
-              <a:t>a</a:t>
-            </a:r>
-            <a:r>
-              <a:rPr b="0" lang="en-US" sz="2000" spc="-1" strike="noStrike">
-                <a:solidFill>
-                  <a:srgbClr val="000000"/>
-                </a:solidFill>
-                <a:latin typeface="Noto Sans CJK KR"/>
-              </a:rPr>
-              <a:t>l</a:t>
-            </a:r>
-            <a:r>
-              <a:rPr b="0" lang="en-US" sz="2000" spc="-1" strike="noStrike">
-                <a:solidFill>
-                  <a:srgbClr val="000000"/>
-                </a:solidFill>
-                <a:latin typeface="Noto Sans CJK KR"/>
-              </a:rPr>
-              <a:t>s</a:t>
-            </a:r>
-            <a:r>
-              <a:rPr b="0" lang="en-US" sz="2000" spc="-1" strike="noStrike">
-                <a:solidFill>
-                  <a:srgbClr val="000000"/>
-                </a:solidFill>
-                <a:latin typeface="Noto Sans CJK KR"/>
-              </a:rPr>
-              <a:t>e</a:t>
-            </a:r>
-            <a:r>
-              <a:rPr b="0" lang="ko-KR" sz="2000" spc="-1" strike="noStrike">
-                <a:solidFill>
-                  <a:srgbClr val="000000"/>
-                </a:solidFill>
-                <a:latin typeface="Noto Sans CJK KR"/>
-              </a:rPr>
-              <a:t>로</a:t>
-            </a:r>
-            <a:r>
-              <a:rPr b="0" lang="en-US" sz="2000" spc="-1" strike="noStrike">
-                <a:solidFill>
-                  <a:srgbClr val="000000"/>
-                </a:solidFill>
-                <a:latin typeface="Noto Sans CJK KR"/>
-              </a:rPr>
-              <a:t> </a:t>
-            </a:r>
-            <a:r>
-              <a:rPr b="0" lang="en-US" sz="2000" spc="-1" strike="noStrike">
-                <a:solidFill>
-                  <a:srgbClr val="000000"/>
-                </a:solidFill>
-                <a:latin typeface="Noto Sans CJK KR"/>
-              </a:rPr>
-              <a:t>h</a:t>
-            </a:r>
-            <a:r>
-              <a:rPr b="0" lang="en-US" sz="2000" spc="-1" strike="noStrike">
-                <a:solidFill>
-                  <a:srgbClr val="000000"/>
-                </a:solidFill>
-                <a:latin typeface="Noto Sans CJK KR"/>
-              </a:rPr>
-              <a:t>i</a:t>
-            </a:r>
-            <a:r>
-              <a:rPr b="0" lang="en-US" sz="2000" spc="-1" strike="noStrike">
-                <a:solidFill>
-                  <a:srgbClr val="000000"/>
-                </a:solidFill>
-                <a:latin typeface="Noto Sans CJK KR"/>
-              </a:rPr>
-              <a:t>s</a:t>
-            </a:r>
-            <a:r>
-              <a:rPr b="0" lang="en-US" sz="2000" spc="-1" strike="noStrike">
-                <a:solidFill>
-                  <a:srgbClr val="000000"/>
-                </a:solidFill>
-                <a:latin typeface="Noto Sans CJK KR"/>
-              </a:rPr>
-              <a:t>t</a:t>
-            </a:r>
-            <a:r>
-              <a:rPr b="0" lang="en-US" sz="2000" spc="-1" strike="noStrike">
-                <a:solidFill>
-                  <a:srgbClr val="000000"/>
-                </a:solidFill>
-                <a:latin typeface="Noto Sans CJK KR"/>
-              </a:rPr>
-              <a:t>o</a:t>
-            </a:r>
-            <a:r>
-              <a:rPr b="0" lang="en-US" sz="2000" spc="-1" strike="noStrike">
-                <a:solidFill>
-                  <a:srgbClr val="000000"/>
-                </a:solidFill>
-                <a:latin typeface="Noto Sans CJK KR"/>
-              </a:rPr>
-              <a:t>r</a:t>
-            </a:r>
-            <a:r>
-              <a:rPr b="0" lang="en-US" sz="2000" spc="-1" strike="noStrike">
-                <a:solidFill>
-                  <a:srgbClr val="000000"/>
-                </a:solidFill>
-                <a:latin typeface="Noto Sans CJK KR"/>
-              </a:rPr>
-              <a:t>y</a:t>
-            </a:r>
-            <a:r>
-              <a:rPr b="0" lang="ko-KR" sz="2000" spc="-1" strike="noStrike">
-                <a:solidFill>
-                  <a:srgbClr val="000000"/>
-                </a:solidFill>
-                <a:latin typeface="Noto Sans CJK KR"/>
-              </a:rPr>
-              <a:t>에</a:t>
-            </a:r>
-            <a:r>
-              <a:rPr b="0" lang="en-US" sz="2000" spc="-1" strike="noStrike">
-                <a:solidFill>
-                  <a:srgbClr val="000000"/>
-                </a:solidFill>
-                <a:latin typeface="Noto Sans CJK KR"/>
-              </a:rPr>
-              <a:t> </a:t>
-            </a:r>
-            <a:r>
-              <a:rPr b="0" lang="ko-KR" sz="2000" spc="-1" strike="noStrike">
-                <a:solidFill>
-                  <a:srgbClr val="000000"/>
-                </a:solidFill>
-                <a:latin typeface="Noto Sans CJK KR"/>
-              </a:rPr>
-              <a:t>기</a:t>
-            </a:r>
-            <a:r>
-              <a:rPr b="0" lang="ko-KR" sz="2000" spc="-1" strike="noStrike">
-                <a:solidFill>
-                  <a:srgbClr val="000000"/>
-                </a:solidFill>
-                <a:latin typeface="Noto Sans CJK KR"/>
-              </a:rPr>
-              <a:t>록</a:t>
-            </a:r>
-            <a:r>
-              <a:rPr b="0" lang="ko-KR" sz="2000" spc="-1" strike="noStrike">
-                <a:solidFill>
-                  <a:srgbClr val="000000"/>
-                </a:solidFill>
-                <a:latin typeface="Noto Sans CJK KR"/>
-              </a:rPr>
-              <a:t>합</a:t>
-            </a:r>
-            <a:r>
-              <a:rPr b="0" lang="ko-KR" sz="2000" spc="-1" strike="noStrike">
-                <a:solidFill>
-                  <a:srgbClr val="000000"/>
-                </a:solidFill>
-                <a:latin typeface="Noto Sans CJK KR"/>
-              </a:rPr>
-              <a:t>니</a:t>
-            </a:r>
-            <a:r>
-              <a:rPr b="0" lang="ko-KR" sz="2000" spc="-1" strike="noStrike">
-                <a:solidFill>
-                  <a:srgbClr val="000000"/>
-                </a:solidFill>
-                <a:latin typeface="Noto Sans CJK KR"/>
-              </a:rPr>
-              <a:t>다</a:t>
+              <a:t>에 기록합니다</a:t>
             </a:r>
             <a:r>
               <a:rPr b="0" lang="en-US" sz="2000" spc="-1" strike="noStrike">
@@ -12275,7 +8369,16 @@
                 </a:solidFill>
                 <a:latin typeface="Noto Sans CJK KR"/>
               </a:rPr>
-              <a:t>통신을 </a:t>
+              <a:t>통신을 상태 확인</a:t>
+            </a:r>
+            <a:r>
+              <a:rPr b="0" lang="en-US" sz="2000" spc="-1" strike="noStrike">
+                <a:solidFill>
+                  <a:srgbClr val="000000"/>
+                </a:solidFill>
+                <a:latin typeface="Noto Sans CJK KR"/>
+              </a:rPr>
+              <a:t>, </a:t>
             </a:r>
             <a:r>
               <a:rPr b="0" lang="ko-KR" sz="2000" spc="-1" strike="noStrike">
@@ -12284,7 +8387,7 @@
                 </a:solidFill>
                 <a:latin typeface="Noto Sans CJK KR"/>
               </a:rPr>
-              <a:t>상태 확인</a:t>
+              <a:t>관계 이해</a:t>
             </a:r>
             <a:r>
               <a:rPr b="0" lang="en-US" sz="2000" spc="-1" strike="noStrike">
@@ -12302,34 +8405,7 @@
                 </a:solidFill>
                 <a:latin typeface="Noto Sans CJK KR"/>
               </a:rPr>
-              <a:t>관계 이해</a:t>
-            </a:r>
-            <a:r>
-              <a:rPr b="0" lang="en-US" sz="2000" spc="-1" strike="noStrike">
-                <a:solidFill>
-                  <a:srgbClr val="000000"/>
-                </a:solidFill>
-                <a:latin typeface="Noto Sans CJK KR"/>
-              </a:rPr>
-              <a:t>, </a:t>
-            </a:r>
-            <a:r>
-              <a:rPr b="0" lang="ko-KR" sz="2000" spc="-1" strike="noStrike">
-                <a:solidFill>
-                  <a:srgbClr val="000000"/>
-                </a:solidFill>
-                <a:latin typeface="Noto Sans CJK KR"/>
-              </a:rPr>
-              <a:t>직접 </a:t>
-            </a:r>
-            <a:r>
-              <a:rPr b="0" lang="ko-KR" sz="2000" spc="-1" strike="noStrike">
-                <a:solidFill>
-                  <a:srgbClr val="000000"/>
-                </a:solidFill>
-                <a:latin typeface="Noto Sans CJK KR"/>
-              </a:rPr>
-              <a:t>실행의 세 단계로 다룹니다</a:t>
+              <a:t>직접 실행의 세 단계로 다룹니다</a:t>
             </a:r>
             <a:r>
               <a:rPr b="0" lang="en-US" sz="2000" spc="-1" strike="noStrike">
@@ -12416,7 +8492,16 @@
                 </a:solidFill>
                 <a:latin typeface="Noto Sans CJK KR"/>
               </a:rPr>
-              <a:t>명령어를 여러 </a:t>
+              <a:t>명령어를 여러 터미널에서 따로 확인하면 전체 관계를 놓치기 쉽습니다</a:t>
+            </a:r>
+            <a:r>
+              <a:rPr b="0" lang="en-US" sz="2000" spc="-1" strike="noStrike">
+                <a:solidFill>
+                  <a:srgbClr val="000000"/>
+                </a:solidFill>
+                <a:latin typeface="Noto Sans CJK KR"/>
+              </a:rPr>
+              <a:t>. </a:t>
             </a:r>
             <a:r>
               <a:rPr b="0" lang="ko-KR" sz="2000" spc="-1" strike="noStrike">
@@ -12425,7 +8510,16 @@
                 </a:solidFill>
                 <a:latin typeface="Noto Sans CJK KR"/>
               </a:rPr>
-              <a:t>터미널에서 따로 확인하면 </a:t>
+              <a:t>이 대시보드는 실행 중인 통신을 모아서 보여주고</a:t>
+            </a:r>
+            <a:r>
+              <a:rPr b="0" lang="en-US" sz="2000" spc="-1" strike="noStrike">
+                <a:solidFill>
+                  <a:srgbClr val="000000"/>
+                </a:solidFill>
+                <a:latin typeface="Noto Sans CJK KR"/>
+              </a:rPr>
+              <a:t>, </a:t>
             </a:r>
             <a:r>
               <a:rPr b="0" lang="ko-KR" sz="2000" spc="-1" strike="noStrike">
@@ -12434,7 +8528,16 @@
                 </a:solidFill>
                 <a:latin typeface="Noto Sans CJK KR"/>
               </a:rPr>
-              <a:t>전체 관계를 놓치기 </a:t>
+              <a:t>필요한 경우 등록된 </a:t>
+            </a:r>
+            <a:r>
+              <a:rPr b="0" lang="en-US" sz="2000" spc="-1" strike="noStrike">
+                <a:solidFill>
+                  <a:srgbClr val="000000"/>
+                </a:solidFill>
+                <a:latin typeface="Noto Sans CJK KR"/>
+              </a:rPr>
+              <a:t>Interface</a:t>
             </a:r>
             <a:r>
               <a:rPr b="0" lang="ko-KR" sz="2000" spc="-1" strike="noStrike">
@@ -12443,106 +8546,7 @@
                 </a:solidFill>
                 <a:latin typeface="Noto Sans CJK KR"/>
               </a:rPr>
-              <a:t>쉽습니다</a:t>
-            </a:r>
-            <a:r>
-              <a:rPr b="0" lang="en-US" sz="2000" spc="-1" strike="noStrike">
-                <a:solidFill>
-                  <a:srgbClr val="000000"/>
-                </a:solidFill>
-                <a:latin typeface="Noto Sans CJK KR"/>
-              </a:rPr>
-              <a:t>. </a:t>
-            </a:r>
-            <a:r>
-              <a:rPr b="0" lang="ko-KR" sz="2000" spc="-1" strike="noStrike">
-                <a:solidFill>
-                  <a:srgbClr val="000000"/>
-                </a:solidFill>
-                <a:latin typeface="Noto Sans CJK KR"/>
-              </a:rPr>
-              <a:t>이 대시보드는 </a:t>
-            </a:r>
-            <a:r>
-              <a:rPr b="0" lang="ko-KR" sz="2000" spc="-1" strike="noStrike">
-                <a:solidFill>
-                  <a:srgbClr val="000000"/>
-                </a:solidFill>
-                <a:latin typeface="Noto Sans CJK KR"/>
-              </a:rPr>
-              <a:t>실행 중인 통신을 모아서 </a:t>
-            </a:r>
-            <a:r>
-              <a:rPr b="0" lang="ko-KR" sz="2000" spc="-1" strike="noStrike">
-                <a:solidFill>
-                  <a:srgbClr val="000000"/>
-                </a:solidFill>
-                <a:latin typeface="Noto Sans CJK KR"/>
-              </a:rPr>
-              <a:t>보여주고</a:t>
-            </a:r>
-            <a:r>
-              <a:rPr b="0" lang="en-US" sz="2000" spc="-1" strike="noStrike">
-                <a:solidFill>
-                  <a:srgbClr val="000000"/>
-                </a:solidFill>
-                <a:latin typeface="Noto Sans CJK KR"/>
-              </a:rPr>
-              <a:t>, </a:t>
-            </a:r>
-            <a:r>
-              <a:rPr b="0" lang="ko-KR" sz="2000" spc="-1" strike="noStrike">
-                <a:solidFill>
-                  <a:srgbClr val="000000"/>
-                </a:solidFill>
-                <a:latin typeface="Noto Sans CJK KR"/>
-              </a:rPr>
-              <a:t>필요한 경우 </a:t>
-            </a:r>
-            <a:r>
-              <a:rPr b="0" lang="ko-KR" sz="2000" spc="-1" strike="noStrike">
-                <a:solidFill>
-                  <a:srgbClr val="000000"/>
-                </a:solidFill>
-                <a:latin typeface="Noto Sans CJK KR"/>
-              </a:rPr>
-              <a:t>등록된 </a:t>
-            </a:r>
-            <a:r>
-              <a:rPr b="0" lang="en-US" sz="2000" spc="-1" strike="noStrike">
-                <a:solidFill>
-                  <a:srgbClr val="000000"/>
-                </a:solidFill>
-                <a:latin typeface="Noto Sans CJK KR"/>
-              </a:rPr>
-              <a:t>Interface</a:t>
-            </a:r>
-            <a:r>
-              <a:rPr b="0" lang="ko-KR" sz="2000" spc="-1" strike="noStrike">
-                <a:solidFill>
-                  <a:srgbClr val="000000"/>
-                </a:solidFill>
-                <a:latin typeface="Noto Sans CJK KR"/>
-              </a:rPr>
-              <a:t>로 </a:t>
-            </a:r>
-            <a:r>
-              <a:rPr b="0" lang="ko-KR" sz="2000" spc="-1" strike="noStrike">
-                <a:solidFill>
-                  <a:srgbClr val="000000"/>
-                </a:solidFill>
-                <a:latin typeface="Noto Sans CJK KR"/>
-              </a:rPr>
-              <a:t>테스트까지 이어지게 </a:t>
-            </a:r>
-            <a:r>
-              <a:rPr b="0" lang="ko-KR" sz="2000" spc="-1" strike="noStrike">
-                <a:solidFill>
-                  <a:srgbClr val="000000"/>
-                </a:solidFill>
-                <a:latin typeface="Noto Sans CJK KR"/>
-              </a:rPr>
-              <a:t>합니다</a:t>
+              <a:t>로 테스트까지 이어지게 합니다</a:t>
             </a:r>
             <a:r>
               <a:rPr b="0" lang="en-US" sz="2000" spc="-1" strike="noStrike">
@@ -12638,16 +8642,7 @@
                 </a:solidFill>
                 <a:latin typeface="Noto Sans CJK KR"/>
               </a:rPr>
-              <a:t>Topic, </a:t>
-            </a:r>
-            <a:r>
-              <a:rPr b="0" lang="en-US" sz="2000" spc="-1" strike="noStrike">
-                <a:solidFill>
-                  <a:srgbClr val="000000"/>
-                </a:solidFill>
-                <a:latin typeface="Noto Sans CJK KR"/>
-              </a:rPr>
-              <a:t>Service, Action</a:t>
+              <a:t>Topic, Service, Action</a:t>
             </a:r>
             <a:r>
               <a:rPr b="0" lang="ko-KR" sz="2000" spc="-1" strike="noStrike">
@@ -12656,25 +8651,7 @@
                 </a:solidFill>
                 <a:latin typeface="Noto Sans CJK KR"/>
               </a:rPr>
-              <a:t>에서 </a:t>
-            </a:r>
-            <a:r>
-              <a:rPr b="0" lang="ko-KR" sz="2000" spc="-1" strike="noStrike">
-                <a:solidFill>
-                  <a:srgbClr val="000000"/>
-                </a:solidFill>
-                <a:latin typeface="Noto Sans CJK KR"/>
-              </a:rPr>
-              <a:t>주고받는 데이터 구조 또는 </a:t>
-            </a:r>
-            <a:r>
-              <a:rPr b="0" lang="ko-KR" sz="2000" spc="-1" strike="noStrike">
-                <a:solidFill>
-                  <a:srgbClr val="000000"/>
-                </a:solidFill>
-                <a:latin typeface="Noto Sans CJK KR"/>
-              </a:rPr>
-              <a:t>통신 형식입니다</a:t>
+              <a:t>에서 주고받는 데이터 구조 또는 통신 형식입니다</a:t>
             </a:r>
             <a:r>
               <a:rPr b="0" lang="en-US" sz="2000" spc="-1" strike="noStrike">
@@ -12752,16 +8729,7 @@
                 </a:solidFill>
                 <a:latin typeface="Noto Sans CJK KR"/>
               </a:rPr>
-              <a:t>모든 통신을 자동으로 </a:t>
-            </a:r>
-            <a:r>
-              <a:rPr b="0" lang="ko-KR" sz="2000" spc="-1" strike="noStrike">
-                <a:solidFill>
-                  <a:srgbClr val="000000"/>
-                </a:solidFill>
-                <a:latin typeface="Noto Sans CJK KR"/>
-              </a:rPr>
-              <a:t>실행해 주나요</a:t>
+              <a:t>모든 통신을 자동으로 실행해 주나요</a:t>
             </a:r>
             <a:r>
               <a:rPr b="0" lang="en-US" sz="2000" spc="-1" strike="noStrike">
@@ -12857,7 +8825,16 @@
                 </a:solidFill>
                 <a:latin typeface="Noto Sans CJK KR"/>
               </a:rPr>
-              <a:t>자동 영역은 </a:t>
+              <a:t>자동 영역은 관찰이고</a:t>
+            </a:r>
+            <a:r>
+              <a:rPr b="0" lang="en-US" sz="2000" spc="-1" strike="noStrike">
+                <a:solidFill>
+                  <a:srgbClr val="000000"/>
+                </a:solidFill>
+                <a:latin typeface="Noto Sans CJK KR"/>
+              </a:rPr>
+              <a:t>, </a:t>
             </a:r>
             <a:r>
               <a:rPr b="0" lang="ko-KR" sz="2000" spc="-1" strike="noStrike">
@@ -12866,7 +8843,7 @@
                 </a:solidFill>
                 <a:latin typeface="Noto Sans CJK KR"/>
               </a:rPr>
-              <a:t>관찰이고</a:t>
+              <a:t>직접 실행은 </a:t>
             </a:r>
             <a:r>
               <a:rPr b="0" lang="en-US" sz="2000" spc="-1" strike="noStrike">
@@ -12875,7 +8852,7 @@
                 </a:solidFill>
                 <a:latin typeface="Noto Sans CJK KR"/>
               </a:rPr>
-              <a:t>, </a:t>
+              <a:t>Interface Lab</a:t>
             </a:r>
             <a:r>
               <a:rPr b="0" lang="ko-KR" sz="2000" spc="-1" strike="noStrike">
@@ -12884,43 +8861,7 @@
                 </a:solidFill>
                 <a:latin typeface="Noto Sans CJK KR"/>
               </a:rPr>
-              <a:t>직접 실행은 </a:t>
-            </a:r>
-            <a:r>
-              <a:rPr b="0" lang="en-US" sz="2000" spc="-1" strike="noStrike">
-                <a:solidFill>
-                  <a:srgbClr val="000000"/>
-                </a:solidFill>
-                <a:latin typeface="Noto Sans CJK KR"/>
-              </a:rPr>
-              <a:t>Interface Lab</a:t>
-            </a:r>
-            <a:r>
-              <a:rPr b="0" lang="ko-KR" sz="2000" spc="-1" strike="noStrike">
-                <a:solidFill>
-                  <a:srgbClr val="000000"/>
-                </a:solidFill>
-                <a:latin typeface="Noto Sans CJK KR"/>
-              </a:rPr>
-              <a:t>에서 </a:t>
-            </a:r>
-            <a:r>
-              <a:rPr b="0" lang="ko-KR" sz="2000" spc="-1" strike="noStrike">
-                <a:solidFill>
-                  <a:srgbClr val="000000"/>
-                </a:solidFill>
-                <a:latin typeface="Noto Sans CJK KR"/>
-              </a:rPr>
-              <a:t>사용자가 명시적으로 </a:t>
-            </a:r>
-            <a:r>
-              <a:rPr b="0" lang="ko-KR" sz="2000" spc="-1" strike="noStrike">
-                <a:solidFill>
-                  <a:srgbClr val="000000"/>
-                </a:solidFill>
-                <a:latin typeface="Noto Sans CJK KR"/>
-              </a:rPr>
-              <a:t>요청합니다</a:t>
+              <a:t>에서 사용자가 명시적으로 요청합니다</a:t>
             </a:r>
             <a:r>
               <a:rPr b="0" lang="en-US" sz="2000" spc="-1" strike="noStrike">
@@ -13131,16 +9072,7 @@
                 </a:solidFill>
                 <a:latin typeface="Noto Sans CJK KR"/>
               </a:rPr>
-              <a:t>를 주기적으로 관찰하고 화면은 그 최신 복사본을 </a:t>
-            </a:r>
-            <a:r>
-              <a:rPr b="0" lang="ko-KR" sz="2000" spc="-1" strike="noStrike">
-                <a:solidFill>
-                  <a:srgbClr val="000000"/>
-                </a:solidFill>
-                <a:latin typeface="Noto Sans CJK KR"/>
-              </a:rPr>
-              <a:t>읽습니다</a:t>
+              <a:t>를 주기적으로 관찰하고 화면은 그 최신 복사본을 읽습니다</a:t>
             </a:r>
             <a:r>
               <a:rPr b="0" lang="en-US" sz="2000" spc="-1" strike="noStrike">
@@ -13317,7 +9249,16 @@
                 </a:solidFill>
                 <a:latin typeface="Noto Sans CJK KR"/>
               </a:rPr>
-              <a:t>에 </a:t>
+              <a:t>에 저장하고</a:t>
+            </a:r>
+            <a:r>
+              <a:rPr b="0" lang="en-US" sz="2000" spc="-1" strike="noStrike">
+                <a:solidFill>
+                  <a:srgbClr val="000000"/>
+                </a:solidFill>
+                <a:latin typeface="Noto Sans CJK KR"/>
+              </a:rPr>
+              <a:t>, FastAPI</a:t>
             </a:r>
             <a:r>
               <a:rPr b="0" lang="ko-KR" sz="2000" spc="-1" strike="noStrike">
@@ -13326,7 +9267,7 @@
                 </a:solidFill>
                 <a:latin typeface="Noto Sans CJK KR"/>
               </a:rPr>
-              <a:t>저장하고</a:t>
+              <a:t>의 </a:t>
             </a:r>
             <a:r>
               <a:rPr b="0" lang="en-US" sz="2000" spc="-1" strike="noStrike">
@@ -13335,7 +9276,7 @@
                 </a:solidFill>
                 <a:latin typeface="Noto Sans CJK KR"/>
               </a:rPr>
-              <a:t>, FastAPI</a:t>
+              <a:t>REST API</a:t>
             </a:r>
             <a:r>
               <a:rPr b="0" lang="ko-KR" sz="2000" spc="-1" strike="noStrike">
@@ -13344,7 +9285,7 @@
                 </a:solidFill>
                 <a:latin typeface="Noto Sans CJK KR"/>
               </a:rPr>
-              <a:t>의 </a:t>
+              <a:t>와 </a:t>
             </a:r>
             <a:r>
               <a:rPr b="0" lang="en-US" sz="2000" spc="-1" strike="noStrike">
@@ -13353,7 +9294,7 @@
                 </a:solidFill>
                 <a:latin typeface="Noto Sans CJK KR"/>
               </a:rPr>
-              <a:t>REST API</a:t>
+              <a:t>WebSocket</a:t>
             </a:r>
             <a:r>
               <a:rPr b="0" lang="ko-KR" sz="2000" spc="-1" strike="noStrike">
@@ -13362,7 +9303,7 @@
                 </a:solidFill>
                 <a:latin typeface="Noto Sans CJK KR"/>
               </a:rPr>
-              <a:t>와 </a:t>
+              <a:t>이 </a:t>
             </a:r>
             <a:r>
               <a:rPr b="0" lang="en-US" sz="2000" spc="-1" strike="noStrike">
@@ -13371,7 +9312,7 @@
                 </a:solidFill>
                 <a:latin typeface="Noto Sans CJK KR"/>
               </a:rPr>
-              <a:t>WebSocket</a:t>
+              <a:t>React </a:t>
             </a:r>
             <a:r>
               <a:rPr b="0" lang="ko-KR" sz="2000" spc="-1" strike="noStrike">
@@ -13380,34 +9321,7 @@
                 </a:solidFill>
                 <a:latin typeface="Noto Sans CJK KR"/>
               </a:rPr>
-              <a:t>이 </a:t>
-            </a:r>
-            <a:r>
-              <a:rPr b="0" lang="en-US" sz="2000" spc="-1" strike="noStrike">
-                <a:solidFill>
-                  <a:srgbClr val="000000"/>
-                </a:solidFill>
-                <a:latin typeface="Noto Sans CJK KR"/>
-              </a:rPr>
-              <a:t>React </a:t>
-            </a:r>
-            <a:r>
-              <a:rPr b="0" lang="ko-KR" sz="2000" spc="-1" strike="noStrike">
-                <a:solidFill>
-                  <a:srgbClr val="000000"/>
-                </a:solidFill>
-                <a:latin typeface="Noto Sans CJK KR"/>
-              </a:rPr>
-              <a:t>화면으로 </a:t>
-            </a:r>
-            <a:r>
-              <a:rPr b="0" lang="ko-KR" sz="2000" spc="-1" strike="noStrike">
-                <a:solidFill>
-                  <a:srgbClr val="000000"/>
-                </a:solidFill>
-                <a:latin typeface="Noto Sans CJK KR"/>
-              </a:rPr>
-              <a:t>전달합니다</a:t>
+              <a:t>화면으로 전달합니다</a:t>
             </a:r>
             <a:r>
               <a:rPr b="0" lang="en-US" sz="2000" spc="-1" strike="noStrike">
@@ -13548,16 +9462,7 @@
                 </a:solidFill>
                 <a:latin typeface="Noto Sans CJK KR"/>
               </a:rPr>
-              <a:t>가 최근에 수집한 상태를 메모리에 </a:t>
-            </a:r>
-            <a:r>
-              <a:rPr b="0" lang="ko-KR" sz="2000" spc="-1" strike="noStrike">
-                <a:solidFill>
-                  <a:srgbClr val="000000"/>
-                </a:solidFill>
-                <a:latin typeface="Noto Sans CJK KR"/>
-              </a:rPr>
-              <a:t>보관한 공간입니다</a:t>
+              <a:t>가 최근에 수집한 상태를 메모리에 보관한 공간입니다</a:t>
             </a:r>
             <a:r>
               <a:rPr b="0" lang="en-US" sz="2000" spc="-1" strike="noStrike">
@@ -16223,7 +12128,7 @@
         <p:spPr>
           <a:xfrm>
             <a:off x="609480" y="273600"/>
-            <a:ext cx="10965600" cy="1137960"/>
+            <a:ext cx="10964880" cy="1137240"/>
           </a:xfrm>
           <a:prstGeom prst="rect">
             <a:avLst/>
@@ -16332,7 +12237,7 @@
         <p:spPr>
           <a:xfrm>
             <a:off x="609480" y="273600"/>
-            <a:ext cx="10965600" cy="1137960"/>
+            <a:ext cx="10964880" cy="1137240"/>
           </a:xfrm>
           <a:prstGeom prst="rect">
             <a:avLst/>
@@ -16357,7 +12262,25 @@
                 </a:solidFill>
                 <a:latin typeface="Noto Sans CJK KR"/>
               </a:rPr>
-              <a:t>제목 텍스트의 서식을 편집하려면 클릭하십시오</a:t>
+              <a:t>제목 텍스트의 서식을 </a:t>
+            </a:r>
+            <a:r>
+              <a:rPr b="0" lang="ko-KR" sz="1800" spc="-1" strike="noStrike">
+                <a:solidFill>
+                  <a:srgbClr val="000000"/>
+                </a:solidFill>
+                <a:latin typeface="Noto Sans CJK KR"/>
+              </a:rPr>
+              <a:t>편집하려면 </a:t>
+            </a:r>
+            <a:r>
+              <a:rPr b="0" lang="ko-KR" sz="1800" spc="-1" strike="noStrike">
+                <a:solidFill>
+                  <a:srgbClr val="000000"/>
+                </a:solidFill>
+                <a:latin typeface="Noto Sans CJK KR"/>
+              </a:rPr>
+              <a:t>클릭하십시오</a:t>
             </a:r>
             <a:r>
               <a:rPr b="0" lang="en-US" sz="1800" spc="-1" strike="noStrike">
@@ -16698,7 +12621,7 @@
         <p:spPr>
           <a:xfrm>
             <a:off x="0" y="0"/>
-            <a:ext cx="12184920" cy="164160"/>
+            <a:ext cx="12184200" cy="163440"/>
           </a:xfrm>
           <a:prstGeom prst="rect">
             <a:avLst/>
@@ -16748,7 +12671,7 @@
         <p:spPr>
           <a:xfrm>
             <a:off x="685800" y="685800"/>
-            <a:ext cx="2850480" cy="316800"/>
+            <a:ext cx="2849760" cy="316080"/>
           </a:xfrm>
           <a:prstGeom prst="roundRect">
             <a:avLst>
@@ -16800,7 +12723,7 @@
         <p:spPr>
           <a:xfrm>
             <a:off x="762120" y="714240"/>
-            <a:ext cx="2697840" cy="259560"/>
+            <a:ext cx="2697120" cy="258840"/>
           </a:xfrm>
           <a:prstGeom prst="rect">
             <a:avLst/>
@@ -16857,7 +12780,7 @@
         <p:spPr>
           <a:xfrm>
             <a:off x="685800" y="1504800"/>
-            <a:ext cx="7231680" cy="1421640"/>
+            <a:ext cx="7230960" cy="1420920"/>
           </a:xfrm>
           <a:prstGeom prst="rect">
             <a:avLst/>
@@ -16940,7 +12863,7 @@
         <p:spPr>
           <a:xfrm>
             <a:off x="723960" y="3143160"/>
-            <a:ext cx="6564960" cy="411840"/>
+            <a:ext cx="6564240" cy="411120"/>
           </a:xfrm>
           <a:prstGeom prst="rect">
             <a:avLst/>
@@ -17007,7 +12930,7 @@
         <p:spPr>
           <a:xfrm>
             <a:off x="723960" y="3714840"/>
-            <a:ext cx="6660360" cy="640440"/>
+            <a:ext cx="6659640" cy="639720"/>
           </a:xfrm>
           <a:prstGeom prst="rect">
             <a:avLst/>
@@ -17094,7 +13017,7 @@
         <p:spPr>
           <a:xfrm>
             <a:off x="8477280" y="1285920"/>
-            <a:ext cx="1992960" cy="1992960"/>
+            <a:ext cx="1992240" cy="1992240"/>
           </a:xfrm>
           <a:prstGeom prst="ellipse">
             <a:avLst/>
@@ -17144,7 +13067,7 @@
         <p:spPr>
           <a:xfrm>
             <a:off x="8858160" y="1952640"/>
-            <a:ext cx="1231200" cy="450000"/>
+            <a:ext cx="1230480" cy="449280"/>
           </a:xfrm>
           <a:prstGeom prst="rect">
             <a:avLst/>
@@ -17201,7 +13124,7 @@
         <p:spPr>
           <a:xfrm>
             <a:off x="7477200" y="3905280"/>
-            <a:ext cx="3993480" cy="992880"/>
+            <a:ext cx="3992760" cy="992160"/>
           </a:xfrm>
           <a:prstGeom prst="roundRect">
             <a:avLst>
@@ -17253,7 +13176,7 @@
         <p:spPr>
           <a:xfrm>
             <a:off x="7715160" y="4095720"/>
-            <a:ext cx="1516680" cy="278640"/>
+            <a:ext cx="1515960" cy="277920"/>
           </a:xfrm>
           <a:prstGeom prst="rect">
             <a:avLst/>
@@ -17310,7 +13233,7 @@
         <p:spPr>
           <a:xfrm>
             <a:off x="7715160" y="4438800"/>
-            <a:ext cx="1516680" cy="240480"/>
+            <a:ext cx="1515960" cy="239760"/>
           </a:xfrm>
           <a:prstGeom prst="rect">
             <a:avLst/>
@@ -17367,7 +13290,7 @@
         <p:spPr>
           <a:xfrm>
             <a:off x="9315360" y="4210200"/>
-            <a:ext cx="278640" cy="373680"/>
+            <a:ext cx="277920" cy="372960"/>
           </a:xfrm>
           <a:prstGeom prst="rect">
             <a:avLst/>
@@ -17424,7 +13347,7 @@
         <p:spPr>
           <a:xfrm>
             <a:off x="9715680" y="4095720"/>
-            <a:ext cx="1516680" cy="278640"/>
+            <a:ext cx="1515960" cy="277920"/>
           </a:xfrm>
           <a:prstGeom prst="rect">
             <a:avLst/>
@@ -17481,7 +13404,7 @@
         <p:spPr>
           <a:xfrm>
             <a:off x="9715680" y="4438800"/>
-            <a:ext cx="1516680" cy="240480"/>
+            <a:ext cx="1515960" cy="239760"/>
           </a:xfrm>
           <a:prstGeom prst="rect">
             <a:avLst/>
@@ -17538,7 +13461,7 @@
         <p:spPr>
           <a:xfrm>
             <a:off x="723960" y="6095880"/>
-            <a:ext cx="2469240" cy="221400"/>
+            <a:ext cx="2468520" cy="220680"/>
           </a:xfrm>
           <a:prstGeom prst="rect">
             <a:avLst/>
@@ -17632,7 +13555,7 @@
         <p:spPr>
           <a:xfrm>
             <a:off x="0" y="0"/>
-            <a:ext cx="12184920" cy="65880"/>
+            <a:ext cx="12184200" cy="65160"/>
           </a:xfrm>
           <a:prstGeom prst="rect">
             <a:avLst/>
@@ -18008,7 +13931,7 @@
         <p:spPr>
           <a:xfrm>
             <a:off x="502920" y="1355040"/>
-            <a:ext cx="11194200" cy="4149720"/>
+            <a:ext cx="11193480" cy="4149000"/>
           </a:xfrm>
           <a:prstGeom prst="rect">
             <a:avLst/>
@@ -18027,7 +13950,7 @@
         <p:spPr>
           <a:xfrm>
             <a:off x="777240" y="5879520"/>
-            <a:ext cx="3418920" cy="285480"/>
+            <a:ext cx="3418200" cy="284760"/>
           </a:xfrm>
           <a:prstGeom prst="roundRect">
             <a:avLst>
@@ -18101,7 +14024,7 @@
         <p:spPr>
           <a:xfrm>
             <a:off x="4367880" y="5879520"/>
-            <a:ext cx="3418920" cy="285480"/>
+            <a:ext cx="3418200" cy="284760"/>
           </a:xfrm>
           <a:prstGeom prst="roundRect">
             <a:avLst>
@@ -18175,7 +14098,7 @@
         <p:spPr>
           <a:xfrm>
             <a:off x="7958160" y="5879520"/>
-            <a:ext cx="3418920" cy="285480"/>
+            <a:ext cx="3418200" cy="284760"/>
           </a:xfrm>
           <a:prstGeom prst="roundRect">
             <a:avLst>
@@ -18249,7 +14172,7 @@
         <p:spPr>
           <a:xfrm>
             <a:off x="457200" y="6565320"/>
-            <a:ext cx="11239920" cy="149040"/>
+            <a:ext cx="11239200" cy="149040"/>
           </a:xfrm>
           <a:prstGeom prst="rect">
             <a:avLst/>
@@ -18373,7 +14296,7 @@
         <p:spPr>
           <a:xfrm>
             <a:off x="0" y="0"/>
-            <a:ext cx="12186000" cy="57960"/>
+            <a:ext cx="12185280" cy="57240"/>
           </a:xfrm>
           <a:prstGeom prst="rect">
             <a:avLst/>
@@ -18420,7 +14343,7 @@
         <p:spPr>
           <a:xfrm>
             <a:off x="685800" y="311040"/>
-            <a:ext cx="1182600" cy="121680"/>
+            <a:ext cx="1181880" cy="121320"/>
           </a:xfrm>
           <a:prstGeom prst="rect">
             <a:avLst/>
@@ -18474,7 +14397,7 @@
         <p:spPr>
           <a:xfrm>
             <a:off x="11251800" y="340920"/>
-            <a:ext cx="126000" cy="129960"/>
+            <a:ext cx="126000" cy="129240"/>
           </a:xfrm>
           <a:prstGeom prst="rect">
             <a:avLst/>
@@ -18528,7 +14451,7 @@
         <p:spPr>
           <a:xfrm>
             <a:off x="685800" y="594360"/>
-            <a:ext cx="10600920" cy="396000"/>
+            <a:ext cx="10600200" cy="395640"/>
           </a:xfrm>
           <a:prstGeom prst="rect">
             <a:avLst/>
@@ -18592,7 +14515,7 @@
         <p:spPr>
           <a:xfrm>
             <a:off x="685800" y="1051560"/>
-            <a:ext cx="10692360" cy="213480"/>
+            <a:ext cx="10691640" cy="213120"/>
           </a:xfrm>
           <a:prstGeom prst="rect">
             <a:avLst/>
@@ -18746,7 +14669,7 @@
         <p:spPr>
           <a:xfrm>
             <a:off x="685800" y="2880360"/>
-            <a:ext cx="2142720" cy="286560"/>
+            <a:ext cx="2142000" cy="285840"/>
           </a:xfrm>
           <a:prstGeom prst="roundRect">
             <a:avLst>
@@ -18837,7 +14760,7 @@
         <p:spPr>
           <a:xfrm>
             <a:off x="3286080" y="2880000"/>
-            <a:ext cx="1411200" cy="286560"/>
+            <a:ext cx="1410480" cy="285840"/>
           </a:xfrm>
           <a:prstGeom prst="roundRect">
             <a:avLst>
@@ -18908,7 +14831,7 @@
         <p:spPr>
           <a:xfrm>
             <a:off x="7362000" y="2880000"/>
-            <a:ext cx="1475280" cy="286560"/>
+            <a:ext cx="1474560" cy="285840"/>
           </a:xfrm>
           <a:prstGeom prst="roundRect">
             <a:avLst>
@@ -18979,7 +14902,7 @@
         <p:spPr>
           <a:xfrm>
             <a:off x="9280080" y="3514320"/>
-            <a:ext cx="2234160" cy="2599920"/>
+            <a:ext cx="2233440" cy="2599200"/>
           </a:xfrm>
           <a:prstGeom prst="roundRect">
             <a:avLst>
@@ -19270,7 +15193,7 @@
         <p:spPr>
           <a:xfrm>
             <a:off x="540000" y="6660000"/>
-            <a:ext cx="11058120" cy="2880"/>
+            <a:ext cx="11057400" cy="2160"/>
           </a:xfrm>
           <a:prstGeom prst="rect">
             <a:avLst/>
@@ -19317,7 +15240,7 @@
         <p:spPr>
           <a:xfrm>
             <a:off x="685800" y="6473880"/>
-            <a:ext cx="8680680" cy="101160"/>
+            <a:ext cx="8679960" cy="100440"/>
           </a:xfrm>
           <a:prstGeom prst="rect">
             <a:avLst/>
@@ -19366,7 +15289,7 @@
         <p:spPr>
           <a:xfrm>
             <a:off x="3083040" y="3413520"/>
-            <a:ext cx="1856160" cy="3054600"/>
+            <a:ext cx="1855440" cy="3053880"/>
           </a:xfrm>
           <a:prstGeom prst="rect">
             <a:avLst/>
@@ -19385,7 +15308,7 @@
         <p:spPr>
           <a:xfrm>
             <a:off x="5266080" y="2880000"/>
-            <a:ext cx="1411200" cy="286560"/>
+            <a:ext cx="1410480" cy="285840"/>
           </a:xfrm>
           <a:prstGeom prst="roundRect">
             <a:avLst>
@@ -19460,7 +15383,7 @@
         <p:spPr>
           <a:xfrm>
             <a:off x="5063040" y="3420000"/>
-            <a:ext cx="1974240" cy="3048120"/>
+            <a:ext cx="1973520" cy="3047400"/>
           </a:xfrm>
           <a:prstGeom prst="rect">
             <a:avLst/>
@@ -19483,7 +15406,7 @@
         <p:spPr>
           <a:xfrm>
             <a:off x="7223040" y="3420000"/>
-            <a:ext cx="1771920" cy="3048120"/>
+            <a:ext cx="1771200" cy="3047400"/>
           </a:xfrm>
           <a:prstGeom prst="rect">
             <a:avLst/>
@@ -19502,7 +15425,7 @@
         <p:spPr>
           <a:xfrm>
             <a:off x="720000" y="3420000"/>
-            <a:ext cx="2131200" cy="2874240"/>
+            <a:ext cx="2130480" cy="2873520"/>
           </a:xfrm>
           <a:prstGeom prst="roundRect">
             <a:avLst>
@@ -19843,7 +15766,7 @@
         <p:spPr>
           <a:xfrm>
             <a:off x="360000" y="1260000"/>
-            <a:ext cx="11339640" cy="1216080"/>
+            <a:ext cx="11338920" cy="1215360"/>
           </a:xfrm>
           <a:prstGeom prst="rect">
             <a:avLst/>
@@ -19899,7 +15822,7 @@
         <p:spPr>
           <a:xfrm>
             <a:off x="0" y="0"/>
-            <a:ext cx="12184920" cy="65880"/>
+            <a:ext cx="12184200" cy="65160"/>
           </a:xfrm>
           <a:prstGeom prst="rect">
             <a:avLst/>
@@ -20291,7 +16214,7 @@
         <p:spPr>
           <a:xfrm>
             <a:off x="777240" y="5879520"/>
-            <a:ext cx="3418920" cy="285480"/>
+            <a:ext cx="3418200" cy="284760"/>
           </a:xfrm>
           <a:prstGeom prst="roundRect">
             <a:avLst>
@@ -20385,7 +16308,7 @@
         <p:spPr>
           <a:xfrm>
             <a:off x="4367880" y="5879520"/>
-            <a:ext cx="3418920" cy="285480"/>
+            <a:ext cx="3418200" cy="284760"/>
           </a:xfrm>
           <a:prstGeom prst="roundRect">
             <a:avLst>
@@ -20459,7 +16382,7 @@
         <p:spPr>
           <a:xfrm>
             <a:off x="7958160" y="5879520"/>
-            <a:ext cx="3418920" cy="285480"/>
+            <a:ext cx="3418200" cy="284760"/>
           </a:xfrm>
           <a:prstGeom prst="roundRect">
             <a:avLst>
@@ -20543,7 +16466,7 @@
         <p:spPr>
           <a:xfrm>
             <a:off x="457200" y="6565320"/>
-            <a:ext cx="11239920" cy="149040"/>
+            <a:ext cx="11239200" cy="149040"/>
           </a:xfrm>
           <a:prstGeom prst="rect">
             <a:avLst/>
@@ -20625,7 +16548,7 @@
         <p:spPr>
           <a:xfrm>
             <a:off x="720360" y="1143000"/>
-            <a:ext cx="10612800" cy="4513320"/>
+            <a:ext cx="10612080" cy="4512600"/>
           </a:xfrm>
           <a:prstGeom prst="rect">
             <a:avLst/>
@@ -20681,7 +16604,7 @@
         <p:spPr>
           <a:xfrm>
             <a:off x="609480" y="266760"/>
-            <a:ext cx="2088360" cy="221400"/>
+            <a:ext cx="2087640" cy="220680"/>
           </a:xfrm>
           <a:prstGeom prst="rect">
             <a:avLst/>
@@ -20738,7 +16661,7 @@
         <p:spPr>
           <a:xfrm>
             <a:off x="609480" y="552600"/>
-            <a:ext cx="10279800" cy="450000"/>
+            <a:ext cx="10279080" cy="449280"/>
           </a:xfrm>
           <a:prstGeom prst="rect">
             <a:avLst/>
@@ -20815,7 +16738,7 @@
         <p:spPr>
           <a:xfrm>
             <a:off x="609480" y="1047600"/>
-            <a:ext cx="10470240" cy="392760"/>
+            <a:ext cx="10469520" cy="392040"/>
           </a:xfrm>
           <a:prstGeom prst="rect">
             <a:avLst/>
@@ -20902,7 +16825,7 @@
         <p:spPr>
           <a:xfrm>
             <a:off x="11064240" y="292680"/>
-            <a:ext cx="499320" cy="225000"/>
+            <a:ext cx="498600" cy="224280"/>
           </a:xfrm>
           <a:prstGeom prst="rect">
             <a:avLst/>
@@ -20956,7 +16879,7 @@
         <p:spPr>
           <a:xfrm>
             <a:off x="666720" y="1752480"/>
-            <a:ext cx="5041080" cy="3517200"/>
+            <a:ext cx="5040360" cy="3516480"/>
           </a:xfrm>
           <a:prstGeom prst="roundRect">
             <a:avLst>
@@ -21008,7 +16931,7 @@
         <p:spPr>
           <a:xfrm>
             <a:off x="933480" y="2019240"/>
-            <a:ext cx="3326400" cy="278640"/>
+            <a:ext cx="3325680" cy="277920"/>
           </a:xfrm>
           <a:prstGeom prst="rect">
             <a:avLst/>
@@ -21065,7 +16988,7 @@
         <p:spPr>
           <a:xfrm>
             <a:off x="952560" y="2495520"/>
-            <a:ext cx="4183920" cy="316800"/>
+            <a:ext cx="4183200" cy="316080"/>
           </a:xfrm>
           <a:prstGeom prst="rect">
             <a:avLst/>
@@ -21142,7 +17065,7 @@
         <p:spPr>
           <a:xfrm>
             <a:off x="1009800" y="3048120"/>
-            <a:ext cx="4088520" cy="1593000"/>
+            <a:ext cx="4087800" cy="1592280"/>
           </a:xfrm>
           <a:prstGeom prst="rect">
             <a:avLst/>
@@ -21387,7 +17310,7 @@
         <p:spPr>
           <a:xfrm>
             <a:off x="6477120" y="1752480"/>
-            <a:ext cx="5041080" cy="3517200"/>
+            <a:ext cx="5040360" cy="3516480"/>
           </a:xfrm>
           <a:prstGeom prst="roundRect">
             <a:avLst>
@@ -21439,7 +17362,7 @@
         <p:spPr>
           <a:xfrm>
             <a:off x="6743880" y="2019240"/>
-            <a:ext cx="2659680" cy="278640"/>
+            <a:ext cx="2658960" cy="277920"/>
           </a:xfrm>
           <a:prstGeom prst="rect">
             <a:avLst/>
@@ -21496,7 +17419,7 @@
         <p:spPr>
           <a:xfrm>
             <a:off x="6762600" y="2495520"/>
-            <a:ext cx="4183920" cy="316800"/>
+            <a:ext cx="4183200" cy="316080"/>
           </a:xfrm>
           <a:prstGeom prst="rect">
             <a:avLst/>
@@ -21553,7 +17476,7 @@
         <p:spPr>
           <a:xfrm>
             <a:off x="6819840" y="3048120"/>
-            <a:ext cx="4088520" cy="1593000"/>
+            <a:ext cx="4087800" cy="1592280"/>
           </a:xfrm>
           <a:prstGeom prst="rect">
             <a:avLst/>
@@ -21788,7 +17711,7 @@
         <p:spPr>
           <a:xfrm>
             <a:off x="4476600" y="5619600"/>
-            <a:ext cx="1421640" cy="259560"/>
+            <a:ext cx="1420920" cy="258840"/>
           </a:xfrm>
           <a:prstGeom prst="rect">
             <a:avLst/>
@@ -21887,7 +17810,7 @@
         <p:spPr>
           <a:xfrm>
             <a:off x="6477120" y="5619600"/>
-            <a:ext cx="1707480" cy="259560"/>
+            <a:ext cx="1706760" cy="258840"/>
           </a:xfrm>
           <a:prstGeom prst="rect">
             <a:avLst/>
@@ -21986,7 +17909,7 @@
         <p:spPr>
           <a:xfrm>
             <a:off x="609480" y="6534000"/>
-            <a:ext cx="10965600" cy="183240"/>
+            <a:ext cx="10964880" cy="182520"/>
           </a:xfrm>
           <a:prstGeom prst="rect">
             <a:avLst/>
@@ -22053,7 +17976,7 @@
         <p:spPr>
           <a:xfrm>
             <a:off x="0" y="0"/>
-            <a:ext cx="12184920" cy="65880"/>
+            <a:ext cx="12184200" cy="65160"/>
           </a:xfrm>
           <a:prstGeom prst="rect">
             <a:avLst/>
@@ -22137,7 +18060,7 @@
         <p:spPr>
           <a:xfrm>
             <a:off x="0" y="0"/>
-            <a:ext cx="12184920" cy="65880"/>
+            <a:ext cx="12184200" cy="65160"/>
           </a:xfrm>
           <a:prstGeom prst="rect">
             <a:avLst/>
@@ -22449,7 +18372,7 @@
         <p:spPr>
           <a:xfrm>
             <a:off x="777240" y="5879520"/>
-            <a:ext cx="3418920" cy="285480"/>
+            <a:ext cx="3418200" cy="284760"/>
           </a:xfrm>
           <a:prstGeom prst="roundRect">
             <a:avLst>
@@ -22523,7 +18446,7 @@
         <p:spPr>
           <a:xfrm>
             <a:off x="4367880" y="5879520"/>
-            <a:ext cx="3418920" cy="285480"/>
+            <a:ext cx="3418200" cy="284760"/>
           </a:xfrm>
           <a:prstGeom prst="roundRect">
             <a:avLst>
@@ -22597,7 +18520,7 @@
         <p:spPr>
           <a:xfrm>
             <a:off x="7958160" y="5879520"/>
-            <a:ext cx="3418920" cy="285480"/>
+            <a:ext cx="3418200" cy="284760"/>
           </a:xfrm>
           <a:prstGeom prst="roundRect">
             <a:avLst>
@@ -22661,7 +18584,7 @@
         <p:spPr>
           <a:xfrm>
             <a:off x="457200" y="6565320"/>
-            <a:ext cx="11239920" cy="149040"/>
+            <a:ext cx="11239200" cy="149040"/>
           </a:xfrm>
           <a:prstGeom prst="rect">
             <a:avLst/>
@@ -22778,7 +18701,7 @@
         <p:spPr>
           <a:xfrm>
             <a:off x="0" y="0"/>
-            <a:ext cx="12184920" cy="65880"/>
+            <a:ext cx="12184200" cy="65160"/>
           </a:xfrm>
           <a:prstGeom prst="rect">
             <a:avLst/>
@@ -22829,7 +18752,7 @@
         <p:spPr>
           <a:xfrm>
             <a:off x="1080000" y="1271520"/>
-            <a:ext cx="4319280" cy="4302720"/>
+            <a:ext cx="4318560" cy="4302000"/>
           </a:xfrm>
           <a:prstGeom prst="rect">
             <a:avLst/>
@@ -22852,7 +18775,7 @@
         <p:spPr>
           <a:xfrm>
             <a:off x="5760000" y="1260000"/>
-            <a:ext cx="5234400" cy="4314240"/>
+            <a:ext cx="5233680" cy="4313520"/>
           </a:xfrm>
           <a:prstGeom prst="rect">
             <a:avLst/>
@@ -22908,7 +18831,7 @@
         <p:spPr>
           <a:xfrm>
             <a:off x="0" y="0"/>
-            <a:ext cx="12184920" cy="65880"/>
+            <a:ext cx="12184200" cy="65160"/>
           </a:xfrm>
           <a:prstGeom prst="rect">
             <a:avLst/>
@@ -23304,7 +19227,7 @@
         <p:spPr>
           <a:xfrm>
             <a:off x="502920" y="1341360"/>
-            <a:ext cx="11194200" cy="4177080"/>
+            <a:ext cx="11193480" cy="4176360"/>
           </a:xfrm>
           <a:prstGeom prst="rect">
             <a:avLst/>
@@ -23323,7 +19246,7 @@
         <p:spPr>
           <a:xfrm>
             <a:off x="777240" y="5879520"/>
-            <a:ext cx="3418920" cy="285480"/>
+            <a:ext cx="3418200" cy="284760"/>
           </a:xfrm>
           <a:prstGeom prst="roundRect">
             <a:avLst>
@@ -23407,7 +19330,7 @@
         <p:spPr>
           <a:xfrm>
             <a:off x="4367880" y="5879520"/>
-            <a:ext cx="3418920" cy="285480"/>
+            <a:ext cx="3418200" cy="284760"/>
           </a:xfrm>
           <a:prstGeom prst="roundRect">
             <a:avLst>
@@ -23501,7 +19424,7 @@
         <p:spPr>
           <a:xfrm>
             <a:off x="7958160" y="5879520"/>
-            <a:ext cx="3418920" cy="285480"/>
+            <a:ext cx="3418200" cy="284760"/>
           </a:xfrm>
           <a:prstGeom prst="roundRect">
             <a:avLst>
@@ -23565,7 +19488,7 @@
         <p:spPr>
           <a:xfrm>
             <a:off x="457200" y="6565320"/>
-            <a:ext cx="11239920" cy="149040"/>
+            <a:ext cx="11239200" cy="149040"/>
           </a:xfrm>
           <a:prstGeom prst="rect">
             <a:avLst/>
@@ -23642,7 +19565,7 @@
         <p:spPr>
           <a:xfrm>
             <a:off x="0" y="0"/>
-            <a:ext cx="12184920" cy="65880"/>
+            <a:ext cx="12184200" cy="65160"/>
           </a:xfrm>
           <a:prstGeom prst="rect">
             <a:avLst/>
@@ -23726,7 +19649,7 @@
         <p:spPr>
           <a:xfrm>
             <a:off x="609480" y="266760"/>
-            <a:ext cx="2088360" cy="221400"/>
+            <a:ext cx="2087640" cy="220680"/>
           </a:xfrm>
           <a:prstGeom prst="rect">
             <a:avLst/>
@@ -23783,7 +19706,7 @@
         <p:spPr>
           <a:xfrm>
             <a:off x="609480" y="552600"/>
-            <a:ext cx="10279800" cy="450000"/>
+            <a:ext cx="10279080" cy="449280"/>
           </a:xfrm>
           <a:prstGeom prst="rect">
             <a:avLst/>
@@ -23890,7 +19813,7 @@
         <p:spPr>
           <a:xfrm>
             <a:off x="609480" y="1047600"/>
-            <a:ext cx="10470240" cy="392760"/>
+            <a:ext cx="10469520" cy="392040"/>
           </a:xfrm>
           <a:prstGeom prst="rect">
             <a:avLst/>
@@ -23997,7 +19920,7 @@
         <p:spPr>
           <a:xfrm>
             <a:off x="11064240" y="292680"/>
-            <a:ext cx="499320" cy="225000"/>
+            <a:ext cx="498600" cy="224280"/>
           </a:xfrm>
           <a:prstGeom prst="rect">
             <a:avLst/>
@@ -24051,7 +19974,7 @@
         <p:spPr>
           <a:xfrm>
             <a:off x="647640" y="1752480"/>
-            <a:ext cx="5174280" cy="3517200"/>
+            <a:ext cx="5173560" cy="3516480"/>
           </a:xfrm>
           <a:prstGeom prst="roundRect">
             <a:avLst>
@@ -24103,7 +20026,7 @@
         <p:spPr>
           <a:xfrm>
             <a:off x="914400" y="2000160"/>
-            <a:ext cx="1516680" cy="278640"/>
+            <a:ext cx="1515960" cy="277920"/>
           </a:xfrm>
           <a:prstGeom prst="rect">
             <a:avLst/>
@@ -24160,7 +20083,7 @@
         <p:spPr>
           <a:xfrm>
             <a:off x="952560" y="2610000"/>
-            <a:ext cx="1231200" cy="259560"/>
+            <a:ext cx="1230480" cy="258840"/>
           </a:xfrm>
           <a:prstGeom prst="rect">
             <a:avLst/>
@@ -24217,7 +20140,7 @@
         <p:spPr>
           <a:xfrm>
             <a:off x="2266920" y="2610000"/>
-            <a:ext cx="3040920" cy="259560"/>
+            <a:ext cx="3040200" cy="258840"/>
           </a:xfrm>
           <a:prstGeom prst="rect">
             <a:avLst/>
@@ -24274,7 +20197,7 @@
         <p:spPr>
           <a:xfrm>
             <a:off x="952560" y="3295800"/>
-            <a:ext cx="1231200" cy="259560"/>
+            <a:ext cx="1230480" cy="258840"/>
           </a:xfrm>
           <a:prstGeom prst="rect">
             <a:avLst/>
@@ -24331,7 +20254,7 @@
         <p:spPr>
           <a:xfrm>
             <a:off x="2266920" y="3295800"/>
-            <a:ext cx="3040920" cy="259560"/>
+            <a:ext cx="3040200" cy="258840"/>
           </a:xfrm>
           <a:prstGeom prst="rect">
             <a:avLst/>
@@ -24408,7 +20331,7 @@
         <p:spPr>
           <a:xfrm>
             <a:off x="952560" y="3981600"/>
-            <a:ext cx="1231200" cy="259560"/>
+            <a:ext cx="1230480" cy="258840"/>
           </a:xfrm>
           <a:prstGeom prst="rect">
             <a:avLst/>
@@ -24465,7 +20388,7 @@
         <p:spPr>
           <a:xfrm>
             <a:off x="2266920" y="3981600"/>
-            <a:ext cx="3040920" cy="259560"/>
+            <a:ext cx="3040200" cy="258840"/>
           </a:xfrm>
           <a:prstGeom prst="rect">
             <a:avLst/>
@@ -24532,7 +20455,7 @@
         <p:spPr>
           <a:xfrm>
             <a:off x="952560" y="4762440"/>
-            <a:ext cx="1421640" cy="316800"/>
+            <a:ext cx="1420920" cy="316080"/>
           </a:xfrm>
           <a:prstGeom prst="roundRect">
             <a:avLst>
@@ -24584,7 +20507,7 @@
         <p:spPr>
           <a:xfrm>
             <a:off x="1028880" y="4791240"/>
-            <a:ext cx="1269000" cy="259560"/>
+            <a:ext cx="1268280" cy="258840"/>
           </a:xfrm>
           <a:prstGeom prst="rect">
             <a:avLst/>
@@ -24641,7 +20564,7 @@
         <p:spPr>
           <a:xfrm>
             <a:off x="2571840" y="4762440"/>
-            <a:ext cx="2850480" cy="316800"/>
+            <a:ext cx="2849760" cy="316080"/>
           </a:xfrm>
           <a:prstGeom prst="rect">
             <a:avLst/>
@@ -24738,7 +20661,7 @@
         <p:spPr>
           <a:xfrm>
             <a:off x="6362640" y="1752480"/>
-            <a:ext cx="5174280" cy="3517200"/>
+            <a:ext cx="5173560" cy="3516480"/>
           </a:xfrm>
           <a:prstGeom prst="roundRect">
             <a:avLst>
@@ -24790,7 +20713,7 @@
         <p:spPr>
           <a:xfrm>
             <a:off x="6629400" y="2000160"/>
-            <a:ext cx="1516680" cy="278640"/>
+            <a:ext cx="3450600" cy="277920"/>
           </a:xfrm>
           <a:prstGeom prst="rect">
             <a:avLst/>
@@ -24827,7 +20750,7 @@
                 <a:latin typeface="Calibri"/>
                 <a:ea typeface="Calibri"/>
               </a:rPr>
-              <a:t>RECEIVE</a:t>
+              <a:t>RECEIVE / SUBSCRIBE</a:t>
             </a:r>
             <a:endParaRPr b="0" lang="en-US" sz="1500" spc="-1" strike="noStrike">
               <a:solidFill>
@@ -24889,7 +20812,7 @@
         <p:spPr>
           <a:xfrm>
             <a:off x="6724800" y="2762280"/>
-            <a:ext cx="945360" cy="716760"/>
+            <a:ext cx="944640" cy="716040"/>
           </a:xfrm>
           <a:prstGeom prst="roundRect">
             <a:avLst>
@@ -24941,7 +20864,7 @@
         <p:spPr>
           <a:xfrm>
             <a:off x="6819840" y="2857680"/>
-            <a:ext cx="754920" cy="526320"/>
+            <a:ext cx="754200" cy="525600"/>
           </a:xfrm>
           <a:prstGeom prst="rect">
             <a:avLst/>
@@ -25066,7 +20989,7 @@
         <p:spPr>
           <a:xfrm>
             <a:off x="7886880" y="2762280"/>
-            <a:ext cx="945360" cy="716760"/>
+            <a:ext cx="944640" cy="716040"/>
           </a:xfrm>
           <a:prstGeom prst="roundRect">
             <a:avLst>
@@ -25118,7 +21041,7 @@
         <p:spPr>
           <a:xfrm>
             <a:off x="7981920" y="2857680"/>
-            <a:ext cx="754920" cy="526320"/>
+            <a:ext cx="754200" cy="525600"/>
           </a:xfrm>
           <a:prstGeom prst="rect">
             <a:avLst/>
@@ -25243,7 +21166,7 @@
         <p:spPr>
           <a:xfrm>
             <a:off x="9048600" y="2762280"/>
-            <a:ext cx="945360" cy="716760"/>
+            <a:ext cx="944640" cy="716040"/>
           </a:xfrm>
           <a:prstGeom prst="roundRect">
             <a:avLst>
@@ -25295,7 +21218,7 @@
         <p:spPr>
           <a:xfrm>
             <a:off x="9144000" y="2857680"/>
-            <a:ext cx="754920" cy="526320"/>
+            <a:ext cx="754200" cy="525600"/>
           </a:xfrm>
           <a:prstGeom prst="rect">
             <a:avLst/>
@@ -25378,7 +21301,7 @@
         <p:spPr>
           <a:xfrm>
             <a:off x="10210680" y="2762280"/>
-            <a:ext cx="945360" cy="716760"/>
+            <a:ext cx="944640" cy="716040"/>
           </a:xfrm>
           <a:prstGeom prst="roundRect">
             <a:avLst>
@@ -25430,7 +21353,7 @@
         <p:spPr>
           <a:xfrm>
             <a:off x="10306080" y="2857680"/>
-            <a:ext cx="754920" cy="526320"/>
+            <a:ext cx="754200" cy="525600"/>
           </a:xfrm>
           <a:prstGeom prst="rect">
             <a:avLst/>
@@ -25513,7 +21436,7 @@
         <p:spPr>
           <a:xfrm>
             <a:off x="6781680" y="4095720"/>
-            <a:ext cx="4278960" cy="526320"/>
+            <a:ext cx="4278240" cy="525600"/>
           </a:xfrm>
           <a:prstGeom prst="rect">
             <a:avLst/>
@@ -25620,7 +21543,7 @@
         <p:spPr>
           <a:xfrm>
             <a:off x="1295280" y="5619600"/>
-            <a:ext cx="9594000" cy="316800"/>
+            <a:ext cx="9593280" cy="316080"/>
           </a:xfrm>
           <a:prstGeom prst="rect">
             <a:avLst/>
@@ -25739,7 +21662,7 @@
         <p:spPr>
           <a:xfrm>
             <a:off x="609480" y="6534000"/>
-            <a:ext cx="10965600" cy="183240"/>
+            <a:ext cx="10964880" cy="182520"/>
           </a:xfrm>
           <a:prstGeom prst="rect">
             <a:avLst/>
@@ -25806,7 +21729,7 @@
         <p:spPr>
           <a:xfrm>
             <a:off x="0" y="0"/>
-            <a:ext cx="12184920" cy="65880"/>
+            <a:ext cx="12184200" cy="65160"/>
           </a:xfrm>
           <a:prstGeom prst="rect">
             <a:avLst/>
@@ -25890,7 +21813,7 @@
         <p:spPr>
           <a:xfrm>
             <a:off x="0" y="0"/>
-            <a:ext cx="12184920" cy="65880"/>
+            <a:ext cx="12184200" cy="65160"/>
           </a:xfrm>
           <a:prstGeom prst="rect">
             <a:avLst/>
@@ -26292,7 +22215,7 @@
         <p:spPr>
           <a:xfrm>
             <a:off x="777240" y="6120000"/>
-            <a:ext cx="3418920" cy="285480"/>
+            <a:ext cx="3418200" cy="284760"/>
           </a:xfrm>
           <a:prstGeom prst="roundRect">
             <a:avLst>
@@ -26366,7 +22289,7 @@
         <p:spPr>
           <a:xfrm>
             <a:off x="4367880" y="6120000"/>
-            <a:ext cx="3418920" cy="285480"/>
+            <a:ext cx="3418200" cy="284760"/>
           </a:xfrm>
           <a:prstGeom prst="roundRect">
             <a:avLst>
@@ -26440,7 +22363,7 @@
         <p:spPr>
           <a:xfrm>
             <a:off x="7958160" y="6120000"/>
-            <a:ext cx="3418920" cy="285480"/>
+            <a:ext cx="3418200" cy="284760"/>
           </a:xfrm>
           <a:prstGeom prst="roundRect">
             <a:avLst>
@@ -26514,7 +22437,7 @@
         <p:spPr>
           <a:xfrm>
             <a:off x="457200" y="6565320"/>
-            <a:ext cx="11239920" cy="149040"/>
+            <a:ext cx="11239200" cy="149040"/>
           </a:xfrm>
           <a:prstGeom prst="rect">
             <a:avLst/>
@@ -26621,7 +22544,7 @@
         <p:spPr>
           <a:xfrm>
             <a:off x="0" y="0"/>
-            <a:ext cx="12184920" cy="65880"/>
+            <a:ext cx="12184200" cy="65160"/>
           </a:xfrm>
           <a:prstGeom prst="rect">
             <a:avLst/>
@@ -26672,7 +22595,7 @@
         <p:spPr>
           <a:xfrm>
             <a:off x="360000" y="1080000"/>
-            <a:ext cx="11147400" cy="4853880"/>
+            <a:ext cx="11146680" cy="4853160"/>
           </a:xfrm>
           <a:prstGeom prst="rect">
             <a:avLst/>
@@ -26728,7 +22651,7 @@
         <p:spPr>
           <a:xfrm>
             <a:off x="502920" y="255960"/>
-            <a:ext cx="2005200" cy="191880"/>
+            <a:ext cx="2004480" cy="191880"/>
           </a:xfrm>
           <a:prstGeom prst="rect">
             <a:avLst/>
@@ -26836,7 +22759,7 @@
         <p:spPr>
           <a:xfrm>
             <a:off x="502920" y="567000"/>
-            <a:ext cx="9869040" cy="435240"/>
+            <a:ext cx="9868320" cy="435240"/>
           </a:xfrm>
           <a:prstGeom prst="rect">
             <a:avLst/>
@@ -26920,7 +22843,7 @@
         <p:spPr>
           <a:xfrm>
             <a:off x="502920" y="1005840"/>
-            <a:ext cx="10234800" cy="237240"/>
+            <a:ext cx="10234080" cy="237240"/>
           </a:xfrm>
           <a:prstGeom prst="rect">
             <a:avLst/>
@@ -27004,7 +22927,7 @@
         <p:spPr>
           <a:xfrm>
             <a:off x="502920" y="1463040"/>
-            <a:ext cx="2919600" cy="907920"/>
+            <a:ext cx="2918880" cy="907200"/>
           </a:xfrm>
           <a:prstGeom prst="roundRect">
             <a:avLst>
@@ -27056,7 +22979,7 @@
         <p:spPr>
           <a:xfrm>
             <a:off x="631080" y="1554480"/>
-            <a:ext cx="2663640" cy="207000"/>
+            <a:ext cx="2662920" cy="207000"/>
           </a:xfrm>
           <a:prstGeom prst="rect">
             <a:avLst/>
@@ -27110,7 +23033,7 @@
         <p:spPr>
           <a:xfrm>
             <a:off x="631080" y="1847160"/>
-            <a:ext cx="2663640" cy="525240"/>
+            <a:ext cx="2662920" cy="525240"/>
           </a:xfrm>
           <a:prstGeom prst="rect">
             <a:avLst/>
@@ -27234,7 +23157,7 @@
         <p:spPr>
           <a:xfrm>
             <a:off x="502920" y="2514600"/>
-            <a:ext cx="2919600" cy="1136520"/>
+            <a:ext cx="2918880" cy="1135800"/>
           </a:xfrm>
           <a:prstGeom prst="roundRect">
             <a:avLst>
@@ -27286,7 +23209,7 @@
         <p:spPr>
           <a:xfrm>
             <a:off x="631080" y="2606040"/>
-            <a:ext cx="2663640" cy="207000"/>
+            <a:ext cx="2662920" cy="207000"/>
           </a:xfrm>
           <a:prstGeom prst="rect">
             <a:avLst/>
@@ -27340,7 +23263,7 @@
         <p:spPr>
           <a:xfrm>
             <a:off x="631080" y="2898720"/>
-            <a:ext cx="2663640" cy="682200"/>
+            <a:ext cx="2662920" cy="682200"/>
           </a:xfrm>
           <a:prstGeom prst="rect">
             <a:avLst/>
@@ -27504,7 +23427,7 @@
         <p:spPr>
           <a:xfrm>
             <a:off x="502920" y="3794760"/>
-            <a:ext cx="2919600" cy="1059120"/>
+            <a:ext cx="2918880" cy="1058400"/>
           </a:xfrm>
           <a:prstGeom prst="roundRect">
             <a:avLst>
@@ -27556,7 +23479,7 @@
         <p:spPr>
           <a:xfrm>
             <a:off x="631080" y="3886200"/>
-            <a:ext cx="2663640" cy="207000"/>
+            <a:ext cx="2662920" cy="207000"/>
           </a:xfrm>
           <a:prstGeom prst="rect">
             <a:avLst/>
@@ -27610,7 +23533,7 @@
         <p:spPr>
           <a:xfrm>
             <a:off x="631080" y="4178880"/>
-            <a:ext cx="2663640" cy="682200"/>
+            <a:ext cx="2662920" cy="682200"/>
           </a:xfrm>
           <a:prstGeom prst="rect">
             <a:avLst/>
@@ -27794,7 +23717,7 @@
         <p:spPr>
           <a:xfrm>
             <a:off x="494280" y="5040000"/>
-            <a:ext cx="2919600" cy="859320"/>
+            <a:ext cx="2918880" cy="858600"/>
           </a:xfrm>
           <a:prstGeom prst="roundRect">
             <a:avLst>
@@ -27846,7 +23769,7 @@
         <p:spPr>
           <a:xfrm>
             <a:off x="631080" y="5114880"/>
-            <a:ext cx="2663640" cy="207000"/>
+            <a:ext cx="2662920" cy="207000"/>
           </a:xfrm>
           <a:prstGeom prst="rect">
             <a:avLst/>
@@ -27900,7 +23823,7 @@
         <p:spPr>
           <a:xfrm>
             <a:off x="631080" y="5321880"/>
-            <a:ext cx="2663640" cy="359640"/>
+            <a:ext cx="2662920" cy="359640"/>
           </a:xfrm>
           <a:prstGeom prst="rect">
             <a:avLst/>
@@ -28014,7 +23937,7 @@
         <p:spPr>
           <a:xfrm>
             <a:off x="3794760" y="4316040"/>
-            <a:ext cx="7354440" cy="199080"/>
+            <a:ext cx="7353720" cy="199080"/>
           </a:xfrm>
           <a:prstGeom prst="rect">
             <a:avLst/>
@@ -28088,7 +24011,7 @@
         <p:spPr>
           <a:xfrm>
             <a:off x="3931920" y="4864680"/>
-            <a:ext cx="816480" cy="523800"/>
+            <a:ext cx="815760" cy="523080"/>
           </a:xfrm>
           <a:prstGeom prst="roundRect">
             <a:avLst>
@@ -28140,7 +24063,7 @@
         <p:spPr>
           <a:xfrm>
             <a:off x="3977640" y="4984920"/>
-            <a:ext cx="725040" cy="343440"/>
+            <a:ext cx="724320" cy="343440"/>
           </a:xfrm>
           <a:prstGeom prst="rect">
             <a:avLst/>
@@ -28217,7 +24140,7 @@
         <p:spPr>
           <a:xfrm>
             <a:off x="5074920" y="4864680"/>
-            <a:ext cx="816480" cy="523800"/>
+            <a:ext cx="815760" cy="523080"/>
           </a:xfrm>
           <a:prstGeom prst="roundRect">
             <a:avLst>
@@ -28269,7 +24192,7 @@
         <p:spPr>
           <a:xfrm>
             <a:off x="5120640" y="4984920"/>
-            <a:ext cx="725040" cy="343440"/>
+            <a:ext cx="724320" cy="343440"/>
           </a:xfrm>
           <a:prstGeom prst="rect">
             <a:avLst/>
@@ -28346,7 +24269,7 @@
         <p:spPr>
           <a:xfrm>
             <a:off x="6217920" y="4864680"/>
-            <a:ext cx="816480" cy="523800"/>
+            <a:ext cx="815760" cy="523080"/>
           </a:xfrm>
           <a:prstGeom prst="roundRect">
             <a:avLst>
@@ -28398,7 +24321,7 @@
         <p:spPr>
           <a:xfrm>
             <a:off x="6263640" y="4984920"/>
-            <a:ext cx="725040" cy="343440"/>
+            <a:ext cx="724320" cy="343440"/>
           </a:xfrm>
           <a:prstGeom prst="rect">
             <a:avLst/>
@@ -28475,7 +24398,7 @@
         <p:spPr>
           <a:xfrm>
             <a:off x="7360920" y="4864680"/>
-            <a:ext cx="816480" cy="523800"/>
+            <a:ext cx="815760" cy="523080"/>
           </a:xfrm>
           <a:prstGeom prst="roundRect">
             <a:avLst>
@@ -28527,7 +24450,7 @@
         <p:spPr>
           <a:xfrm>
             <a:off x="7406640" y="4984920"/>
-            <a:ext cx="725040" cy="343440"/>
+            <a:ext cx="724320" cy="343440"/>
           </a:xfrm>
           <a:prstGeom prst="rect">
             <a:avLst/>
@@ -28604,7 +24527,7 @@
         <p:spPr>
           <a:xfrm>
             <a:off x="8503920" y="4864680"/>
-            <a:ext cx="816480" cy="523800"/>
+            <a:ext cx="815760" cy="523080"/>
           </a:xfrm>
           <a:prstGeom prst="roundRect">
             <a:avLst>
@@ -28656,7 +24579,7 @@
         <p:spPr>
           <a:xfrm>
             <a:off x="8549640" y="4984920"/>
-            <a:ext cx="725040" cy="343440"/>
+            <a:ext cx="724320" cy="343440"/>
           </a:xfrm>
           <a:prstGeom prst="rect">
             <a:avLst/>
@@ -28733,7 +24656,7 @@
         <p:spPr>
           <a:xfrm>
             <a:off x="4772880" y="5129640"/>
-            <a:ext cx="262800" cy="6480"/>
+            <a:ext cx="263520" cy="7200"/>
           </a:xfrm>
           <a:prstGeom prst="straightConnector1">
             <a:avLst/>
@@ -28754,7 +24677,7 @@
         <p:spPr>
           <a:xfrm>
             <a:off x="5915880" y="5129640"/>
-            <a:ext cx="262800" cy="6480"/>
+            <a:ext cx="263520" cy="7200"/>
           </a:xfrm>
           <a:prstGeom prst="straightConnector1">
             <a:avLst/>
@@ -28775,7 +24698,7 @@
         <p:spPr>
           <a:xfrm>
             <a:off x="7058880" y="5129640"/>
-            <a:ext cx="262800" cy="6480"/>
+            <a:ext cx="263520" cy="7200"/>
           </a:xfrm>
           <a:prstGeom prst="straightConnector1">
             <a:avLst/>
@@ -28796,7 +24719,7 @@
         <p:spPr>
           <a:xfrm>
             <a:off x="8201880" y="5129640"/>
-            <a:ext cx="262800" cy="6480"/>
+            <a:ext cx="263520" cy="7200"/>
           </a:xfrm>
           <a:prstGeom prst="straightConnector1">
             <a:avLst/>
@@ -28817,7 +24740,7 @@
         <p:spPr>
           <a:xfrm>
             <a:off x="3794760" y="5632560"/>
-            <a:ext cx="7308720" cy="207000"/>
+            <a:ext cx="7308000" cy="207000"/>
           </a:xfrm>
           <a:prstGeom prst="rect">
             <a:avLst/>
@@ -28961,7 +24884,7 @@
         <p:spPr>
           <a:xfrm>
             <a:off x="0" y="0"/>
-            <a:ext cx="12184920" cy="65880"/>
+            <a:ext cx="12184200" cy="65160"/>
           </a:xfrm>
           <a:prstGeom prst="rect">
             <a:avLst/>
@@ -29012,7 +24935,7 @@
         <p:spPr>
           <a:xfrm>
             <a:off x="3600000" y="1440000"/>
-            <a:ext cx="5580000" cy="2805840"/>
+            <a:ext cx="5579280" cy="2805120"/>
           </a:xfrm>
           <a:prstGeom prst="rect">
             <a:avLst/>
@@ -29068,7 +24991,7 @@
         <p:spPr>
           <a:xfrm>
             <a:off x="502920" y="255960"/>
-            <a:ext cx="2005200" cy="191880"/>
+            <a:ext cx="2004480" cy="191880"/>
           </a:xfrm>
           <a:prstGeom prst="rect">
             <a:avLst/>
@@ -29176,7 +25099,7 @@
         <p:spPr>
           <a:xfrm>
             <a:off x="502920" y="567000"/>
-            <a:ext cx="9869040" cy="435240"/>
+            <a:ext cx="9868320" cy="435240"/>
           </a:xfrm>
           <a:prstGeom prst="rect">
             <a:avLst/>
@@ -29260,7 +25183,7 @@
         <p:spPr>
           <a:xfrm>
             <a:off x="502920" y="1005840"/>
-            <a:ext cx="10234800" cy="237240"/>
+            <a:ext cx="10234080" cy="237240"/>
           </a:xfrm>
           <a:prstGeom prst="rect">
             <a:avLst/>
@@ -29384,7 +25307,7 @@
         <p:spPr>
           <a:xfrm>
             <a:off x="502920" y="1417320"/>
-            <a:ext cx="3056760" cy="1045440"/>
+            <a:ext cx="3056040" cy="1044720"/>
           </a:xfrm>
           <a:prstGeom prst="roundRect">
             <a:avLst>
@@ -29436,7 +25359,7 @@
         <p:spPr>
           <a:xfrm>
             <a:off x="631080" y="1508760"/>
-            <a:ext cx="2800800" cy="207000"/>
+            <a:ext cx="2800080" cy="207000"/>
           </a:xfrm>
           <a:prstGeom prst="rect">
             <a:avLst/>
@@ -29490,7 +25413,7 @@
         <p:spPr>
           <a:xfrm>
             <a:off x="631080" y="1801440"/>
-            <a:ext cx="2800800" cy="525240"/>
+            <a:ext cx="2800080" cy="525240"/>
           </a:xfrm>
           <a:prstGeom prst="rect">
             <a:avLst/>
@@ -29664,7 +25587,7 @@
         <p:spPr>
           <a:xfrm>
             <a:off x="502920" y="2548800"/>
-            <a:ext cx="3056760" cy="1045080"/>
+            <a:ext cx="3056040" cy="1044360"/>
           </a:xfrm>
           <a:prstGeom prst="roundRect">
             <a:avLst>
@@ -29716,7 +25639,7 @@
         <p:spPr>
           <a:xfrm>
             <a:off x="631080" y="2560320"/>
-            <a:ext cx="2800800" cy="207000"/>
+            <a:ext cx="2800080" cy="207000"/>
           </a:xfrm>
           <a:prstGeom prst="rect">
             <a:avLst/>
@@ -29770,7 +25693,7 @@
         <p:spPr>
           <a:xfrm>
             <a:off x="631080" y="2853000"/>
-            <a:ext cx="2800800" cy="525240"/>
+            <a:ext cx="2800080" cy="525240"/>
           </a:xfrm>
           <a:prstGeom prst="rect">
             <a:avLst/>
@@ -29874,7 +25797,7 @@
         <p:spPr>
           <a:xfrm>
             <a:off x="502920" y="3657600"/>
-            <a:ext cx="3056760" cy="1016280"/>
+            <a:ext cx="3056040" cy="1015560"/>
           </a:xfrm>
           <a:prstGeom prst="roundRect">
             <a:avLst>
@@ -29926,7 +25849,7 @@
         <p:spPr>
           <a:xfrm>
             <a:off x="631080" y="3749040"/>
-            <a:ext cx="2800800" cy="207000"/>
+            <a:ext cx="2800080" cy="207000"/>
           </a:xfrm>
           <a:prstGeom prst="rect">
             <a:avLst/>
@@ -29980,7 +25903,7 @@
         <p:spPr>
           <a:xfrm>
             <a:off x="631080" y="4041720"/>
-            <a:ext cx="2800800" cy="525240"/>
+            <a:ext cx="2800080" cy="525240"/>
           </a:xfrm>
           <a:prstGeom prst="rect">
             <a:avLst/>
@@ -30114,7 +26037,7 @@
         <p:spPr>
           <a:xfrm>
             <a:off x="502920" y="4813560"/>
-            <a:ext cx="3056760" cy="940320"/>
+            <a:ext cx="3056040" cy="939600"/>
           </a:xfrm>
           <a:prstGeom prst="roundRect">
             <a:avLst>
@@ -30166,7 +26089,7 @@
         <p:spPr>
           <a:xfrm>
             <a:off x="613080" y="4860000"/>
-            <a:ext cx="2800800" cy="207000"/>
+            <a:ext cx="2800080" cy="207000"/>
           </a:xfrm>
           <a:prstGeom prst="rect">
             <a:avLst/>
@@ -30220,7 +26143,7 @@
         <p:spPr>
           <a:xfrm>
             <a:off x="631080" y="5067000"/>
-            <a:ext cx="2800800" cy="525240"/>
+            <a:ext cx="2800080" cy="525240"/>
           </a:xfrm>
           <a:prstGeom prst="rect">
             <a:avLst/>
@@ -30364,7 +26287,7 @@
         <p:spPr>
           <a:xfrm>
             <a:off x="3886200" y="1408320"/>
-            <a:ext cx="1182240" cy="207000"/>
+            <a:ext cx="1181520" cy="207000"/>
           </a:xfrm>
           <a:prstGeom prst="rect">
             <a:avLst/>
@@ -30418,7 +26341,7 @@
         <p:spPr>
           <a:xfrm>
             <a:off x="3886200" y="1719000"/>
-            <a:ext cx="2050920" cy="396000"/>
+            <a:ext cx="2050200" cy="395280"/>
           </a:xfrm>
           <a:prstGeom prst="roundRect">
             <a:avLst>
@@ -30470,7 +26393,7 @@
         <p:spPr>
           <a:xfrm>
             <a:off x="3931920" y="1847520"/>
-            <a:ext cx="1959480" cy="198720"/>
+            <a:ext cx="1958760" cy="198720"/>
           </a:xfrm>
           <a:prstGeom prst="rect">
             <a:avLst/>
@@ -30524,7 +26447,7 @@
         <p:spPr>
           <a:xfrm>
             <a:off x="3886200" y="2331720"/>
-            <a:ext cx="2050920" cy="651960"/>
+            <a:ext cx="2050200" cy="651240"/>
           </a:xfrm>
           <a:prstGeom prst="roundRect">
             <a:avLst>
@@ -30576,7 +26499,7 @@
         <p:spPr>
           <a:xfrm>
             <a:off x="3931920" y="2516040"/>
-            <a:ext cx="1959480" cy="343440"/>
+            <a:ext cx="1958760" cy="343440"/>
           </a:xfrm>
           <a:prstGeom prst="rect">
             <a:avLst/>
@@ -30673,7 +26596,7 @@
         <p:spPr>
           <a:xfrm>
             <a:off x="3886200" y="3273480"/>
-            <a:ext cx="2050920" cy="651960"/>
+            <a:ext cx="2050200" cy="651240"/>
           </a:xfrm>
           <a:prstGeom prst="roundRect">
             <a:avLst>
@@ -30725,7 +26648,7 @@
         <p:spPr>
           <a:xfrm>
             <a:off x="3931920" y="3457800"/>
-            <a:ext cx="1959480" cy="343440"/>
+            <a:ext cx="1958760" cy="343440"/>
           </a:xfrm>
           <a:prstGeom prst="rect">
             <a:avLst/>
@@ -30802,7 +26725,7 @@
         <p:spPr>
           <a:xfrm>
             <a:off x="4919400" y="2139480"/>
-            <a:ext cx="6480" cy="171000"/>
+            <a:ext cx="7200" cy="171720"/>
           </a:xfrm>
           <a:prstGeom prst="straightConnector1">
             <a:avLst/>
@@ -30823,7 +26746,7 @@
         <p:spPr>
           <a:xfrm>
             <a:off x="4919400" y="3008160"/>
-            <a:ext cx="6480" cy="244440"/>
+            <a:ext cx="7200" cy="245160"/>
           </a:xfrm>
           <a:prstGeom prst="straightConnector1">
             <a:avLst/>
@@ -30844,7 +26767,7 @@
         <p:spPr>
           <a:xfrm>
             <a:off x="4507920" y="4041720"/>
-            <a:ext cx="1273680" cy="298080"/>
+            <a:ext cx="1272960" cy="298080"/>
           </a:xfrm>
           <a:prstGeom prst="rect">
             <a:avLst/>
@@ -30898,7 +26821,7 @@
         <p:spPr>
           <a:xfrm>
             <a:off x="6766560" y="1408320"/>
-            <a:ext cx="1182240" cy="207000"/>
+            <a:ext cx="1181520" cy="207000"/>
           </a:xfrm>
           <a:prstGeom prst="rect">
             <a:avLst/>
@@ -30952,7 +26875,7 @@
         <p:spPr>
           <a:xfrm>
             <a:off x="6766560" y="1719000"/>
-            <a:ext cx="2050920" cy="396000"/>
+            <a:ext cx="2050200" cy="395280"/>
           </a:xfrm>
           <a:prstGeom prst="roundRect">
             <a:avLst>
@@ -31004,7 +26927,7 @@
         <p:spPr>
           <a:xfrm>
             <a:off x="6812280" y="1847520"/>
-            <a:ext cx="1959480" cy="198720"/>
+            <a:ext cx="1958760" cy="198720"/>
           </a:xfrm>
           <a:prstGeom prst="rect">
             <a:avLst/>
@@ -31058,7 +26981,7 @@
         <p:spPr>
           <a:xfrm>
             <a:off x="6766560" y="2331720"/>
-            <a:ext cx="2050920" cy="651960"/>
+            <a:ext cx="2050200" cy="651240"/>
           </a:xfrm>
           <a:prstGeom prst="roundRect">
             <a:avLst>
@@ -31110,7 +27033,7 @@
         <p:spPr>
           <a:xfrm>
             <a:off x="6812280" y="2516040"/>
-            <a:ext cx="1959480" cy="343440"/>
+            <a:ext cx="1958760" cy="343440"/>
           </a:xfrm>
           <a:prstGeom prst="rect">
             <a:avLst/>
@@ -31187,7 +27110,7 @@
         <p:spPr>
           <a:xfrm>
             <a:off x="9144000" y="1719000"/>
-            <a:ext cx="2050920" cy="396000"/>
+            <a:ext cx="2050200" cy="395280"/>
           </a:xfrm>
           <a:prstGeom prst="roundRect">
             <a:avLst>
@@ -31239,7 +27162,7 @@
         <p:spPr>
           <a:xfrm>
             <a:off x="9189720" y="1847520"/>
-            <a:ext cx="1959480" cy="198720"/>
+            <a:ext cx="1958760" cy="198720"/>
           </a:xfrm>
           <a:prstGeom prst="rect">
             <a:avLst/>
@@ -31293,7 +27216,7 @@
         <p:spPr>
           <a:xfrm>
             <a:off x="9144000" y="2331720"/>
-            <a:ext cx="2050920" cy="651960"/>
+            <a:ext cx="2050200" cy="651240"/>
           </a:xfrm>
           <a:prstGeom prst="roundRect">
             <a:avLst>
@@ -31345,7 +27268,7 @@
         <p:spPr>
           <a:xfrm>
             <a:off x="9189720" y="2516040"/>
-            <a:ext cx="1959480" cy="343440"/>
+            <a:ext cx="1958760" cy="343440"/>
           </a:xfrm>
           <a:prstGeom prst="rect">
             <a:avLst/>
@@ -31422,7 +27345,7 @@
         <p:spPr>
           <a:xfrm>
             <a:off x="8869680" y="2679120"/>
-            <a:ext cx="280800" cy="6480"/>
+            <a:ext cx="281520" cy="7200"/>
           </a:xfrm>
           <a:prstGeom prst="straightConnector1">
             <a:avLst/>
@@ -31443,7 +27366,7 @@
         <p:spPr>
           <a:xfrm>
             <a:off x="8092440" y="3154680"/>
-            <a:ext cx="1776600" cy="237240"/>
+            <a:ext cx="1775880" cy="237240"/>
           </a:xfrm>
           <a:prstGeom prst="rect">
             <a:avLst/>
@@ -31501,7 +27424,7 @@
         <p:spPr>
           <a:xfrm>
             <a:off x="3840480" y="4498920"/>
-            <a:ext cx="3148200" cy="1550880"/>
+            <a:ext cx="3147480" cy="1550160"/>
           </a:xfrm>
           <a:prstGeom prst="rect">
             <a:avLst/>
@@ -31524,7 +27447,7 @@
         <p:spPr>
           <a:xfrm>
             <a:off x="7498080" y="4498920"/>
-            <a:ext cx="2736720" cy="1959840"/>
+            <a:ext cx="2736000" cy="1959120"/>
           </a:xfrm>
           <a:prstGeom prst="rect">
             <a:avLst/>
@@ -31677,7 +27600,7 @@
         <p:spPr>
           <a:xfrm>
             <a:off x="0" y="0"/>
-            <a:ext cx="12184920" cy="65880"/>
+            <a:ext cx="12184200" cy="65160"/>
           </a:xfrm>
           <a:prstGeom prst="rect">
             <a:avLst/>
@@ -31761,7 +27684,7 @@
         <p:spPr>
           <a:xfrm>
             <a:off x="609480" y="266760"/>
-            <a:ext cx="2088360" cy="221400"/>
+            <a:ext cx="2087640" cy="220680"/>
           </a:xfrm>
           <a:prstGeom prst="rect">
             <a:avLst/>
@@ -31818,7 +27741,7 @@
         <p:spPr>
           <a:xfrm>
             <a:off x="609480" y="552600"/>
-            <a:ext cx="10279800" cy="450000"/>
+            <a:ext cx="10279080" cy="449280"/>
           </a:xfrm>
           <a:prstGeom prst="rect">
             <a:avLst/>
@@ -31895,7 +27818,7 @@
         <p:spPr>
           <a:xfrm>
             <a:off x="609480" y="1047600"/>
-            <a:ext cx="10470240" cy="392760"/>
+            <a:ext cx="10469520" cy="392040"/>
           </a:xfrm>
           <a:prstGeom prst="rect">
             <a:avLst/>
@@ -32042,7 +27965,7 @@
         <p:spPr>
           <a:xfrm>
             <a:off x="11064240" y="292680"/>
-            <a:ext cx="499320" cy="225000"/>
+            <a:ext cx="498600" cy="224280"/>
           </a:xfrm>
           <a:prstGeom prst="rect">
             <a:avLst/>
@@ -32096,7 +28019,7 @@
         <p:spPr>
           <a:xfrm>
             <a:off x="666720" y="1790640"/>
-            <a:ext cx="3326400" cy="3135960"/>
+            <a:ext cx="3325680" cy="3135240"/>
           </a:xfrm>
           <a:prstGeom prst="roundRect">
             <a:avLst>
@@ -32148,7 +28071,7 @@
         <p:spPr>
           <a:xfrm>
             <a:off x="666720" y="1790640"/>
-            <a:ext cx="59400" cy="3135960"/>
+            <a:ext cx="58680" cy="3135240"/>
           </a:xfrm>
           <a:prstGeom prst="rect">
             <a:avLst/>
@@ -32198,7 +28121,7 @@
         <p:spPr>
           <a:xfrm>
             <a:off x="895320" y="1943280"/>
-            <a:ext cx="2945520" cy="278640"/>
+            <a:ext cx="2944800" cy="277920"/>
           </a:xfrm>
           <a:prstGeom prst="rect">
             <a:avLst/>
@@ -32265,7 +28188,7 @@
         <p:spPr>
           <a:xfrm>
             <a:off x="895320" y="2286000"/>
-            <a:ext cx="2945520" cy="2526480"/>
+            <a:ext cx="2944800" cy="2525760"/>
           </a:xfrm>
           <a:prstGeom prst="rect">
             <a:avLst/>
@@ -32368,7 +28291,7 @@
         <p:spPr>
           <a:xfrm>
             <a:off x="4429080" y="1790640"/>
-            <a:ext cx="3326400" cy="3135960"/>
+            <a:ext cx="3325680" cy="3135240"/>
           </a:xfrm>
           <a:prstGeom prst="roundRect">
             <a:avLst>
@@ -32420,7 +28343,7 @@
         <p:spPr>
           <a:xfrm>
             <a:off x="4429080" y="1790640"/>
-            <a:ext cx="59400" cy="3135960"/>
+            <a:ext cx="58680" cy="3135240"/>
           </a:xfrm>
           <a:prstGeom prst="rect">
             <a:avLst/>
@@ -32470,7 +28393,7 @@
         <p:spPr>
           <a:xfrm>
             <a:off x="4657680" y="1943280"/>
-            <a:ext cx="2945520" cy="278640"/>
+            <a:ext cx="2944800" cy="277920"/>
           </a:xfrm>
           <a:prstGeom prst="rect">
             <a:avLst/>
@@ -32537,7 +28460,7 @@
         <p:spPr>
           <a:xfrm>
             <a:off x="4657680" y="2286000"/>
-            <a:ext cx="2945520" cy="2526480"/>
+            <a:ext cx="2944800" cy="2525760"/>
           </a:xfrm>
           <a:prstGeom prst="rect">
             <a:avLst/>
@@ -32690,7 +28613,7 @@
         <p:spPr>
           <a:xfrm>
             <a:off x="8191440" y="1790640"/>
-            <a:ext cx="3326400" cy="3135960"/>
+            <a:ext cx="3325680" cy="3135240"/>
           </a:xfrm>
           <a:prstGeom prst="roundRect">
             <a:avLst>
@@ -32742,7 +28665,7 @@
         <p:spPr>
           <a:xfrm>
             <a:off x="8191440" y="1790640"/>
-            <a:ext cx="59400" cy="3135960"/>
+            <a:ext cx="58680" cy="3135240"/>
           </a:xfrm>
           <a:prstGeom prst="rect">
             <a:avLst/>
@@ -32792,7 +28715,7 @@
         <p:spPr>
           <a:xfrm>
             <a:off x="8420040" y="1943280"/>
-            <a:ext cx="2945520" cy="278640"/>
+            <a:ext cx="2944800" cy="277920"/>
           </a:xfrm>
           <a:prstGeom prst="rect">
             <a:avLst/>
@@ -32859,7 +28782,7 @@
         <p:spPr>
           <a:xfrm>
             <a:off x="8420040" y="2286000"/>
-            <a:ext cx="2945520" cy="2526480"/>
+            <a:ext cx="2944800" cy="2525760"/>
           </a:xfrm>
           <a:prstGeom prst="rect">
             <a:avLst/>
@@ -33002,7 +28925,7 @@
         <p:spPr>
           <a:xfrm>
             <a:off x="800280" y="5391000"/>
-            <a:ext cx="10584720" cy="583200"/>
+            <a:ext cx="10584000" cy="582480"/>
           </a:xfrm>
           <a:prstGeom prst="rect">
             <a:avLst/>
@@ -33231,7 +29154,7 @@
         <p:spPr>
           <a:xfrm>
             <a:off x="609480" y="6534000"/>
-            <a:ext cx="10965600" cy="183240"/>
+            <a:ext cx="10964880" cy="182520"/>
           </a:xfrm>
           <a:prstGeom prst="rect">
             <a:avLst/>
@@ -33276,7 +29199,7 @@
         <p:spPr>
           <a:xfrm>
             <a:off x="0" y="0"/>
-            <a:ext cx="12184920" cy="65880"/>
+            <a:ext cx="12184200" cy="65160"/>
           </a:xfrm>
           <a:prstGeom prst="rect">
             <a:avLst/>
@@ -33360,7 +29283,7 @@
         <p:spPr>
           <a:xfrm>
             <a:off x="502920" y="292680"/>
-            <a:ext cx="1826280" cy="152640"/>
+            <a:ext cx="1825560" cy="152280"/>
           </a:xfrm>
           <a:prstGeom prst="rect">
             <a:avLst/>
@@ -33414,7 +29337,7 @@
         <p:spPr>
           <a:xfrm>
             <a:off x="10972800" y="292680"/>
-            <a:ext cx="454680" cy="167760"/>
+            <a:ext cx="453960" cy="167400"/>
           </a:xfrm>
           <a:prstGeom prst="rect">
             <a:avLst/>
@@ -33468,7 +29391,7 @@
         <p:spPr>
           <a:xfrm>
             <a:off x="502920" y="631080"/>
-            <a:ext cx="619200" cy="29520"/>
+            <a:ext cx="618480" cy="28800"/>
           </a:xfrm>
           <a:prstGeom prst="rect">
             <a:avLst/>
@@ -33515,7 +29438,7 @@
         <p:spPr>
           <a:xfrm>
             <a:off x="502920" y="749880"/>
-            <a:ext cx="4935240" cy="426960"/>
+            <a:ext cx="4934520" cy="426600"/>
           </a:xfrm>
           <a:prstGeom prst="rect">
             <a:avLst/>
@@ -33569,7 +29492,7 @@
         <p:spPr>
           <a:xfrm>
             <a:off x="502920" y="1170360"/>
-            <a:ext cx="7678440" cy="198360"/>
+            <a:ext cx="7677720" cy="198000"/>
           </a:xfrm>
           <a:prstGeom prst="rect">
             <a:avLst/>
@@ -33693,7 +29616,7 @@
         <p:spPr>
           <a:xfrm>
             <a:off x="3675960" y="3246120"/>
-            <a:ext cx="317520" cy="454680"/>
+            <a:ext cx="316800" cy="453960"/>
           </a:xfrm>
           <a:prstGeom prst="rtTriangle">
             <a:avLst/>
@@ -33740,7 +29663,7 @@
         <p:spPr>
           <a:xfrm>
             <a:off x="987480" y="5230440"/>
-            <a:ext cx="5666760" cy="165960"/>
+            <a:ext cx="5666040" cy="165240"/>
           </a:xfrm>
           <a:prstGeom prst="rect">
             <a:avLst/>
@@ -33785,7 +29708,7 @@
         <p:spPr>
           <a:xfrm>
             <a:off x="7296840" y="1691640"/>
-            <a:ext cx="4313520" cy="3883680"/>
+            <a:ext cx="4312800" cy="3882960"/>
           </a:xfrm>
           <a:prstGeom prst="roundRect">
             <a:avLst>
@@ -33837,7 +29760,7 @@
         <p:spPr>
           <a:xfrm>
             <a:off x="7589520" y="1938600"/>
-            <a:ext cx="3472200" cy="243720"/>
+            <a:ext cx="3471480" cy="243360"/>
           </a:xfrm>
           <a:prstGeom prst="rect">
             <a:avLst/>
@@ -33891,7 +29814,7 @@
         <p:spPr>
           <a:xfrm>
             <a:off x="7589520" y="2221920"/>
-            <a:ext cx="3609360" cy="319680"/>
+            <a:ext cx="3608640" cy="319320"/>
           </a:xfrm>
           <a:prstGeom prst="rect">
             <a:avLst/>
@@ -33955,7 +29878,7 @@
         <p:spPr>
           <a:xfrm>
             <a:off x="7571160" y="2670120"/>
-            <a:ext cx="417960" cy="417960"/>
+            <a:ext cx="417240" cy="417240"/>
           </a:xfrm>
           <a:prstGeom prst="roundRect">
             <a:avLst>
@@ -34007,7 +29930,7 @@
         <p:spPr>
           <a:xfrm>
             <a:off x="7571160" y="2787840"/>
-            <a:ext cx="417960" cy="183240"/>
+            <a:ext cx="417240" cy="182520"/>
           </a:xfrm>
           <a:prstGeom prst="rect">
             <a:avLst/>
@@ -34061,7 +29984,7 @@
         <p:spPr>
           <a:xfrm>
             <a:off x="8119800" y="2660760"/>
-            <a:ext cx="820440" cy="190440"/>
+            <a:ext cx="819720" cy="190080"/>
           </a:xfrm>
           <a:prstGeom prst="rect">
             <a:avLst/>
@@ -34115,7 +30038,7 @@
         <p:spPr>
           <a:xfrm>
             <a:off x="8119800" y="2898720"/>
-            <a:ext cx="2832120" cy="311040"/>
+            <a:ext cx="2831400" cy="310680"/>
           </a:xfrm>
           <a:prstGeom prst="rect">
             <a:avLst/>
@@ -34179,7 +30102,7 @@
         <p:spPr>
           <a:xfrm>
             <a:off x="7571160" y="3447360"/>
-            <a:ext cx="417960" cy="417960"/>
+            <a:ext cx="417240" cy="417240"/>
           </a:xfrm>
           <a:prstGeom prst="roundRect">
             <a:avLst>
@@ -34231,7 +30154,7 @@
         <p:spPr>
           <a:xfrm>
             <a:off x="7571160" y="3565080"/>
-            <a:ext cx="417960" cy="183240"/>
+            <a:ext cx="417240" cy="182520"/>
           </a:xfrm>
           <a:prstGeom prst="rect">
             <a:avLst/>
@@ -34285,7 +30208,7 @@
         <p:spPr>
           <a:xfrm>
             <a:off x="8119800" y="3438000"/>
-            <a:ext cx="820440" cy="190440"/>
+            <a:ext cx="819720" cy="190080"/>
           </a:xfrm>
           <a:prstGeom prst="rect">
             <a:avLst/>
@@ -34339,7 +30262,7 @@
         <p:spPr>
           <a:xfrm>
             <a:off x="8119800" y="3675960"/>
-            <a:ext cx="2832120" cy="311040"/>
+            <a:ext cx="2831400" cy="310680"/>
           </a:xfrm>
           <a:prstGeom prst="rect">
             <a:avLst/>
@@ -34423,7 +30346,7 @@
         <p:spPr>
           <a:xfrm>
             <a:off x="7571160" y="4224600"/>
-            <a:ext cx="417960" cy="417960"/>
+            <a:ext cx="417240" cy="417240"/>
           </a:xfrm>
           <a:prstGeom prst="roundRect">
             <a:avLst>
@@ -34475,7 +30398,7 @@
         <p:spPr>
           <a:xfrm>
             <a:off x="7571160" y="4342320"/>
-            <a:ext cx="417960" cy="183240"/>
+            <a:ext cx="417240" cy="182520"/>
           </a:xfrm>
           <a:prstGeom prst="rect">
             <a:avLst/>
@@ -34529,7 +30452,7 @@
         <p:spPr>
           <a:xfrm>
             <a:off x="8119800" y="4215240"/>
-            <a:ext cx="820440" cy="190440"/>
+            <a:ext cx="819720" cy="190080"/>
           </a:xfrm>
           <a:prstGeom prst="rect">
             <a:avLst/>
@@ -34583,7 +30506,7 @@
         <p:spPr>
           <a:xfrm>
             <a:off x="8119800" y="4453200"/>
-            <a:ext cx="2832120" cy="155520"/>
+            <a:ext cx="2831400" cy="155160"/>
           </a:xfrm>
           <a:prstGeom prst="rect">
             <a:avLst/>
@@ -34647,7 +30570,7 @@
         <p:spPr>
           <a:xfrm>
             <a:off x="594360" y="5742360"/>
-            <a:ext cx="11016000" cy="473040"/>
+            <a:ext cx="11015280" cy="472320"/>
           </a:xfrm>
           <a:prstGeom prst="roundRect">
             <a:avLst>
@@ -34699,7 +30622,7 @@
         <p:spPr>
           <a:xfrm>
             <a:off x="822960" y="5857200"/>
-            <a:ext cx="10513080" cy="171000"/>
+            <a:ext cx="10512360" cy="170280"/>
           </a:xfrm>
           <a:prstGeom prst="rect">
             <a:avLst/>
@@ -34869,7 +30792,7 @@
         <p:spPr>
           <a:xfrm>
             <a:off x="720000" y="1800000"/>
-            <a:ext cx="6298200" cy="3542760"/>
+            <a:ext cx="6297480" cy="3542040"/>
           </a:xfrm>
           <a:prstGeom prst="rect">
             <a:avLst/>
@@ -34888,7 +30811,7 @@
         <p:spPr>
           <a:xfrm>
             <a:off x="0" y="0"/>
-            <a:ext cx="12184920" cy="65880"/>
+            <a:ext cx="12184200" cy="65160"/>
           </a:xfrm>
           <a:prstGeom prst="rect">
             <a:avLst/>
@@ -34972,7 +30895,7 @@
         <p:spPr>
           <a:xfrm>
             <a:off x="0" y="0"/>
-            <a:ext cx="12188160" cy="60120"/>
+            <a:ext cx="12187440" cy="59400"/>
           </a:xfrm>
           <a:prstGeom prst="rect">
             <a:avLst/>
@@ -35019,7 +30942,7 @@
         <p:spPr>
           <a:xfrm>
             <a:off x="640080" y="298080"/>
-            <a:ext cx="1824840" cy="114840"/>
+            <a:ext cx="1824120" cy="114120"/>
           </a:xfrm>
           <a:prstGeom prst="rect">
             <a:avLst/>
@@ -35073,7 +30996,7 @@
         <p:spPr>
           <a:xfrm>
             <a:off x="11163960" y="280440"/>
-            <a:ext cx="164160" cy="168120"/>
+            <a:ext cx="164160" cy="167400"/>
           </a:xfrm>
           <a:prstGeom prst="rect">
             <a:avLst/>
@@ -35127,7 +31050,7 @@
         <p:spPr>
           <a:xfrm>
             <a:off x="3154680" y="518400"/>
-            <a:ext cx="6031080" cy="350640"/>
+            <a:ext cx="6030360" cy="349920"/>
           </a:xfrm>
           <a:prstGeom prst="rect">
             <a:avLst/>
@@ -35191,7 +31114,7 @@
         <p:spPr>
           <a:xfrm>
             <a:off x="1828800" y="1043280"/>
-            <a:ext cx="8591400" cy="160200"/>
+            <a:ext cx="8590680" cy="159480"/>
           </a:xfrm>
           <a:prstGeom prst="rect">
             <a:avLst/>
@@ -35275,7 +31198,7 @@
         <p:spPr>
           <a:xfrm>
             <a:off x="777240" y="1417320"/>
-            <a:ext cx="5025240" cy="1349280"/>
+            <a:ext cx="5024520" cy="1348560"/>
           </a:xfrm>
           <a:prstGeom prst="roundRect">
             <a:avLst>
@@ -35327,7 +31250,7 @@
         <p:spPr>
           <a:xfrm>
             <a:off x="777240" y="1417320"/>
-            <a:ext cx="60120" cy="1349280"/>
+            <a:ext cx="59400" cy="1348560"/>
           </a:xfrm>
           <a:prstGeom prst="rect">
             <a:avLst/>
@@ -35374,7 +31297,7 @@
         <p:spPr>
           <a:xfrm>
             <a:off x="1005840" y="1617120"/>
-            <a:ext cx="4476600" cy="183240"/>
+            <a:ext cx="4475880" cy="182520"/>
           </a:xfrm>
           <a:prstGeom prst="rect">
             <a:avLst/>
@@ -35438,7 +31361,7 @@
         <p:spPr>
           <a:xfrm>
             <a:off x="1005840" y="1920240"/>
-            <a:ext cx="4430880" cy="259200"/>
+            <a:ext cx="4430160" cy="258840"/>
           </a:xfrm>
           <a:prstGeom prst="rect">
             <a:avLst/>
@@ -35552,7 +31475,7 @@
         <p:spPr>
           <a:xfrm>
             <a:off x="5989320" y="1417320"/>
-            <a:ext cx="5025240" cy="1349280"/>
+            <a:ext cx="5024520" cy="1348560"/>
           </a:xfrm>
           <a:prstGeom prst="roundRect">
             <a:avLst>
@@ -35604,7 +31527,7 @@
         <p:spPr>
           <a:xfrm>
             <a:off x="5989320" y="1417320"/>
-            <a:ext cx="60120" cy="1349280"/>
+            <a:ext cx="59400" cy="1348560"/>
           </a:xfrm>
           <a:prstGeom prst="rect">
             <a:avLst/>
@@ -35651,7 +31574,7 @@
         <p:spPr>
           <a:xfrm>
             <a:off x="6217920" y="1617120"/>
-            <a:ext cx="4476600" cy="183240"/>
+            <a:ext cx="4475880" cy="182520"/>
           </a:xfrm>
           <a:prstGeom prst="rect">
             <a:avLst/>
@@ -35715,7 +31638,7 @@
         <p:spPr>
           <a:xfrm>
             <a:off x="6217920" y="1920240"/>
-            <a:ext cx="4430880" cy="259200"/>
+            <a:ext cx="4430160" cy="258840"/>
           </a:xfrm>
           <a:prstGeom prst="rect">
             <a:avLst/>
@@ -35859,7 +31782,7 @@
         <p:spPr>
           <a:xfrm>
             <a:off x="777240" y="3246120"/>
-            <a:ext cx="5025240" cy="1349280"/>
+            <a:ext cx="5024520" cy="1348560"/>
           </a:xfrm>
           <a:prstGeom prst="roundRect">
             <a:avLst>
@@ -35911,7 +31834,7 @@
         <p:spPr>
           <a:xfrm>
             <a:off x="777240" y="3246120"/>
-            <a:ext cx="60120" cy="1349280"/>
+            <a:ext cx="59400" cy="1348560"/>
           </a:xfrm>
           <a:prstGeom prst="rect">
             <a:avLst/>
@@ -35958,7 +31881,7 @@
         <p:spPr>
           <a:xfrm>
             <a:off x="1005840" y="3445920"/>
-            <a:ext cx="4476600" cy="183240"/>
+            <a:ext cx="4475880" cy="182520"/>
           </a:xfrm>
           <a:prstGeom prst="rect">
             <a:avLst/>
@@ -36022,7 +31945,7 @@
         <p:spPr>
           <a:xfrm>
             <a:off x="1005840" y="3749040"/>
-            <a:ext cx="4430880" cy="259200"/>
+            <a:ext cx="4430160" cy="258840"/>
           </a:xfrm>
           <a:prstGeom prst="rect">
             <a:avLst/>
@@ -36176,7 +32099,7 @@
         <p:spPr>
           <a:xfrm>
             <a:off x="5989320" y="3246120"/>
-            <a:ext cx="5025240" cy="1349280"/>
+            <a:ext cx="5024520" cy="1348560"/>
           </a:xfrm>
           <a:prstGeom prst="roundRect">
             <a:avLst>
@@ -36228,7 +32151,7 @@
         <p:spPr>
           <a:xfrm>
             <a:off x="5989320" y="3246120"/>
-            <a:ext cx="60120" cy="1349280"/>
+            <a:ext cx="59400" cy="1348560"/>
           </a:xfrm>
           <a:prstGeom prst="rect">
             <a:avLst/>
@@ -36275,7 +32198,7 @@
         <p:spPr>
           <a:xfrm>
             <a:off x="6217920" y="3445920"/>
-            <a:ext cx="4476600" cy="183240"/>
+            <a:ext cx="4475880" cy="182520"/>
           </a:xfrm>
           <a:prstGeom prst="rect">
             <a:avLst/>
@@ -36339,7 +32262,7 @@
         <p:spPr>
           <a:xfrm>
             <a:off x="6217920" y="3749040"/>
-            <a:ext cx="4430880" cy="388800"/>
+            <a:ext cx="4430160" cy="388440"/>
           </a:xfrm>
           <a:prstGeom prst="rect">
             <a:avLst/>
@@ -36529,7 +32452,7 @@
         <p:spPr>
           <a:xfrm>
             <a:off x="777240" y="5559480"/>
-            <a:ext cx="10511640" cy="617760"/>
+            <a:ext cx="10510920" cy="617040"/>
           </a:xfrm>
           <a:prstGeom prst="roundRect">
             <a:avLst>
@@ -36581,7 +32504,7 @@
         <p:spPr>
           <a:xfrm>
             <a:off x="960120" y="5774400"/>
-            <a:ext cx="10145880" cy="153000"/>
+            <a:ext cx="10145160" cy="152280"/>
           </a:xfrm>
           <a:prstGeom prst="rect">
             <a:avLst/>
@@ -36762,7 +32685,7 @@
         <p:spPr>
           <a:xfrm>
             <a:off x="609480" y="266760"/>
-            <a:ext cx="2088360" cy="221400"/>
+            <a:ext cx="2087640" cy="220680"/>
           </a:xfrm>
           <a:prstGeom prst="rect">
             <a:avLst/>
@@ -36819,7 +32742,7 @@
         <p:spPr>
           <a:xfrm>
             <a:off x="609480" y="552600"/>
-            <a:ext cx="10279800" cy="450000"/>
+            <a:ext cx="10279080" cy="449280"/>
           </a:xfrm>
           <a:prstGeom prst="rect">
             <a:avLst/>
@@ -36886,7 +32809,7 @@
         <p:spPr>
           <a:xfrm>
             <a:off x="609480" y="1047600"/>
-            <a:ext cx="10470240" cy="392760"/>
+            <a:ext cx="10469520" cy="392040"/>
           </a:xfrm>
           <a:prstGeom prst="rect">
             <a:avLst/>
@@ -37029,7 +32952,7 @@
         <p:spPr>
           <a:xfrm>
             <a:off x="11064240" y="292680"/>
-            <a:ext cx="499320" cy="225000"/>
+            <a:ext cx="498600" cy="224280"/>
           </a:xfrm>
           <a:prstGeom prst="rect">
             <a:avLst/>
@@ -37125,7 +33048,7 @@
         <p:spPr>
           <a:xfrm>
             <a:off x="609480" y="2133720"/>
-            <a:ext cx="2019600" cy="716760"/>
+            <a:ext cx="2018880" cy="716040"/>
           </a:xfrm>
           <a:prstGeom prst="roundRect">
             <a:avLst>
@@ -37177,7 +33100,7 @@
         <p:spPr>
           <a:xfrm>
             <a:off x="704880" y="2228760"/>
-            <a:ext cx="1829160" cy="526320"/>
+            <a:ext cx="1828440" cy="525600"/>
           </a:xfrm>
           <a:prstGeom prst="rect">
             <a:avLst/>
@@ -37302,7 +33225,7 @@
         <p:spPr>
           <a:xfrm>
             <a:off x="2846160" y="2133720"/>
-            <a:ext cx="2019600" cy="716760"/>
+            <a:ext cx="2018880" cy="716040"/>
           </a:xfrm>
           <a:prstGeom prst="roundRect">
             <a:avLst>
@@ -37354,7 +33277,7 @@
         <p:spPr>
           <a:xfrm>
             <a:off x="2941200" y="2228760"/>
-            <a:ext cx="1829160" cy="526320"/>
+            <a:ext cx="1828440" cy="525600"/>
           </a:xfrm>
           <a:prstGeom prst="rect">
             <a:avLst/>
@@ -37483,7 +33406,7 @@
         <p:spPr>
           <a:xfrm>
             <a:off x="5082480" y="2133720"/>
-            <a:ext cx="2019600" cy="716760"/>
+            <a:ext cx="2018880" cy="716040"/>
           </a:xfrm>
           <a:prstGeom prst="roundRect">
             <a:avLst>
@@ -37535,7 +33458,7 @@
         <p:spPr>
           <a:xfrm>
             <a:off x="5177880" y="2228760"/>
-            <a:ext cx="1829160" cy="526320"/>
+            <a:ext cx="1828440" cy="525600"/>
           </a:xfrm>
           <a:prstGeom prst="rect">
             <a:avLst/>
@@ -37660,7 +33583,7 @@
         <p:spPr>
           <a:xfrm>
             <a:off x="7319160" y="2133720"/>
-            <a:ext cx="2019600" cy="716760"/>
+            <a:ext cx="2018880" cy="716040"/>
           </a:xfrm>
           <a:prstGeom prst="roundRect">
             <a:avLst>
@@ -37712,7 +33635,7 @@
         <p:spPr>
           <a:xfrm>
             <a:off x="7414200" y="2228760"/>
-            <a:ext cx="1829160" cy="526320"/>
+            <a:ext cx="1828440" cy="525600"/>
           </a:xfrm>
           <a:prstGeom prst="rect">
             <a:avLst/>
@@ -37782,7 +33705,7 @@
         <p:spPr>
           <a:xfrm>
             <a:off x="9555480" y="2133720"/>
-            <a:ext cx="2019600" cy="716760"/>
+            <a:ext cx="2018880" cy="716040"/>
           </a:xfrm>
           <a:prstGeom prst="roundRect">
             <a:avLst>
@@ -37834,7 +33757,7 @@
         <p:spPr>
           <a:xfrm>
             <a:off x="9650880" y="2228760"/>
-            <a:ext cx="1829160" cy="526320"/>
+            <a:ext cx="1828440" cy="525600"/>
           </a:xfrm>
           <a:prstGeom prst="rect">
             <a:avLst/>
@@ -37941,7 +33864,7 @@
         <p:spPr>
           <a:xfrm>
             <a:off x="723960" y="3390840"/>
-            <a:ext cx="3269520" cy="1612080"/>
+            <a:ext cx="3268800" cy="1611360"/>
           </a:xfrm>
           <a:prstGeom prst="roundRect">
             <a:avLst>
@@ -37993,7 +33916,7 @@
         <p:spPr>
           <a:xfrm>
             <a:off x="723960" y="3390840"/>
-            <a:ext cx="59400" cy="1612080"/>
+            <a:ext cx="58680" cy="1611360"/>
           </a:xfrm>
           <a:prstGeom prst="rect">
             <a:avLst/>
@@ -38043,7 +33966,7 @@
         <p:spPr>
           <a:xfrm>
             <a:off x="952560" y="3543480"/>
-            <a:ext cx="2888280" cy="278640"/>
+            <a:ext cx="2887560" cy="277920"/>
           </a:xfrm>
           <a:prstGeom prst="rect">
             <a:avLst/>
@@ -38130,7 +34053,7 @@
         <p:spPr>
           <a:xfrm>
             <a:off x="952560" y="3886200"/>
-            <a:ext cx="2888280" cy="1002600"/>
+            <a:ext cx="2887560" cy="1001880"/>
           </a:xfrm>
           <a:prstGeom prst="rect">
             <a:avLst/>
@@ -38243,7 +34166,7 @@
         <p:spPr>
           <a:xfrm>
             <a:off x="4457880" y="3390840"/>
-            <a:ext cx="3269520" cy="1612080"/>
+            <a:ext cx="3268800" cy="1611360"/>
           </a:xfrm>
           <a:prstGeom prst="roundRect">
             <a:avLst>
@@ -38295,7 +34218,7 @@
         <p:spPr>
           <a:xfrm>
             <a:off x="4457880" y="3390840"/>
-            <a:ext cx="59400" cy="1612080"/>
+            <a:ext cx="58680" cy="1611360"/>
           </a:xfrm>
           <a:prstGeom prst="rect">
             <a:avLst/>
@@ -38345,7 +34268,7 @@
         <p:spPr>
           <a:xfrm>
             <a:off x="4686480" y="3543480"/>
-            <a:ext cx="2888280" cy="278640"/>
+            <a:ext cx="2887560" cy="277920"/>
           </a:xfrm>
           <a:prstGeom prst="rect">
             <a:avLst/>
@@ -38412,7 +34335,7 @@
         <p:spPr>
           <a:xfrm>
             <a:off x="4686480" y="3886200"/>
-            <a:ext cx="2888280" cy="1002600"/>
+            <a:ext cx="2887560" cy="1001880"/>
           </a:xfrm>
           <a:prstGeom prst="rect">
             <a:avLst/>
@@ -38535,7 +34458,7 @@
         <p:spPr>
           <a:xfrm>
             <a:off x="8191440" y="3390840"/>
-            <a:ext cx="3269520" cy="1612080"/>
+            <a:ext cx="3268800" cy="1611360"/>
           </a:xfrm>
           <a:prstGeom prst="roundRect">
             <a:avLst>
@@ -38587,7 +34510,7 @@
         <p:spPr>
           <a:xfrm>
             <a:off x="8191440" y="3390840"/>
-            <a:ext cx="59400" cy="1612080"/>
+            <a:ext cx="58680" cy="1611360"/>
           </a:xfrm>
           <a:prstGeom prst="rect">
             <a:avLst/>
@@ -38637,7 +34560,7 @@
         <p:spPr>
           <a:xfrm>
             <a:off x="8420040" y="3543480"/>
-            <a:ext cx="2888280" cy="278640"/>
+            <a:ext cx="2887560" cy="277920"/>
           </a:xfrm>
           <a:prstGeom prst="rect">
             <a:avLst/>
@@ -38704,7 +34627,7 @@
         <p:spPr>
           <a:xfrm>
             <a:off x="8420040" y="3886200"/>
-            <a:ext cx="2888280" cy="1002600"/>
+            <a:ext cx="2887560" cy="1001880"/>
           </a:xfrm>
           <a:prstGeom prst="rect">
             <a:avLst/>
@@ -38859,7 +34782,7 @@
         <p:spPr>
           <a:xfrm>
             <a:off x="609480" y="6534000"/>
-            <a:ext cx="10965600" cy="183240"/>
+            <a:ext cx="10964880" cy="182520"/>
           </a:xfrm>
           <a:prstGeom prst="rect">
             <a:avLst/>
@@ -38926,7 +34849,7 @@
         <p:spPr>
           <a:xfrm>
             <a:off x="0" y="0"/>
-            <a:ext cx="12184920" cy="65880"/>
+            <a:ext cx="12184200" cy="65160"/>
           </a:xfrm>
           <a:prstGeom prst="rect">
             <a:avLst/>
@@ -39265,8 +35188,8 @@
         </p:nvSpPr>
         <p:spPr>
           <a:xfrm>
-            <a:off x="696960" y="1463040"/>
-            <a:ext cx="10998720" cy="1504080"/>
+            <a:off x="521640" y="1440000"/>
+            <a:ext cx="10998000" cy="1503360"/>
           </a:xfrm>
           <a:prstGeom prst="rect">
             <a:avLst/>
@@ -39316,7 +35239,7 @@
         <p:spPr>
           <a:xfrm>
             <a:off x="696960" y="1486080"/>
-            <a:ext cx="10998720" cy="498240"/>
+            <a:ext cx="10998000" cy="497520"/>
           </a:xfrm>
           <a:prstGeom prst="rect">
             <a:avLst/>
@@ -39366,7 +35289,7 @@
         <p:spPr>
           <a:xfrm>
             <a:off x="696960" y="1980000"/>
-            <a:ext cx="10998720" cy="4320"/>
+            <a:ext cx="10998000" cy="3600"/>
           </a:xfrm>
           <a:prstGeom prst="rect">
             <a:avLst/>
@@ -39413,7 +35336,7 @@
         <p:spPr>
           <a:xfrm>
             <a:off x="696960" y="2460600"/>
-            <a:ext cx="10998720" cy="4320"/>
+            <a:ext cx="10998000" cy="3600"/>
           </a:xfrm>
           <a:prstGeom prst="rect">
             <a:avLst/>
@@ -39460,7 +35383,7 @@
         <p:spPr>
           <a:xfrm>
             <a:off x="2011680" y="1463040"/>
-            <a:ext cx="4320" cy="1504080"/>
+            <a:ext cx="3600" cy="1503360"/>
           </a:xfrm>
           <a:prstGeom prst="rect">
             <a:avLst/>
@@ -39507,7 +35430,7 @@
         <p:spPr>
           <a:xfrm>
             <a:off x="1098360" y="1613520"/>
-            <a:ext cx="301320" cy="198720"/>
+            <a:ext cx="301320" cy="198000"/>
           </a:xfrm>
           <a:prstGeom prst="rect">
             <a:avLst/>
@@ -39561,7 +35484,7 @@
         <p:spPr>
           <a:xfrm>
             <a:off x="5473800" y="1613520"/>
-            <a:ext cx="650520" cy="198720"/>
+            <a:ext cx="650520" cy="198000"/>
           </a:xfrm>
           <a:prstGeom prst="rect">
             <a:avLst/>
@@ -39615,7 +35538,7 @@
         <p:spPr>
           <a:xfrm>
             <a:off x="1002960" y="2124360"/>
-            <a:ext cx="612360" cy="183240"/>
+            <a:ext cx="612360" cy="182520"/>
           </a:xfrm>
           <a:prstGeom prst="rect">
             <a:avLst/>
@@ -39669,7 +35592,7 @@
         <p:spPr>
           <a:xfrm>
             <a:off x="982440" y="2627280"/>
-            <a:ext cx="653400" cy="183240"/>
+            <a:ext cx="653400" cy="182520"/>
           </a:xfrm>
           <a:prstGeom prst="rect">
             <a:avLst/>
@@ -39723,7 +35646,7 @@
         <p:spPr>
           <a:xfrm>
             <a:off x="594360" y="3780000"/>
-            <a:ext cx="68400" cy="2156040"/>
+            <a:ext cx="67680" cy="2155320"/>
           </a:xfrm>
           <a:prstGeom prst="rect">
             <a:avLst/>
@@ -39770,7 +35693,7 @@
         <p:spPr>
           <a:xfrm>
             <a:off x="2000160" y="3823560"/>
-            <a:ext cx="3145680" cy="351000"/>
+            <a:ext cx="3144960" cy="350280"/>
           </a:xfrm>
           <a:prstGeom prst="rect">
             <a:avLst/>
@@ -39847,7 +35770,7 @@
         <p:spPr>
           <a:xfrm>
             <a:off x="2000160" y="4350960"/>
-            <a:ext cx="3145680" cy="175680"/>
+            <a:ext cx="3144960" cy="174960"/>
           </a:xfrm>
           <a:prstGeom prst="rect">
             <a:avLst/>
@@ -39921,7 +35844,7 @@
         <p:spPr>
           <a:xfrm>
             <a:off x="2000160" y="4790880"/>
-            <a:ext cx="3145680" cy="175680"/>
+            <a:ext cx="3144960" cy="174960"/>
           </a:xfrm>
           <a:prstGeom prst="rect">
             <a:avLst/>
@@ -40005,7 +35928,7 @@
         <p:spPr>
           <a:xfrm>
             <a:off x="1980000" y="5223240"/>
-            <a:ext cx="3145680" cy="175680"/>
+            <a:ext cx="3144960" cy="174960"/>
           </a:xfrm>
           <a:prstGeom prst="rect">
             <a:avLst/>
@@ -40099,7 +36022,7 @@
         <p:spPr>
           <a:xfrm>
             <a:off x="7250040" y="3911040"/>
-            <a:ext cx="3395520" cy="175680"/>
+            <a:ext cx="3394800" cy="174960"/>
           </a:xfrm>
           <a:prstGeom prst="rect">
             <a:avLst/>
@@ -40173,7 +36096,7 @@
         <p:spPr>
           <a:xfrm>
             <a:off x="7250040" y="4350960"/>
-            <a:ext cx="3395520" cy="175680"/>
+            <a:ext cx="3394800" cy="174960"/>
           </a:xfrm>
           <a:prstGeom prst="rect">
             <a:avLst/>
@@ -40257,7 +36180,7 @@
         <p:spPr>
           <a:xfrm>
             <a:off x="7250040" y="4790880"/>
-            <a:ext cx="3395520" cy="175680"/>
+            <a:ext cx="3394800" cy="174960"/>
           </a:xfrm>
           <a:prstGeom prst="rect">
             <a:avLst/>
@@ -40321,7 +36244,7 @@
         <p:spPr>
           <a:xfrm>
             <a:off x="7250040" y="5231160"/>
-            <a:ext cx="3395520" cy="175680"/>
+            <a:ext cx="3394800" cy="174960"/>
           </a:xfrm>
           <a:prstGeom prst="rect">
             <a:avLst/>
@@ -40409,7 +36332,7 @@
         <p:spPr>
           <a:xfrm>
             <a:off x="2180160" y="2070000"/>
-            <a:ext cx="755640" cy="295560"/>
+            <a:ext cx="754920" cy="294840"/>
           </a:xfrm>
           <a:prstGeom prst="rect">
             <a:avLst/>
@@ -40432,7 +36355,7 @@
         <p:spPr>
           <a:xfrm>
             <a:off x="2234160" y="2139120"/>
-            <a:ext cx="157680" cy="157680"/>
+            <a:ext cx="156960" cy="156960"/>
           </a:xfrm>
           <a:prstGeom prst="rect">
             <a:avLst/>
@@ -40451,7 +36374,7 @@
         <p:spPr>
           <a:xfrm>
             <a:off x="2504160" y="2142360"/>
-            <a:ext cx="325800" cy="153000"/>
+            <a:ext cx="325800" cy="152280"/>
           </a:xfrm>
           <a:prstGeom prst="rect">
             <a:avLst/>
@@ -40509,7 +36432,7 @@
         <p:spPr>
           <a:xfrm>
             <a:off x="3049920" y="2070000"/>
-            <a:ext cx="1145520" cy="295560"/>
+            <a:ext cx="1144800" cy="294840"/>
           </a:xfrm>
           <a:prstGeom prst="rect">
             <a:avLst/>
@@ -40532,7 +36455,7 @@
         <p:spPr>
           <a:xfrm>
             <a:off x="3103920" y="2139120"/>
-            <a:ext cx="157680" cy="157680"/>
+            <a:ext cx="156960" cy="156960"/>
           </a:xfrm>
           <a:prstGeom prst="rect">
             <a:avLst/>
@@ -40551,7 +36474,7 @@
         <p:spPr>
           <a:xfrm>
             <a:off x="3388680" y="2142360"/>
-            <a:ext cx="686880" cy="153000"/>
+            <a:ext cx="686880" cy="152280"/>
           </a:xfrm>
           <a:prstGeom prst="rect">
             <a:avLst/>
@@ -40609,7 +36532,7 @@
         <p:spPr>
           <a:xfrm>
             <a:off x="4309920" y="2070000"/>
-            <a:ext cx="815760" cy="295560"/>
+            <a:ext cx="815040" cy="294840"/>
           </a:xfrm>
           <a:prstGeom prst="rect">
             <a:avLst/>
@@ -40632,7 +36555,7 @@
         <p:spPr>
           <a:xfrm>
             <a:off x="4363920" y="2139120"/>
-            <a:ext cx="157680" cy="157680"/>
+            <a:ext cx="156960" cy="156960"/>
           </a:xfrm>
           <a:prstGeom prst="rect">
             <a:avLst/>
@@ -40651,7 +36574,7 @@
         <p:spPr>
           <a:xfrm>
             <a:off x="4630680" y="2142360"/>
-            <a:ext cx="392760" cy="153000"/>
+            <a:ext cx="392760" cy="152280"/>
           </a:xfrm>
           <a:prstGeom prst="rect">
             <a:avLst/>
@@ -40709,7 +36632,7 @@
         <p:spPr>
           <a:xfrm>
             <a:off x="5240160" y="2070000"/>
-            <a:ext cx="925560" cy="295560"/>
+            <a:ext cx="924840" cy="294840"/>
           </a:xfrm>
           <a:prstGeom prst="rect">
             <a:avLst/>
@@ -40732,7 +36655,7 @@
         <p:spPr>
           <a:xfrm>
             <a:off x="5294160" y="2139120"/>
-            <a:ext cx="157680" cy="157680"/>
+            <a:ext cx="156960" cy="156960"/>
           </a:xfrm>
           <a:prstGeom prst="rect">
             <a:avLst/>
@@ -40751,7 +36674,7 @@
         <p:spPr>
           <a:xfrm>
             <a:off x="5560920" y="2142360"/>
-            <a:ext cx="502560" cy="153000"/>
+            <a:ext cx="502560" cy="152280"/>
           </a:xfrm>
           <a:prstGeom prst="rect">
             <a:avLst/>
@@ -40809,7 +36732,7 @@
         <p:spPr>
           <a:xfrm>
             <a:off x="6279840" y="2070000"/>
-            <a:ext cx="1215720" cy="295560"/>
+            <a:ext cx="1215000" cy="294840"/>
           </a:xfrm>
           <a:prstGeom prst="rect">
             <a:avLst/>
@@ -40832,7 +36755,7 @@
         <p:spPr>
           <a:xfrm>
             <a:off x="6333840" y="2139120"/>
-            <a:ext cx="157680" cy="157680"/>
+            <a:ext cx="156960" cy="156960"/>
           </a:xfrm>
           <a:prstGeom prst="rect">
             <a:avLst/>
@@ -40851,7 +36774,7 @@
         <p:spPr>
           <a:xfrm>
             <a:off x="6619320" y="2142360"/>
-            <a:ext cx="755640" cy="153000"/>
+            <a:ext cx="755640" cy="152280"/>
           </a:xfrm>
           <a:prstGeom prst="rect">
             <a:avLst/>
@@ -40909,7 +36832,7 @@
         <p:spPr>
           <a:xfrm>
             <a:off x="2180160" y="2570040"/>
-            <a:ext cx="815760" cy="295560"/>
+            <a:ext cx="815040" cy="294840"/>
           </a:xfrm>
           <a:prstGeom prst="rect">
             <a:avLst/>
@@ -40932,7 +36855,7 @@
         <p:spPr>
           <a:xfrm>
             <a:off x="2234160" y="2639160"/>
-            <a:ext cx="157680" cy="157680"/>
+            <a:ext cx="156960" cy="156960"/>
           </a:xfrm>
           <a:prstGeom prst="rect">
             <a:avLst/>
@@ -40951,7 +36874,7 @@
         <p:spPr>
           <a:xfrm>
             <a:off x="2501280" y="2642400"/>
-            <a:ext cx="391320" cy="153000"/>
+            <a:ext cx="391320" cy="152280"/>
           </a:xfrm>
           <a:prstGeom prst="rect">
             <a:avLst/>
@@ -41009,7 +36932,7 @@
         <p:spPr>
           <a:xfrm>
             <a:off x="3110040" y="2570040"/>
-            <a:ext cx="695520" cy="295560"/>
+            <a:ext cx="694800" cy="294840"/>
           </a:xfrm>
           <a:prstGeom prst="rect">
             <a:avLst/>
@@ -41032,7 +36955,7 @@
         <p:spPr>
           <a:xfrm>
             <a:off x="3164040" y="2639160"/>
-            <a:ext cx="157680" cy="157680"/>
+            <a:ext cx="156960" cy="156960"/>
           </a:xfrm>
           <a:prstGeom prst="rect">
             <a:avLst/>
@@ -41051,7 +36974,7 @@
         <p:spPr>
           <a:xfrm>
             <a:off x="3430080" y="2642400"/>
-            <a:ext cx="273960" cy="153000"/>
+            <a:ext cx="273960" cy="152280"/>
           </a:xfrm>
           <a:prstGeom prst="rect">
             <a:avLst/>
@@ -41109,7 +37032,7 @@
         <p:spPr>
           <a:xfrm>
             <a:off x="3920040" y="2570040"/>
-            <a:ext cx="1245600" cy="295560"/>
+            <a:ext cx="1244880" cy="294840"/>
           </a:xfrm>
           <a:prstGeom prst="rect">
             <a:avLst/>
@@ -41132,7 +37055,7 @@
         <p:spPr>
           <a:xfrm>
             <a:off x="3974040" y="2639160"/>
-            <a:ext cx="157680" cy="157680"/>
+            <a:ext cx="156960" cy="156960"/>
           </a:xfrm>
           <a:prstGeom prst="rect">
             <a:avLst/>
@@ -41151,7 +37074,7 @@
         <p:spPr>
           <a:xfrm>
             <a:off x="4259880" y="2642400"/>
-            <a:ext cx="784440" cy="153000"/>
+            <a:ext cx="784440" cy="152280"/>
           </a:xfrm>
           <a:prstGeom prst="rect">
             <a:avLst/>
@@ -41263,7 +37186,7 @@
         <p:spPr>
           <a:xfrm>
             <a:off x="820080" y="3850200"/>
-            <a:ext cx="845640" cy="270720"/>
+            <a:ext cx="844920" cy="270000"/>
           </a:xfrm>
           <a:prstGeom prst="rect">
             <a:avLst/>
@@ -41286,7 +37209,7 @@
         <p:spPr>
           <a:xfrm>
             <a:off x="869400" y="3913560"/>
-            <a:ext cx="144360" cy="144360"/>
+            <a:ext cx="143640" cy="143640"/>
           </a:xfrm>
           <a:prstGeom prst="rect">
             <a:avLst/>
@@ -41305,7 +37228,7 @@
         <p:spPr>
           <a:xfrm>
             <a:off x="1180080" y="3909960"/>
-            <a:ext cx="325800" cy="153000"/>
+            <a:ext cx="325800" cy="152280"/>
           </a:xfrm>
           <a:prstGeom prst="rect">
             <a:avLst/>
@@ -41363,7 +37286,7 @@
         <p:spPr>
           <a:xfrm>
             <a:off x="820080" y="4290120"/>
-            <a:ext cx="1045800" cy="270720"/>
+            <a:ext cx="1045080" cy="270000"/>
           </a:xfrm>
           <a:prstGeom prst="rect">
             <a:avLst/>
@@ -41386,7 +37309,7 @@
         <p:spPr>
           <a:xfrm>
             <a:off x="869400" y="4353480"/>
-            <a:ext cx="144360" cy="144360"/>
+            <a:ext cx="143640" cy="143640"/>
           </a:xfrm>
           <a:prstGeom prst="rect">
             <a:avLst/>
@@ -41405,7 +37328,7 @@
         <p:spPr>
           <a:xfrm>
             <a:off x="1099440" y="4349880"/>
-            <a:ext cx="686880" cy="153000"/>
+            <a:ext cx="686880" cy="152280"/>
           </a:xfrm>
           <a:prstGeom prst="rect">
             <a:avLst/>
@@ -41463,7 +37386,7 @@
         <p:spPr>
           <a:xfrm>
             <a:off x="820080" y="4730040"/>
-            <a:ext cx="845640" cy="270720"/>
+            <a:ext cx="844920" cy="270000"/>
           </a:xfrm>
           <a:prstGeom prst="rect">
             <a:avLst/>
@@ -41486,7 +37409,7 @@
         <p:spPr>
           <a:xfrm>
             <a:off x="869400" y="4793400"/>
-            <a:ext cx="144360" cy="144360"/>
+            <a:ext cx="143640" cy="143640"/>
           </a:xfrm>
           <a:prstGeom prst="rect">
             <a:avLst/>
@@ -41505,7 +37428,7 @@
         <p:spPr>
           <a:xfrm>
             <a:off x="1146600" y="4789800"/>
-            <a:ext cx="392760" cy="153000"/>
+            <a:ext cx="392760" cy="152280"/>
           </a:xfrm>
           <a:prstGeom prst="rect">
             <a:avLst/>
@@ -41563,7 +37486,7 @@
         <p:spPr>
           <a:xfrm>
             <a:off x="820080" y="5170320"/>
-            <a:ext cx="845640" cy="270720"/>
+            <a:ext cx="844920" cy="270000"/>
           </a:xfrm>
           <a:prstGeom prst="rect">
             <a:avLst/>
@@ -41586,7 +37509,7 @@
         <p:spPr>
           <a:xfrm>
             <a:off x="869400" y="5233320"/>
-            <a:ext cx="144360" cy="144360"/>
+            <a:ext cx="143640" cy="143640"/>
           </a:xfrm>
           <a:prstGeom prst="rect">
             <a:avLst/>
@@ -41605,7 +37528,7 @@
         <p:spPr>
           <a:xfrm>
             <a:off x="1091520" y="5230080"/>
-            <a:ext cx="502560" cy="153000"/>
+            <a:ext cx="502560" cy="152280"/>
           </a:xfrm>
           <a:prstGeom prst="rect">
             <a:avLst/>
@@ -41663,7 +37586,7 @@
         <p:spPr>
           <a:xfrm>
             <a:off x="5950080" y="3850200"/>
-            <a:ext cx="1145520" cy="270720"/>
+            <a:ext cx="1144800" cy="270000"/>
           </a:xfrm>
           <a:prstGeom prst="rect">
             <a:avLst/>
@@ -41686,7 +37609,7 @@
         <p:spPr>
           <a:xfrm>
             <a:off x="5999400" y="3913560"/>
-            <a:ext cx="144360" cy="144360"/>
+            <a:ext cx="143640" cy="143640"/>
           </a:xfrm>
           <a:prstGeom prst="rect">
             <a:avLst/>
@@ -41705,7 +37628,7 @@
         <p:spPr>
           <a:xfrm>
             <a:off x="6245280" y="3909960"/>
-            <a:ext cx="755640" cy="153000"/>
+            <a:ext cx="755640" cy="152280"/>
           </a:xfrm>
           <a:prstGeom prst="rect">
             <a:avLst/>
@@ -41763,7 +37686,7 @@
         <p:spPr>
           <a:xfrm>
             <a:off x="5950080" y="4290120"/>
-            <a:ext cx="845640" cy="270720"/>
+            <a:ext cx="844920" cy="270000"/>
           </a:xfrm>
           <a:prstGeom prst="rect">
             <a:avLst/>
@@ -41786,7 +37709,7 @@
         <p:spPr>
           <a:xfrm>
             <a:off x="5999400" y="4353480"/>
-            <a:ext cx="144360" cy="144360"/>
+            <a:ext cx="143640" cy="143640"/>
           </a:xfrm>
           <a:prstGeom prst="rect">
             <a:avLst/>
@@ -41805,7 +37728,7 @@
         <p:spPr>
           <a:xfrm>
             <a:off x="6277320" y="4349880"/>
-            <a:ext cx="391320" cy="153000"/>
+            <a:ext cx="391320" cy="152280"/>
           </a:xfrm>
           <a:prstGeom prst="rect">
             <a:avLst/>
@@ -41863,7 +37786,7 @@
         <p:spPr>
           <a:xfrm>
             <a:off x="5950080" y="4730040"/>
-            <a:ext cx="845640" cy="270720"/>
+            <a:ext cx="844920" cy="270000"/>
           </a:xfrm>
           <a:prstGeom prst="rect">
             <a:avLst/>
@@ -41886,7 +37809,7 @@
         <p:spPr>
           <a:xfrm>
             <a:off x="5999400" y="4793400"/>
-            <a:ext cx="144360" cy="144360"/>
+            <a:ext cx="143640" cy="143640"/>
           </a:xfrm>
           <a:prstGeom prst="rect">
             <a:avLst/>
@@ -41905,7 +37828,7 @@
         <p:spPr>
           <a:xfrm>
             <a:off x="6336000" y="4789800"/>
-            <a:ext cx="273960" cy="153000"/>
+            <a:ext cx="273960" cy="152280"/>
           </a:xfrm>
           <a:prstGeom prst="rect">
             <a:avLst/>
@@ -41963,7 +37886,7 @@
         <p:spPr>
           <a:xfrm>
             <a:off x="5950080" y="5170320"/>
-            <a:ext cx="1145520" cy="270720"/>
+            <a:ext cx="1144800" cy="270000"/>
           </a:xfrm>
           <a:prstGeom prst="rect">
             <a:avLst/>
@@ -41986,7 +37909,7 @@
         <p:spPr>
           <a:xfrm>
             <a:off x="5999400" y="5233320"/>
-            <a:ext cx="144360" cy="144360"/>
+            <a:ext cx="143640" cy="143640"/>
           </a:xfrm>
           <a:prstGeom prst="rect">
             <a:avLst/>
@@ -42005,7 +37928,7 @@
         <p:spPr>
           <a:xfrm>
             <a:off x="6230880" y="5230080"/>
-            <a:ext cx="784440" cy="153000"/>
+            <a:ext cx="784440" cy="152280"/>
           </a:xfrm>
           <a:prstGeom prst="rect">
             <a:avLst/>
@@ -42063,7 +37986,7 @@
         <p:spPr>
           <a:xfrm>
             <a:off x="820080" y="5654520"/>
-            <a:ext cx="797400" cy="281520"/>
+            <a:ext cx="796680" cy="280800"/>
           </a:xfrm>
           <a:prstGeom prst="rect">
             <a:avLst/>
@@ -42086,7 +38009,7 @@
         <p:spPr>
           <a:xfrm>
             <a:off x="900000" y="5760000"/>
-            <a:ext cx="106200" cy="128880"/>
+            <a:ext cx="105480" cy="128160"/>
           </a:xfrm>
           <a:prstGeom prst="rect">
             <a:avLst/>
@@ -42105,7 +38028,7 @@
         <p:spPr>
           <a:xfrm>
             <a:off x="1010160" y="5678280"/>
-            <a:ext cx="498240" cy="257760"/>
+            <a:ext cx="497520" cy="257040"/>
           </a:xfrm>
           <a:prstGeom prst="rect">
             <a:avLst/>
@@ -42159,7 +38082,7 @@
         <p:spPr>
           <a:xfrm>
             <a:off x="1980000" y="5718240"/>
-            <a:ext cx="3416040" cy="175680"/>
+            <a:ext cx="3415320" cy="174960"/>
           </a:xfrm>
           <a:prstGeom prst="rect">
             <a:avLst/>
@@ -42243,7 +38166,7 @@
         <p:spPr>
           <a:xfrm>
             <a:off x="5760000" y="3780000"/>
-            <a:ext cx="68400" cy="2156040"/>
+            <a:ext cx="67680" cy="2155320"/>
           </a:xfrm>
           <a:prstGeom prst="rect">
             <a:avLst/>
@@ -42290,7 +38213,7 @@
         <p:spPr>
           <a:xfrm>
             <a:off x="0" y="0"/>
-            <a:ext cx="12184920" cy="65880"/>
+            <a:ext cx="12184200" cy="65160"/>
           </a:xfrm>
           <a:prstGeom prst="rect">
             <a:avLst/>
@@ -42367,7 +38290,7 @@
         <p:spPr>
           <a:xfrm>
             <a:off x="0" y="0"/>
-            <a:ext cx="12188520" cy="51120"/>
+            <a:ext cx="12187800" cy="50400"/>
           </a:xfrm>
           <a:prstGeom prst="rect">
             <a:avLst/>
@@ -42414,7 +38337,7 @@
         <p:spPr>
           <a:xfrm>
             <a:off x="685800" y="333000"/>
-            <a:ext cx="1276560" cy="165600"/>
+            <a:ext cx="1275840" cy="165600"/>
           </a:xfrm>
           <a:prstGeom prst="rect">
             <a:avLst/>
@@ -42522,7 +38445,7 @@
         <p:spPr>
           <a:xfrm>
             <a:off x="685800" y="617400"/>
-            <a:ext cx="5299920" cy="493200"/>
+            <a:ext cx="5299200" cy="493200"/>
           </a:xfrm>
           <a:prstGeom prst="rect">
             <a:avLst/>
@@ -42576,7 +38499,7 @@
         <p:spPr>
           <a:xfrm>
             <a:off x="685800" y="1104840"/>
-            <a:ext cx="8957520" cy="249480"/>
+            <a:ext cx="8956800" cy="249480"/>
           </a:xfrm>
           <a:prstGeom prst="rect">
             <a:avLst/>
@@ -42710,7 +38633,7 @@
         <p:spPr>
           <a:xfrm>
             <a:off x="502920" y="1554480"/>
-            <a:ext cx="5619960" cy="4476960"/>
+            <a:ext cx="5619240" cy="4476240"/>
           </a:xfrm>
           <a:prstGeom prst="roundRect">
             <a:avLst>
@@ -42762,7 +38685,7 @@
         <p:spPr>
           <a:xfrm>
             <a:off x="713160" y="1714680"/>
-            <a:ext cx="2008080" cy="264600"/>
+            <a:ext cx="2007360" cy="264600"/>
           </a:xfrm>
           <a:prstGeom prst="rect">
             <a:avLst/>
@@ -42816,7 +38739,7 @@
         <p:spPr>
           <a:xfrm>
             <a:off x="4160520" y="1761840"/>
-            <a:ext cx="1642320" cy="169920"/>
+            <a:ext cx="1641600" cy="169920"/>
           </a:xfrm>
           <a:prstGeom prst="rect">
             <a:avLst/>
@@ -42870,7 +38793,7 @@
         <p:spPr>
           <a:xfrm>
             <a:off x="6309360" y="1554480"/>
-            <a:ext cx="5345640" cy="4476960"/>
+            <a:ext cx="5344920" cy="4476240"/>
           </a:xfrm>
           <a:prstGeom prst="roundRect">
             <a:avLst>
@@ -42922,7 +38845,7 @@
         <p:spPr>
           <a:xfrm>
             <a:off x="6519600" y="1714680"/>
-            <a:ext cx="2922480" cy="262080"/>
+            <a:ext cx="2921760" cy="261360"/>
           </a:xfrm>
           <a:prstGeom prst="rect">
             <a:avLst/>
@@ -42967,7 +38890,7 @@
         <p:spPr>
           <a:xfrm>
             <a:off x="6519600" y="2084760"/>
-            <a:ext cx="4788000" cy="471960"/>
+            <a:ext cx="4787280" cy="471240"/>
           </a:xfrm>
           <a:prstGeom prst="roundRect">
             <a:avLst>
@@ -43019,7 +38942,7 @@
         <p:spPr>
           <a:xfrm>
             <a:off x="6675120" y="2160360"/>
-            <a:ext cx="1505160" cy="195840"/>
+            <a:ext cx="1504440" cy="195840"/>
           </a:xfrm>
           <a:prstGeom prst="rect">
             <a:avLst/>
@@ -43073,7 +38996,7 @@
         <p:spPr>
           <a:xfrm>
             <a:off x="8247960" y="2166480"/>
-            <a:ext cx="2876760" cy="174600"/>
+            <a:ext cx="2876040" cy="174600"/>
           </a:xfrm>
           <a:prstGeom prst="rect">
             <a:avLst/>
@@ -43167,7 +39090,7 @@
         <p:spPr>
           <a:xfrm>
             <a:off x="6519600" y="2706480"/>
-            <a:ext cx="4788000" cy="471960"/>
+            <a:ext cx="4787280" cy="471240"/>
           </a:xfrm>
           <a:prstGeom prst="roundRect">
             <a:avLst>
@@ -43219,7 +39142,7 @@
         <p:spPr>
           <a:xfrm>
             <a:off x="6675120" y="2782440"/>
-            <a:ext cx="1505160" cy="195840"/>
+            <a:ext cx="1504440" cy="195840"/>
           </a:xfrm>
           <a:prstGeom prst="rect">
             <a:avLst/>
@@ -43273,7 +39196,7 @@
         <p:spPr>
           <a:xfrm>
             <a:off x="8247960" y="2719080"/>
-            <a:ext cx="2876760" cy="313200"/>
+            <a:ext cx="2876040" cy="313200"/>
           </a:xfrm>
           <a:prstGeom prst="rect">
             <a:avLst/>
@@ -43337,7 +39260,7 @@
         <p:spPr>
           <a:xfrm>
             <a:off x="6519600" y="3328560"/>
-            <a:ext cx="4788000" cy="471960"/>
+            <a:ext cx="4787280" cy="471240"/>
           </a:xfrm>
           <a:prstGeom prst="roundRect">
             <a:avLst>
@@ -43389,7 +39312,7 @@
         <p:spPr>
           <a:xfrm>
             <a:off x="6675120" y="3404160"/>
-            <a:ext cx="1505160" cy="195840"/>
+            <a:ext cx="1504440" cy="195840"/>
           </a:xfrm>
           <a:prstGeom prst="rect">
             <a:avLst/>
@@ -43443,7 +39366,7 @@
         <p:spPr>
           <a:xfrm>
             <a:off x="8247960" y="3340800"/>
-            <a:ext cx="2876760" cy="313200"/>
+            <a:ext cx="2876040" cy="313200"/>
           </a:xfrm>
           <a:prstGeom prst="rect">
             <a:avLst/>
@@ -43547,7 +39470,7 @@
         <p:spPr>
           <a:xfrm>
             <a:off x="6519600" y="3950280"/>
-            <a:ext cx="4788000" cy="471960"/>
+            <a:ext cx="4787280" cy="471240"/>
           </a:xfrm>
           <a:prstGeom prst="roundRect">
             <a:avLst>
@@ -43599,7 +39522,7 @@
         <p:spPr>
           <a:xfrm>
             <a:off x="6675120" y="4025880"/>
-            <a:ext cx="1505160" cy="195840"/>
+            <a:ext cx="1504440" cy="195840"/>
           </a:xfrm>
           <a:prstGeom prst="rect">
             <a:avLst/>
@@ -43653,7 +39576,7 @@
         <p:spPr>
           <a:xfrm>
             <a:off x="8247960" y="3962520"/>
-            <a:ext cx="2876760" cy="313200"/>
+            <a:ext cx="2876040" cy="313200"/>
           </a:xfrm>
           <a:prstGeom prst="rect">
             <a:avLst/>
@@ -43757,7 +39680,7 @@
         <p:spPr>
           <a:xfrm>
             <a:off x="6519600" y="4660560"/>
-            <a:ext cx="1276560" cy="234360"/>
+            <a:ext cx="1275840" cy="234360"/>
           </a:xfrm>
           <a:prstGeom prst="rect">
             <a:avLst/>
@@ -43811,7 +39734,7 @@
         <p:spPr>
           <a:xfrm>
             <a:off x="6519600" y="5010840"/>
-            <a:ext cx="837720" cy="407880"/>
+            <a:ext cx="837000" cy="407160"/>
           </a:xfrm>
           <a:prstGeom prst="roundRect">
             <a:avLst>
@@ -43863,7 +39786,7 @@
         <p:spPr>
           <a:xfrm>
             <a:off x="6519600" y="5132160"/>
-            <a:ext cx="837720" cy="168480"/>
+            <a:ext cx="837000" cy="168480"/>
           </a:xfrm>
           <a:prstGeom prst="rect">
             <a:avLst/>
@@ -43917,7 +39840,7 @@
         <p:spPr>
           <a:xfrm>
             <a:off x="7434000" y="5029200"/>
-            <a:ext cx="160920" cy="218880"/>
+            <a:ext cx="160200" cy="218880"/>
           </a:xfrm>
           <a:prstGeom prst="rect">
             <a:avLst/>
@@ -43971,7 +39894,7 @@
         <p:spPr>
           <a:xfrm>
             <a:off x="7671960" y="5010840"/>
-            <a:ext cx="1047960" cy="407880"/>
+            <a:ext cx="1047240" cy="407160"/>
           </a:xfrm>
           <a:prstGeom prst="roundRect">
             <a:avLst>
@@ -44023,7 +39946,7 @@
         <p:spPr>
           <a:xfrm>
             <a:off x="7671960" y="5132160"/>
-            <a:ext cx="1047960" cy="168480"/>
+            <a:ext cx="1047240" cy="168480"/>
           </a:xfrm>
           <a:prstGeom prst="rect">
             <a:avLst/>
@@ -44077,7 +40000,7 @@
         <p:spPr>
           <a:xfrm>
             <a:off x="8796600" y="5029200"/>
-            <a:ext cx="160920" cy="218880"/>
+            <a:ext cx="160200" cy="218880"/>
           </a:xfrm>
           <a:prstGeom prst="rect">
             <a:avLst/>
@@ -44131,7 +40054,7 @@
         <p:spPr>
           <a:xfrm>
             <a:off x="9034200" y="5010840"/>
-            <a:ext cx="654840" cy="407880"/>
+            <a:ext cx="654120" cy="407160"/>
           </a:xfrm>
           <a:prstGeom prst="roundRect">
             <a:avLst>
@@ -44183,7 +40106,7 @@
         <p:spPr>
           <a:xfrm>
             <a:off x="9034200" y="5132160"/>
-            <a:ext cx="654840" cy="168480"/>
+            <a:ext cx="654120" cy="168480"/>
           </a:xfrm>
           <a:prstGeom prst="rect">
             <a:avLst/>
@@ -44237,7 +40160,7 @@
         <p:spPr>
           <a:xfrm>
             <a:off x="9765720" y="5029200"/>
-            <a:ext cx="160920" cy="218880"/>
+            <a:ext cx="160200" cy="218880"/>
           </a:xfrm>
           <a:prstGeom prst="rect">
             <a:avLst/>
@@ -44291,7 +40214,7 @@
         <p:spPr>
           <a:xfrm>
             <a:off x="10003680" y="5010840"/>
-            <a:ext cx="499320" cy="407880"/>
+            <a:ext cx="498600" cy="407160"/>
           </a:xfrm>
           <a:prstGeom prst="roundRect">
             <a:avLst>
@@ -44343,7 +40266,7 @@
         <p:spPr>
           <a:xfrm>
             <a:off x="10003680" y="5132160"/>
-            <a:ext cx="499320" cy="168480"/>
+            <a:ext cx="498600" cy="168480"/>
           </a:xfrm>
           <a:prstGeom prst="rect">
             <a:avLst/>
@@ -44397,7 +40320,7 @@
         <p:spPr>
           <a:xfrm>
             <a:off x="10579680" y="5029200"/>
-            <a:ext cx="160920" cy="218880"/>
+            <a:ext cx="160200" cy="218880"/>
           </a:xfrm>
           <a:prstGeom prst="rect">
             <a:avLst/>
@@ -44451,7 +40374,7 @@
         <p:spPr>
           <a:xfrm>
             <a:off x="10817280" y="5010840"/>
-            <a:ext cx="654840" cy="407880"/>
+            <a:ext cx="654120" cy="407160"/>
           </a:xfrm>
           <a:prstGeom prst="roundRect">
             <a:avLst>
@@ -44503,7 +40426,7 @@
         <p:spPr>
           <a:xfrm>
             <a:off x="10817280" y="5132160"/>
-            <a:ext cx="654840" cy="168480"/>
+            <a:ext cx="654120" cy="168480"/>
           </a:xfrm>
           <a:prstGeom prst="rect">
             <a:avLst/>
@@ -44557,7 +40480,7 @@
         <p:spPr>
           <a:xfrm>
             <a:off x="502920" y="6163200"/>
-            <a:ext cx="11152080" cy="380520"/>
+            <a:ext cx="11151360" cy="379800"/>
           </a:xfrm>
           <a:prstGeom prst="roundRect">
             <a:avLst>
@@ -44609,7 +40532,7 @@
         <p:spPr>
           <a:xfrm>
             <a:off x="640080" y="6240240"/>
-            <a:ext cx="10877760" cy="211320"/>
+            <a:ext cx="10877040" cy="211320"/>
           </a:xfrm>
           <a:prstGeom prst="rect">
             <a:avLst/>
@@ -44777,7 +40700,7 @@
         <p:spPr>
           <a:xfrm>
             <a:off x="900000" y="2160000"/>
-            <a:ext cx="4857120" cy="3258720"/>
+            <a:ext cx="4856400" cy="3258000"/>
           </a:xfrm>
           <a:prstGeom prst="rect">
             <a:avLst/>
@@ -44833,7 +40756,7 @@
         <p:spPr>
           <a:xfrm>
             <a:off x="0" y="0"/>
-            <a:ext cx="12184920" cy="65880"/>
+            <a:ext cx="12184200" cy="65160"/>
           </a:xfrm>
           <a:prstGeom prst="rect">
             <a:avLst/>
@@ -45164,8 +41087,8 @@
         </p:nvSpPr>
         <p:spPr>
           <a:xfrm>
-            <a:off x="777240" y="5879520"/>
-            <a:ext cx="3418920" cy="285480"/>
+            <a:off x="777240" y="5940000"/>
+            <a:ext cx="3418200" cy="284760"/>
           </a:xfrm>
           <a:prstGeom prst="roundRect">
             <a:avLst>
@@ -45238,8 +41161,8 @@
         </p:nvSpPr>
         <p:spPr>
           <a:xfrm>
-            <a:off x="4367880" y="5879520"/>
-            <a:ext cx="3418920" cy="285480"/>
+            <a:off x="4367880" y="5940000"/>
+            <a:ext cx="3418200" cy="284760"/>
           </a:xfrm>
           <a:prstGeom prst="roundRect">
             <a:avLst>
@@ -45322,8 +41245,8 @@
         </p:nvSpPr>
         <p:spPr>
           <a:xfrm>
-            <a:off x="7958160" y="5879520"/>
-            <a:ext cx="3418920" cy="285480"/>
+            <a:off x="7921440" y="5940000"/>
+            <a:ext cx="3418200" cy="284760"/>
           </a:xfrm>
           <a:prstGeom prst="roundRect">
             <a:avLst>
@@ -45417,7 +41340,7 @@
         <p:spPr>
           <a:xfrm>
             <a:off x="457200" y="6565320"/>
-            <a:ext cx="11239920" cy="149040"/>
+            <a:ext cx="11239200" cy="149040"/>
           </a:xfrm>
           <a:prstGeom prst="rect">
             <a:avLst/>
@@ -45487,19 +41410,18 @@
       </p:sp>
       <p:pic>
         <p:nvPicPr>
-          <p:cNvPr id="204" name="Picture 1" descr="overview.png"/>
+          <p:cNvPr id="204" name="" descr=""/>
           <p:cNvPicPr/>
           <p:nvPr/>
         </p:nvPicPr>
         <p:blipFill>
           <a:blip r:embed="rId1"/>
-          <a:srcRect l="3293" t="0" r="0" b="0"/>
           <a:stretch/>
         </p:blipFill>
         <p:spPr>
           <a:xfrm>
-            <a:off x="1080000" y="1170360"/>
-            <a:ext cx="10021320" cy="4519080"/>
+            <a:off x="360000" y="1080000"/>
+            <a:ext cx="11291400" cy="4763880"/>
           </a:xfrm>
           <a:prstGeom prst="rect">
             <a:avLst/>
@@ -45555,7 +41477,7 @@
         <p:spPr>
           <a:xfrm>
             <a:off x="0" y="0"/>
-            <a:ext cx="12186360" cy="67680"/>
+            <a:ext cx="12185640" cy="66960"/>
           </a:xfrm>
           <a:prstGeom prst="rect">
             <a:avLst/>
@@ -45602,7 +41524,7 @@
         <p:spPr>
           <a:xfrm>
             <a:off x="685800" y="255960"/>
-            <a:ext cx="1823400" cy="219240"/>
+            <a:ext cx="1822680" cy="219240"/>
           </a:xfrm>
           <a:prstGeom prst="rect">
             <a:avLst/>
@@ -45710,7 +41632,7 @@
         <p:spPr>
           <a:xfrm>
             <a:off x="685800" y="548640"/>
-            <a:ext cx="10053000" cy="462960"/>
+            <a:ext cx="10052280" cy="462960"/>
           </a:xfrm>
           <a:prstGeom prst="rect">
             <a:avLst/>
@@ -45774,7 +41696,7 @@
         <p:spPr>
           <a:xfrm>
             <a:off x="685800" y="1078920"/>
-            <a:ext cx="10784520" cy="288000"/>
+            <a:ext cx="10783800" cy="288000"/>
           </a:xfrm>
           <a:prstGeom prst="rect">
             <a:avLst/>
@@ -45938,7 +41860,7 @@
         <p:spPr>
           <a:xfrm>
             <a:off x="713160" y="1800000"/>
-            <a:ext cx="58680" cy="1074960"/>
+            <a:ext cx="57960" cy="1074240"/>
           </a:xfrm>
           <a:prstGeom prst="rect">
             <a:avLst/>
@@ -45985,7 +41907,7 @@
         <p:spPr>
           <a:xfrm>
             <a:off x="941760" y="1901880"/>
-            <a:ext cx="3835080" cy="310680"/>
+            <a:ext cx="3834360" cy="310680"/>
           </a:xfrm>
           <a:prstGeom prst="rect">
             <a:avLst/>
@@ -46049,7 +41971,7 @@
         <p:spPr>
           <a:xfrm>
             <a:off x="941760" y="2340720"/>
-            <a:ext cx="3835080" cy="418680"/>
+            <a:ext cx="3834360" cy="418680"/>
           </a:xfrm>
           <a:prstGeom prst="rect">
             <a:avLst/>
@@ -46156,7 +42078,7 @@
         <p:spPr>
           <a:xfrm>
             <a:off x="713160" y="3182400"/>
-            <a:ext cx="58680" cy="1058040"/>
+            <a:ext cx="57960" cy="1057320"/>
           </a:xfrm>
           <a:prstGeom prst="rect">
             <a:avLst/>
@@ -46203,7 +42125,7 @@
         <p:spPr>
           <a:xfrm>
             <a:off x="839880" y="3240000"/>
-            <a:ext cx="3835080" cy="310680"/>
+            <a:ext cx="3834360" cy="310680"/>
           </a:xfrm>
           <a:prstGeom prst="rect">
             <a:avLst/>
@@ -46267,7 +42189,7 @@
         <p:spPr>
           <a:xfrm>
             <a:off x="900000" y="3721320"/>
-            <a:ext cx="3835080" cy="418680"/>
+            <a:ext cx="3834360" cy="418680"/>
           </a:xfrm>
           <a:prstGeom prst="rect">
             <a:avLst/>
@@ -46384,7 +42306,7 @@
         <p:spPr>
           <a:xfrm>
             <a:off x="713160" y="4680000"/>
-            <a:ext cx="58680" cy="1254960"/>
+            <a:ext cx="57960" cy="1254240"/>
           </a:xfrm>
           <a:prstGeom prst="rect">
             <a:avLst/>
@@ -46431,7 +42353,7 @@
         <p:spPr>
           <a:xfrm>
             <a:off x="900000" y="4860000"/>
-            <a:ext cx="3835080" cy="310680"/>
+            <a:ext cx="3834360" cy="310680"/>
           </a:xfrm>
           <a:prstGeom prst="rect">
             <a:avLst/>
@@ -46485,7 +42407,7 @@
         <p:spPr>
           <a:xfrm>
             <a:off x="1019880" y="5190840"/>
-            <a:ext cx="3835080" cy="569160"/>
+            <a:ext cx="3834360" cy="569160"/>
           </a:xfrm>
           <a:prstGeom prst="rect">
             <a:avLst/>
@@ -46665,7 +42587,7 @@
         <p:spPr>
           <a:xfrm>
             <a:off x="5440680" y="1499760"/>
-            <a:ext cx="2920680" cy="264960"/>
+            <a:ext cx="2919960" cy="264960"/>
           </a:xfrm>
           <a:prstGeom prst="rect">
             <a:avLst/>
@@ -46753,7 +42675,7 @@
         <p:spPr>
           <a:xfrm>
             <a:off x="5440680" y="1764720"/>
-            <a:ext cx="6029640" cy="2056320"/>
+            <a:ext cx="6028920" cy="2055600"/>
           </a:xfrm>
           <a:prstGeom prst="rect">
             <a:avLst/>
@@ -46772,7 +42694,7 @@
         <p:spPr>
           <a:xfrm>
             <a:off x="5440680" y="1764720"/>
-            <a:ext cx="6029640" cy="2056320"/>
+            <a:ext cx="6028920" cy="2055600"/>
           </a:xfrm>
           <a:prstGeom prst="rect">
             <a:avLst/>
@@ -46820,7 +42742,7 @@
         <p:spPr>
           <a:xfrm>
             <a:off x="5440680" y="3875040"/>
-            <a:ext cx="2920680" cy="264960"/>
+            <a:ext cx="2919960" cy="264960"/>
           </a:xfrm>
           <a:prstGeom prst="rect">
             <a:avLst/>
@@ -46908,7 +42830,7 @@
         <p:spPr>
           <a:xfrm>
             <a:off x="5440680" y="4238640"/>
-            <a:ext cx="6029640" cy="2056320"/>
+            <a:ext cx="6028920" cy="2055600"/>
           </a:xfrm>
           <a:prstGeom prst="rect">
             <a:avLst/>
@@ -46927,7 +42849,7 @@
         <p:spPr>
           <a:xfrm>
             <a:off x="5440680" y="4238640"/>
-            <a:ext cx="6029640" cy="2056320"/>
+            <a:ext cx="6028920" cy="2055600"/>
           </a:xfrm>
           <a:prstGeom prst="rect">
             <a:avLst/>
@@ -46975,7 +42897,7 @@
         <p:spPr>
           <a:xfrm>
             <a:off x="621720" y="6437520"/>
-            <a:ext cx="10967400" cy="3600"/>
+            <a:ext cx="10966680" cy="2880"/>
           </a:xfrm>
           <a:prstGeom prst="rect">
             <a:avLst/>
@@ -47022,7 +42944,7 @@
         <p:spPr>
           <a:xfrm>
             <a:off x="685800" y="6473880"/>
-            <a:ext cx="8498520" cy="188640"/>
+            <a:ext cx="8497800" cy="188640"/>
           </a:xfrm>
           <a:prstGeom prst="rect">
             <a:avLst/>
@@ -47136,7 +43058,7 @@
         <p:spPr>
           <a:xfrm>
             <a:off x="720000" y="1800000"/>
-            <a:ext cx="3774960" cy="1074960"/>
+            <a:ext cx="3774240" cy="1074240"/>
           </a:xfrm>
           <a:prstGeom prst="rect">
             <a:avLst/>
@@ -47184,7 +43106,7 @@
         <p:spPr>
           <a:xfrm>
             <a:off x="720000" y="3182400"/>
-            <a:ext cx="3774960" cy="1074960"/>
+            <a:ext cx="3774240" cy="1074240"/>
           </a:xfrm>
           <a:prstGeom prst="rect">
             <a:avLst/>
@@ -47232,7 +43154,7 @@
         <p:spPr>
           <a:xfrm>
             <a:off x="713160" y="4680000"/>
-            <a:ext cx="3774960" cy="1254960"/>
+            <a:ext cx="3774240" cy="1254240"/>
           </a:xfrm>
           <a:prstGeom prst="rect">
             <a:avLst/>
@@ -47317,7 +43239,7 @@
         <p:spPr>
           <a:xfrm>
             <a:off x="0" y="0"/>
-            <a:ext cx="12184920" cy="65880"/>
+            <a:ext cx="12184200" cy="65160"/>
           </a:xfrm>
           <a:prstGeom prst="rect">
             <a:avLst/>
@@ -47684,7 +43606,7 @@
         <p:spPr>
           <a:xfrm>
             <a:off x="536040" y="1620000"/>
-            <a:ext cx="11157120" cy="3593160"/>
+            <a:ext cx="11156400" cy="3592440"/>
           </a:xfrm>
           <a:prstGeom prst="rect">
             <a:avLst/>
@@ -47703,7 +43625,7 @@
         <p:spPr>
           <a:xfrm>
             <a:off x="777240" y="5879520"/>
-            <a:ext cx="3418920" cy="285480"/>
+            <a:ext cx="3418200" cy="284760"/>
           </a:xfrm>
           <a:prstGeom prst="roundRect">
             <a:avLst>
@@ -47777,7 +43699,7 @@
         <p:spPr>
           <a:xfrm>
             <a:off x="4367880" y="5879520"/>
-            <a:ext cx="3418920" cy="285480"/>
+            <a:ext cx="3418200" cy="284760"/>
           </a:xfrm>
           <a:prstGeom prst="roundRect">
             <a:avLst>
@@ -47851,7 +43773,7 @@
         <p:spPr>
           <a:xfrm>
             <a:off x="7958160" y="5879520"/>
-            <a:ext cx="3418920" cy="285480"/>
+            <a:ext cx="3418200" cy="284760"/>
           </a:xfrm>
           <a:prstGeom prst="roundRect">
             <a:avLst>
@@ -47935,7 +43857,7 @@
         <p:spPr>
           <a:xfrm>
             <a:off x="457200" y="6565320"/>
-            <a:ext cx="11239920" cy="149040"/>
+            <a:ext cx="11239200" cy="149040"/>
           </a:xfrm>
           <a:prstGeom prst="rect">
             <a:avLst/>
@@ -48049,7 +43971,7 @@
         <p:spPr>
           <a:xfrm>
             <a:off x="0" y="0"/>
-            <a:ext cx="12184920" cy="65880"/>
+            <a:ext cx="12184200" cy="65160"/>
           </a:xfrm>
           <a:prstGeom prst="rect">
             <a:avLst/>
@@ -48274,7 +44196,7 @@
         <p:spPr>
           <a:xfrm>
             <a:off x="2803680" y="822960"/>
-            <a:ext cx="6091560" cy="242280"/>
+            <a:ext cx="6091200" cy="242280"/>
           </a:xfrm>
           <a:prstGeom prst="rect">
             <a:avLst/>
@@ -48371,7 +44293,7 @@
         <p:spPr>
           <a:xfrm>
             <a:off x="502920" y="2175480"/>
-            <a:ext cx="11194200" cy="2508840"/>
+            <a:ext cx="11193480" cy="2508120"/>
           </a:xfrm>
           <a:prstGeom prst="rect">
             <a:avLst/>
@@ -48390,7 +44312,7 @@
         <p:spPr>
           <a:xfrm>
             <a:off x="777240" y="5879520"/>
-            <a:ext cx="3418920" cy="285480"/>
+            <a:ext cx="3418200" cy="284760"/>
           </a:xfrm>
           <a:prstGeom prst="roundRect">
             <a:avLst>
@@ -48464,7 +44386,7 @@
         <p:spPr>
           <a:xfrm>
             <a:off x="4367880" y="5879520"/>
-            <a:ext cx="3418920" cy="285480"/>
+            <a:ext cx="3418200" cy="284760"/>
           </a:xfrm>
           <a:prstGeom prst="roundRect">
             <a:avLst>
@@ -48528,7 +44450,7 @@
         <p:spPr>
           <a:xfrm>
             <a:off x="7958160" y="5879520"/>
-            <a:ext cx="3418920" cy="285480"/>
+            <a:ext cx="3418200" cy="284760"/>
           </a:xfrm>
           <a:prstGeom prst="roundRect">
             <a:avLst>
@@ -48612,7 +44534,7 @@
         <p:spPr>
           <a:xfrm>
             <a:off x="457200" y="6565320"/>
-            <a:ext cx="11239920" cy="149040"/>
+            <a:ext cx="11239200" cy="149040"/>
           </a:xfrm>
           <a:prstGeom prst="rect">
             <a:avLst/>
